--- a/media/module8/slides.pptx
+++ b/media/module8/slides.pptx
@@ -31,6 +31,15 @@
     <p:sldId id="279" r:id="rId31"/>
     <p:sldId id="280" r:id="rId32"/>
     <p:sldId id="281" r:id="rId33"/>
+    <p:sldId id="282" r:id="rId34"/>
+    <p:sldId id="283" r:id="rId35"/>
+    <p:sldId id="284" r:id="rId36"/>
+    <p:sldId id="285" r:id="rId37"/>
+    <p:sldId id="286" r:id="rId38"/>
+    <p:sldId id="287" r:id="rId39"/>
+    <p:sldId id="288" r:id="rId40"/>
+    <p:sldId id="289" r:id="rId41"/>
+    <p:sldId id="290" r:id="rId42"/>
   </p:sldIdLst>
   <p:sldSz cx="12191695" cy="6858000" type="screen4x3"/>
   <p:notesSz cx="6858000" cy="9144000"/>
@@ -527,7 +536,7 @@
           <a:lstStyle/>
           <a:p>
             <a:r>
-              <a:t>From MODULE8 Design Architecture.</a:t>
+              <a:t>From docs/MODULE8.md — read guides before running demos.</a:t>
             </a:r>
           </a:p>
         </p:txBody>
@@ -597,7 +606,7 @@
           <a:lstStyle/>
           <a:p>
             <a:r>
-              <a:t>Hands-on: module8/examples/solutions/</a:t>
+              <a:t>Full detail in docs/MODULE8.md command reference.</a:t>
             </a:r>
           </a:p>
         </p:txBody>
@@ -667,7 +676,7 @@
           <a:lstStyle/>
           <a:p>
             <a:r>
-              <a:t>Hands-on: module8/examples/validate/</a:t>
+              <a:t>Run from course repository root.</a:t>
             </a:r>
           </a:p>
         </p:txBody>
@@ -737,7 +746,7 @@
           <a:lstStyle/>
           <a:p>
             <a:r>
-              <a:t>From MODULE8 Learning Outcomes.</a:t>
+              <a:t>Hands-on: module8/examples/capstone/</a:t>
             </a:r>
           </a:p>
         </p:txBody>
@@ -807,6 +816,356 @@
           <a:lstStyle/>
           <a:p>
             <a:r>
+              <a:t>Hands-on: module8/examples/checklist/</a:t>
+            </a:r>
+          </a:p>
+        </p:txBody>
+      </p:sp>
+      <p:sp>
+        <p:nvSpPr>
+          <p:cNvPr id="4" name="Slide Number Placeholder 3"/>
+          <p:cNvSpPr>
+            <a:spLocks noGrp="1"/>
+          </p:cNvSpPr>
+          <p:nvPr>
+            <p:ph type="sldNum" idx="5" sz="quarter"/>
+          </p:nvPr>
+        </p:nvSpPr>
+        <p:spPr/>
+      </p:sp>
+    </p:spTree>
+  </p:cSld>
+  <p:clrMapOvr>
+    <a:masterClrMapping/>
+  </p:clrMapOvr>
+</p:notes>
+</file>
+
+<file path=ppt/notesSlides/notesSlide14.xml><?xml version="1.0" encoding="utf-8"?>
+<p:notes xmlns:a="http://schemas.openxmlformats.org/drawingml/2006/main" xmlns:p="http://schemas.openxmlformats.org/presentationml/2006/main" xmlns:r="http://schemas.openxmlformats.org/officeDocument/2006/relationships">
+  <p:cSld>
+    <p:spTree>
+      <p:nvGrpSpPr>
+        <p:cNvPr id="1" name=""/>
+        <p:cNvGrpSpPr/>
+        <p:nvPr/>
+      </p:nvGrpSpPr>
+      <p:grpSpPr>
+        <a:xfrm>
+          <a:off x="0" y="0"/>
+          <a:ext cx="0" cy="0"/>
+          <a:chOff x="0" y="0"/>
+          <a:chExt cx="0" cy="0"/>
+        </a:xfrm>
+      </p:grpSpPr>
+      <p:sp>
+        <p:nvSpPr>
+          <p:cNvPr id="2" name="Slide Image Placeholder 1"/>
+          <p:cNvSpPr>
+            <a:spLocks noGrp="1"/>
+          </p:cNvSpPr>
+          <p:nvPr>
+            <p:ph type="sldImg" idx="2"/>
+          </p:nvPr>
+        </p:nvSpPr>
+        <p:spPr/>
+      </p:sp>
+      <p:sp>
+        <p:nvSpPr>
+          <p:cNvPr id="3" name="Notes Placeholder 2"/>
+          <p:cNvSpPr>
+            <a:spLocks noGrp="1"/>
+          </p:cNvSpPr>
+          <p:nvPr>
+            <p:ph type="body" idx="3" sz="quarter"/>
+          </p:nvPr>
+        </p:nvSpPr>
+        <p:spPr/>
+        <p:txBody>
+          <a:bodyPr/>
+          <a:lstStyle/>
+          <a:p>
+            <a:r>
+              <a:t>Hands-on: module8/examples/fill_guides/</a:t>
+            </a:r>
+          </a:p>
+        </p:txBody>
+      </p:sp>
+      <p:sp>
+        <p:nvSpPr>
+          <p:cNvPr id="4" name="Slide Number Placeholder 3"/>
+          <p:cNvSpPr>
+            <a:spLocks noGrp="1"/>
+          </p:cNvSpPr>
+          <p:nvPr>
+            <p:ph type="sldNum" idx="5" sz="quarter"/>
+          </p:nvPr>
+        </p:nvSpPr>
+        <p:spPr/>
+      </p:sp>
+    </p:spTree>
+  </p:cSld>
+  <p:clrMapOvr>
+    <a:masterClrMapping/>
+  </p:clrMapOvr>
+</p:notes>
+</file>
+
+<file path=ppt/notesSlides/notesSlide15.xml><?xml version="1.0" encoding="utf-8"?>
+<p:notes xmlns:a="http://schemas.openxmlformats.org/drawingml/2006/main" xmlns:p="http://schemas.openxmlformats.org/presentationml/2006/main" xmlns:r="http://schemas.openxmlformats.org/officeDocument/2006/relationships">
+  <p:cSld>
+    <p:spTree>
+      <p:nvGrpSpPr>
+        <p:cNvPr id="1" name=""/>
+        <p:cNvGrpSpPr/>
+        <p:nvPr/>
+      </p:nvGrpSpPr>
+      <p:grpSpPr>
+        <a:xfrm>
+          <a:off x="0" y="0"/>
+          <a:ext cx="0" cy="0"/>
+          <a:chOff x="0" y="0"/>
+          <a:chExt cx="0" cy="0"/>
+        </a:xfrm>
+      </p:grpSpPr>
+      <p:sp>
+        <p:nvSpPr>
+          <p:cNvPr id="2" name="Slide Image Placeholder 1"/>
+          <p:cNvSpPr>
+            <a:spLocks noGrp="1"/>
+          </p:cNvSpPr>
+          <p:nvPr>
+            <p:ph type="sldImg" idx="2"/>
+          </p:nvPr>
+        </p:nvSpPr>
+        <p:spPr/>
+      </p:sp>
+      <p:sp>
+        <p:nvSpPr>
+          <p:cNvPr id="3" name="Notes Placeholder 2"/>
+          <p:cNvSpPr>
+            <a:spLocks noGrp="1"/>
+          </p:cNvSpPr>
+          <p:nvPr>
+            <p:ph type="body" idx="3" sz="quarter"/>
+          </p:nvPr>
+        </p:nvSpPr>
+        <p:spPr/>
+        <p:txBody>
+          <a:bodyPr/>
+          <a:lstStyle/>
+          <a:p>
+            <a:r>
+              <a:t>Hands-on: module8/examples/solutions/</a:t>
+            </a:r>
+          </a:p>
+        </p:txBody>
+      </p:sp>
+      <p:sp>
+        <p:nvSpPr>
+          <p:cNvPr id="4" name="Slide Number Placeholder 3"/>
+          <p:cNvSpPr>
+            <a:spLocks noGrp="1"/>
+          </p:cNvSpPr>
+          <p:nvPr>
+            <p:ph type="sldNum" idx="5" sz="quarter"/>
+          </p:nvPr>
+        </p:nvSpPr>
+        <p:spPr/>
+      </p:sp>
+    </p:spTree>
+  </p:cSld>
+  <p:clrMapOvr>
+    <a:masterClrMapping/>
+  </p:clrMapOvr>
+</p:notes>
+</file>
+
+<file path=ppt/notesSlides/notesSlide16.xml><?xml version="1.0" encoding="utf-8"?>
+<p:notes xmlns:a="http://schemas.openxmlformats.org/drawingml/2006/main" xmlns:p="http://schemas.openxmlformats.org/presentationml/2006/main" xmlns:r="http://schemas.openxmlformats.org/officeDocument/2006/relationships">
+  <p:cSld>
+    <p:spTree>
+      <p:nvGrpSpPr>
+        <p:cNvPr id="1" name=""/>
+        <p:cNvGrpSpPr/>
+        <p:nvPr/>
+      </p:nvGrpSpPr>
+      <p:grpSpPr>
+        <a:xfrm>
+          <a:off x="0" y="0"/>
+          <a:ext cx="0" cy="0"/>
+          <a:chOff x="0" y="0"/>
+          <a:chExt cx="0" cy="0"/>
+        </a:xfrm>
+      </p:grpSpPr>
+      <p:sp>
+        <p:nvSpPr>
+          <p:cNvPr id="2" name="Slide Image Placeholder 1"/>
+          <p:cNvSpPr>
+            <a:spLocks noGrp="1"/>
+          </p:cNvSpPr>
+          <p:nvPr>
+            <p:ph type="sldImg" idx="2"/>
+          </p:nvPr>
+        </p:nvSpPr>
+        <p:spPr/>
+      </p:sp>
+      <p:sp>
+        <p:nvSpPr>
+          <p:cNvPr id="3" name="Notes Placeholder 2"/>
+          <p:cNvSpPr>
+            <a:spLocks noGrp="1"/>
+          </p:cNvSpPr>
+          <p:nvPr>
+            <p:ph type="body" idx="3" sz="quarter"/>
+          </p:nvPr>
+        </p:nvSpPr>
+        <p:spPr/>
+        <p:txBody>
+          <a:bodyPr/>
+          <a:lstStyle/>
+          <a:p>
+            <a:r>
+              <a:t>Hands-on: module8/examples/validate/</a:t>
+            </a:r>
+          </a:p>
+        </p:txBody>
+      </p:sp>
+      <p:sp>
+        <p:nvSpPr>
+          <p:cNvPr id="4" name="Slide Number Placeholder 3"/>
+          <p:cNvSpPr>
+            <a:spLocks noGrp="1"/>
+          </p:cNvSpPr>
+          <p:nvPr>
+            <p:ph type="sldNum" idx="5" sz="quarter"/>
+          </p:nvPr>
+        </p:nvSpPr>
+        <p:spPr/>
+      </p:sp>
+    </p:spTree>
+  </p:cSld>
+  <p:clrMapOvr>
+    <a:masterClrMapping/>
+  </p:clrMapOvr>
+</p:notes>
+</file>
+
+<file path=ppt/notesSlides/notesSlide17.xml><?xml version="1.0" encoding="utf-8"?>
+<p:notes xmlns:a="http://schemas.openxmlformats.org/drawingml/2006/main" xmlns:p="http://schemas.openxmlformats.org/presentationml/2006/main" xmlns:r="http://schemas.openxmlformats.org/officeDocument/2006/relationships">
+  <p:cSld>
+    <p:spTree>
+      <p:nvGrpSpPr>
+        <p:cNvPr id="1" name=""/>
+        <p:cNvGrpSpPr/>
+        <p:nvPr/>
+      </p:nvGrpSpPr>
+      <p:grpSpPr>
+        <a:xfrm>
+          <a:off x="0" y="0"/>
+          <a:ext cx="0" cy="0"/>
+          <a:chOff x="0" y="0"/>
+          <a:chExt cx="0" cy="0"/>
+        </a:xfrm>
+      </p:grpSpPr>
+      <p:sp>
+        <p:nvSpPr>
+          <p:cNvPr id="2" name="Slide Image Placeholder 1"/>
+          <p:cNvSpPr>
+            <a:spLocks noGrp="1"/>
+          </p:cNvSpPr>
+          <p:nvPr>
+            <p:ph type="sldImg" idx="2"/>
+          </p:nvPr>
+        </p:nvSpPr>
+        <p:spPr/>
+      </p:sp>
+      <p:sp>
+        <p:nvSpPr>
+          <p:cNvPr id="3" name="Notes Placeholder 2"/>
+          <p:cNvSpPr>
+            <a:spLocks noGrp="1"/>
+          </p:cNvSpPr>
+          <p:nvPr>
+            <p:ph type="body" idx="3" sz="quarter"/>
+          </p:nvPr>
+        </p:nvSpPr>
+        <p:spPr/>
+        <p:txBody>
+          <a:bodyPr/>
+          <a:lstStyle/>
+          <a:p>
+            <a:r>
+              <a:t>From MODULE8 Learning Outcomes.</a:t>
+            </a:r>
+          </a:p>
+        </p:txBody>
+      </p:sp>
+      <p:sp>
+        <p:nvSpPr>
+          <p:cNvPr id="4" name="Slide Number Placeholder 3"/>
+          <p:cNvSpPr>
+            <a:spLocks noGrp="1"/>
+          </p:cNvSpPr>
+          <p:nvPr>
+            <p:ph type="sldNum" idx="5" sz="quarter"/>
+          </p:nvPr>
+        </p:nvSpPr>
+        <p:spPr/>
+      </p:sp>
+    </p:spTree>
+  </p:cSld>
+  <p:clrMapOvr>
+    <a:masterClrMapping/>
+  </p:clrMapOvr>
+</p:notes>
+</file>
+
+<file path=ppt/notesSlides/notesSlide18.xml><?xml version="1.0" encoding="utf-8"?>
+<p:notes xmlns:a="http://schemas.openxmlformats.org/drawingml/2006/main" xmlns:p="http://schemas.openxmlformats.org/presentationml/2006/main" xmlns:r="http://schemas.openxmlformats.org/officeDocument/2006/relationships">
+  <p:cSld>
+    <p:spTree>
+      <p:nvGrpSpPr>
+        <p:cNvPr id="1" name=""/>
+        <p:cNvGrpSpPr/>
+        <p:nvPr/>
+      </p:nvGrpSpPr>
+      <p:grpSpPr>
+        <a:xfrm>
+          <a:off x="0" y="0"/>
+          <a:ext cx="0" cy="0"/>
+          <a:chOff x="0" y="0"/>
+          <a:chExt cx="0" cy="0"/>
+        </a:xfrm>
+      </p:grpSpPr>
+      <p:sp>
+        <p:nvSpPr>
+          <p:cNvPr id="2" name="Slide Image Placeholder 1"/>
+          <p:cNvSpPr>
+            <a:spLocks noGrp="1"/>
+          </p:cNvSpPr>
+          <p:nvPr>
+            <p:ph type="sldImg" idx="2"/>
+          </p:nvPr>
+        </p:nvSpPr>
+        <p:spPr/>
+      </p:sp>
+      <p:sp>
+        <p:nvSpPr>
+          <p:cNvPr id="3" name="Notes Placeholder 2"/>
+          <p:cNvSpPr>
+            <a:spLocks noGrp="1"/>
+          </p:cNvSpPr>
+          <p:nvPr>
+            <p:ph type="body" idx="3" sz="quarter"/>
+          </p:nvPr>
+        </p:nvSpPr>
+        <p:spPr/>
+        <p:txBody>
+          <a:bodyPr/>
+          <a:lstStyle/>
+          <a:p>
+            <a:r>
               <a:t>From MODULE8 Learning Outcomes.</a:t>
             </a:r>
           </a:p>
@@ -947,7 +1306,7 @@
           <a:lstStyle/>
           <a:p>
             <a:r>
-              <a:t>From MODULE8 Verification &amp; Testing Methods.</a:t>
+              <a:t>From MODULE8 Design Architecture.</a:t>
             </a:r>
           </a:p>
         </p:txBody>
@@ -1017,7 +1376,7 @@
           <a:lstStyle/>
           <a:p>
             <a:r>
-              <a:t>From MODULE8 Verification &amp; Testing Methods.</a:t>
+              <a:t>From MODULE8 Design Architecture.</a:t>
             </a:r>
           </a:p>
         </p:txBody>
@@ -1087,7 +1446,7 @@
           <a:lstStyle/>
           <a:p>
             <a:r>
-              <a:t>From MODULE8 Verification &amp; Testing Methods.</a:t>
+              <a:t>Trace while running module8/EXAMPLES.md labs.</a:t>
             </a:r>
           </a:p>
         </p:txBody>
@@ -1157,7 +1516,7 @@
           <a:lstStyle/>
           <a:p>
             <a:r>
-              <a:t>Run from course repository root.</a:t>
+              <a:t>From MODULE8 Verification &amp; Testing Methods.</a:t>
             </a:r>
           </a:p>
         </p:txBody>
@@ -1227,7 +1586,7 @@
           <a:lstStyle/>
           <a:p>
             <a:r>
-              <a:t>Hands-on: module8/examples/capstone/</a:t>
+              <a:t>From MODULE8 Verification &amp; Testing Methods.</a:t>
             </a:r>
           </a:p>
         </p:txBody>
@@ -1297,7 +1656,7 @@
           <a:lstStyle/>
           <a:p>
             <a:r>
-              <a:t>Hands-on: module8/examples/checklist/</a:t>
+              <a:t>From MODULE8 Verification &amp; Testing Methods.</a:t>
             </a:r>
           </a:p>
         </p:txBody>
@@ -1367,7 +1726,7 @@
           <a:lstStyle/>
           <a:p>
             <a:r>
-              <a:t>Hands-on: module8/examples/fill_guides/</a:t>
+              <a:t>Full detail in docs/MODULE8.md command reference.</a:t>
             </a:r>
           </a:p>
         </p:txBody>
@@ -4499,8 +4858,8 @@
         </p:nvSpPr>
         <p:spPr>
           <a:xfrm>
-            <a:off x="548640" y="2743200"/>
-            <a:ext cx="11064240" cy="1371600"/>
+            <a:off x="548640" y="411480"/>
+            <a:ext cx="11064240" cy="777240"/>
           </a:xfrm>
           <a:prstGeom prst="rect">
             <a:avLst/>
@@ -4513,11 +4872,11 @@
           </a:bodyPr>
           <a:lstStyle/>
           <a:p>
-            <a:pPr algn="ctr">
-              <a:lnSpc>
-                <a:spcPts val="2200"/>
-              </a:lnSpc>
-              <a:defRPr sz="3600" b="1">
+            <a:pPr>
+              <a:lnSpc>
+                <a:spcPts val="2200"/>
+              </a:lnSpc>
+              <a:defRPr sz="2800" b="1">
                 <a:solidFill>
                   <a:srgbClr val="1A1A2E"/>
                 </a:solidFill>
@@ -4525,7 +4884,7 @@
               </a:defRPr>
             </a:pPr>
             <a:r>
-              <a:t>Verification &amp; testing methods</a:t>
+              <a:t>2. End-to-end verification package</a:t>
             </a:r>
           </a:p>
         </p:txBody>
@@ -4533,6 +4892,167 @@
       <p:sp>
         <p:nvSpPr>
           <p:cNvPr id="3" name="TextBox 2"/>
+          <p:cNvSpPr txBox="1"/>
+          <p:nvPr/>
+        </p:nvSpPr>
+        <p:spPr>
+          <a:xfrm>
+            <a:off x="548640" y="1234440"/>
+            <a:ext cx="5303520" cy="4754880"/>
+          </a:xfrm>
+          <a:prstGeom prst="rect">
+            <a:avLst/>
+          </a:prstGeom>
+          <a:noFill/>
+        </p:spPr>
+        <p:txBody>
+          <a:bodyPr wrap="square">
+            <a:noAutofit/>
+          </a:bodyPr>
+          <a:lstStyle/>
+          <a:p>
+            <a:pPr>
+              <a:lnSpc>
+                <a:spcPts val="2200"/>
+              </a:lnSpc>
+              <a:spcAft>
+                <a:spcPts val="1000"/>
+              </a:spcAft>
+              <a:defRPr sz="2000" b="0">
+                <a:solidFill>
+                  <a:srgbClr val="333333"/>
+                </a:solidFill>
+                <a:latin typeface="Calibri"/>
+              </a:defRPr>
+            </a:pPr>
+            <a:r>
+              <a:t>• Single coherent verification</a:t>
+            </a:r>
+          </a:p>
+          <a:p>
+            <a:pPr>
+              <a:lnSpc>
+                <a:spcPts val="2200"/>
+              </a:lnSpc>
+              <a:spcAft>
+                <a:spcPts val="1000"/>
+              </a:spcAft>
+              <a:defRPr sz="2000" b="0">
+                <a:solidFill>
+                  <a:srgbClr val="333333"/>
+                </a:solidFill>
+                <a:latin typeface="Calibri"/>
+              </a:defRPr>
+            </a:pPr>
+            <a:r>
+              <a:t>      solution or VIP another team can</a:t>
+            </a:r>
+          </a:p>
+          <a:p>
+            <a:pPr>
+              <a:lnSpc>
+                <a:spcPts val="2200"/>
+              </a:lnSpc>
+              <a:spcAft>
+                <a:spcPts val="1000"/>
+              </a:spcAft>
+              <a:defRPr sz="2000" b="0">
+                <a:solidFill>
+                  <a:srgbClr val="333333"/>
+                </a:solidFill>
+                <a:latin typeface="Calibri"/>
+              </a:defRPr>
+            </a:pPr>
+            <a:r>
+              <a:t>      integrate.</a:t>
+            </a:r>
+          </a:p>
+          <a:p>
+            <a:pPr>
+              <a:lnSpc>
+                <a:spcPts val="2200"/>
+              </a:lnSpc>
+              <a:spcAft>
+                <a:spcPts val="1000"/>
+              </a:spcAft>
+              <a:defRPr sz="2000" b="0">
+                <a:solidFill>
+                  <a:srgbClr val="333333"/>
+                </a:solidFill>
+                <a:latin typeface="Calibri"/>
+              </a:defRPr>
+            </a:pPr>
+            <a:r>
+              <a:t>• Traceability matrix from</a:t>
+            </a:r>
+          </a:p>
+          <a:p>
+            <a:pPr>
+              <a:lnSpc>
+                <a:spcPts val="2200"/>
+              </a:lnSpc>
+              <a:spcAft>
+                <a:spcPts val="1000"/>
+              </a:spcAft>
+              <a:defRPr sz="2000" b="0">
+                <a:solidFill>
+                  <a:srgbClr val="333333"/>
+                </a:solidFill>
+                <a:latin typeface="Calibri"/>
+              </a:defRPr>
+            </a:pPr>
+            <a:r>
+              <a:t>      requirements through tests,</a:t>
+            </a:r>
+          </a:p>
+          <a:p>
+            <a:pPr>
+              <a:lnSpc>
+                <a:spcPts val="2200"/>
+              </a:lnSpc>
+              <a:spcAft>
+                <a:spcPts val="1000"/>
+              </a:spcAft>
+              <a:defRPr sz="2000" b="0">
+                <a:solidFill>
+                  <a:srgbClr val="333333"/>
+                </a:solidFill>
+                <a:latin typeface="Calibri"/>
+              </a:defRPr>
+            </a:pPr>
+            <a:r>
+              <a:t>      coverage, and sign-off criteria.</a:t>
+            </a:r>
+          </a:p>
+        </p:txBody>
+      </p:sp>
+      <p:pic>
+        <p:nvPicPr>
+          <p:cNvPr id="4" name="Picture 3" descr="verification_architecture.png"/>
+          <p:cNvPicPr>
+            <a:picLocks noChangeAspect="1"/>
+          </p:cNvPicPr>
+          <p:nvPr/>
+        </p:nvPicPr>
+        <p:blipFill>
+          <a:blip r:embed="rId2"/>
+          <a:stretch>
+            <a:fillRect/>
+          </a:stretch>
+        </p:blipFill>
+        <p:spPr>
+          <a:xfrm>
+            <a:off x="6172200" y="2094547"/>
+            <a:ext cx="5394960" cy="3034665"/>
+          </a:xfrm>
+          <a:prstGeom prst="rect">
+            <a:avLst/>
+          </a:prstGeom>
+        </p:spPr>
+      </p:pic>
+      <p:sp>
+        <p:nvSpPr>
+          <p:cNvPr id="5" name="TextBox 4"/>
           <p:cNvSpPr txBox="1"/>
           <p:nvPr/>
         </p:nvSpPr>
@@ -4621,7 +5141,7 @@
               </a:defRPr>
             </a:pPr>
             <a:r>
-              <a:t>1. Full-lifecycle testing</a:t>
+              <a:t>3. Capstone delivery and handoff workflow</a:t>
             </a:r>
           </a:p>
         </p:txBody>
@@ -4635,7 +5155,7 @@
         <p:spPr>
           <a:xfrm>
             <a:off x="548640" y="1234440"/>
-            <a:ext cx="5303520" cy="4754880"/>
+            <a:ext cx="11064240" cy="4937760"/>
           </a:xfrm>
           <a:prstGeom prst="rect">
             <a:avLst/>
@@ -4663,7 +5183,7 @@
               </a:defRPr>
             </a:pPr>
             <a:r>
-              <a:t>• Execute planned regression tiers</a:t>
+              <a:t>• Plan: consolidate Modules 1–2 plans into capstone</a:t>
             </a:r>
           </a:p>
           <a:p>
@@ -4682,7 +5202,7 @@
               </a:defRPr>
             </a:pPr>
             <a:r>
-              <a:t>      with coverage merge and</a:t>
+              <a:t>      scope and test/regression strategy.</a:t>
             </a:r>
           </a:p>
           <a:p>
@@ -4701,7 +5221,7 @@
               </a:defRPr>
             </a:pPr>
             <a:r>
-              <a:t>      documented closure status.</a:t>
+              <a:t>• Build: mature env, checkers, coverage, and VIP</a:t>
             </a:r>
           </a:p>
           <a:p>
@@ -4720,7 +5240,7 @@
               </a:defRPr>
             </a:pPr>
             <a:r>
-              <a:t>• Include negative, stress, and</a:t>
+              <a:t>      (Module 4–7 artifacts) under `rtl/` and `tb/`.</a:t>
             </a:r>
           </a:p>
           <a:p>
@@ -4739,7 +5259,7 @@
               </a:defRPr>
             </a:pPr>
             <a:r>
-              <a:t>      protocol/rule tests appropriate</a:t>
+              <a:t>• Execute: run sanity → core → stress tiers; merge</a:t>
             </a:r>
           </a:p>
           <a:p>
@@ -4758,38 +5278,90 @@
               </a:defRPr>
             </a:pPr>
             <a:r>
-              <a:t>      to your capstone DUT.</a:t>
-            </a:r>
-          </a:p>
-        </p:txBody>
-      </p:sp>
-      <p:pic>
-        <p:nvPicPr>
-          <p:cNvPr id="4" name="Picture 3" descr="testing_methods.png"/>
-          <p:cNvPicPr>
-            <a:picLocks noChangeAspect="1"/>
-          </p:cNvPicPr>
-          <p:nvPr/>
-        </p:nvPicPr>
-        <p:blipFill>
-          <a:blip r:embed="rId2"/>
-          <a:stretch>
-            <a:fillRect/>
-          </a:stretch>
-        </p:blipFill>
-        <p:spPr>
-          <a:xfrm>
-            <a:off x="6172200" y="2094547"/>
-            <a:ext cx="5394960" cy="3034665"/>
-          </a:xfrm>
-          <a:prstGeom prst="rect">
-            <a:avLst/>
-          </a:prstGeom>
-        </p:spPr>
-      </p:pic>
-      <p:sp>
-        <p:nvSpPr>
-          <p:cNvPr id="5" name="TextBox 4"/>
+              <a:t>      coverage; triage failures with saved seeds.</a:t>
+            </a:r>
+          </a:p>
+          <a:p>
+            <a:pPr>
+              <a:lnSpc>
+                <a:spcPts val="2200"/>
+              </a:lnSpc>
+              <a:spcAft>
+                <a:spcPts val="1000"/>
+              </a:spcAft>
+              <a:defRPr sz="2000" b="0">
+                <a:solidFill>
+                  <a:srgbClr val="333333"/>
+                </a:solidFill>
+                <a:latin typeface="Calibri"/>
+              </a:defRPr>
+            </a:pPr>
+            <a:r>
+              <a:t>• Sign off: meet exit criteria in</a:t>
+            </a:r>
+          </a:p>
+          <a:p>
+            <a:pPr>
+              <a:lnSpc>
+                <a:spcPts val="2200"/>
+              </a:lnSpc>
+              <a:spcAft>
+                <a:spcPts val="1000"/>
+              </a:spcAft>
+              <a:defRPr sz="2000" b="0">
+                <a:solidFill>
+                  <a:srgbClr val="333333"/>
+                </a:solidFill>
+                <a:latin typeface="Calibri"/>
+              </a:defRPr>
+            </a:pPr>
+            <a:r>
+              <a:t>      `CAPSTONE_PROJECT.md`; complete `CHECKLIST.md`.</a:t>
+            </a:r>
+          </a:p>
+          <a:p>
+            <a:pPr>
+              <a:lnSpc>
+                <a:spcPts val="2200"/>
+              </a:lnSpc>
+              <a:spcAft>
+                <a:spcPts val="1000"/>
+              </a:spcAft>
+              <a:defRPr sz="2000" b="0">
+                <a:solidFill>
+                  <a:srgbClr val="333333"/>
+                </a:solidFill>
+                <a:latin typeface="Calibri"/>
+              </a:defRPr>
+            </a:pPr>
+            <a:r>
+              <a:t>• Deliver: package RTL, UVM env, tests, scripts, and</a:t>
+            </a:r>
+          </a:p>
+          <a:p>
+            <a:pPr>
+              <a:lnSpc>
+                <a:spcPts val="2200"/>
+              </a:lnSpc>
+              <a:spcAft>
+                <a:spcPts val="1000"/>
+              </a:spcAft>
+              <a:defRPr sz="2000" b="0">
+                <a:solidFill>
+                  <a:srgbClr val="333333"/>
+                </a:solidFill>
+                <a:latin typeface="Calibri"/>
+              </a:defRPr>
+            </a:pPr>
+            <a:r>
+              <a:t>      user docs for another team to integrate.</a:t>
+            </a:r>
+          </a:p>
+        </p:txBody>
+      </p:sp>
+      <p:sp>
+        <p:nvSpPr>
+          <p:cNvPr id="4" name="TextBox 3"/>
           <p:cNvSpPr txBox="1"/>
           <p:nvPr/>
         </p:nvSpPr>
@@ -4878,7 +5450,7 @@
               </a:defRPr>
             </a:pPr>
             <a:r>
-              <a:t>2. Sign-off and delivery testing</a:t>
+              <a:t>Capstone project plan template</a:t>
             </a:r>
           </a:p>
         </p:txBody>
@@ -4891,13 +5463,15 @@
         </p:nvSpPr>
         <p:spPr>
           <a:xfrm>
-            <a:off x="548640" y="1234440"/>
-            <a:ext cx="11064240" cy="4937760"/>
+            <a:off x="548640" y="1143000"/>
+            <a:ext cx="11064240" cy="5029200"/>
           </a:xfrm>
           <a:prstGeom prst="rect">
             <a:avLst/>
           </a:prstGeom>
-          <a:noFill/>
+          <a:solidFill>
+            <a:srgbClr val="F4F4F4"/>
+          </a:solidFill>
         </p:spPr>
         <p:txBody>
           <a:bodyPr wrap="square">
@@ -4910,75 +5484,323 @@
                 <a:spcPts val="2200"/>
               </a:lnSpc>
               <a:spcAft>
-                <a:spcPts val="1000"/>
-              </a:spcAft>
-              <a:defRPr sz="2000" b="0">
-                <a:solidFill>
-                  <a:srgbClr val="333333"/>
-                </a:solidFill>
-                <a:latin typeface="Calibri"/>
-              </a:defRPr>
-            </a:pPr>
-            <a:r>
-              <a:t>• Define explicit exit criteria (coverage %, bug bar,</a:t>
-            </a:r>
-          </a:p>
-          <a:p>
-            <a:pPr>
-              <a:lnSpc>
-                <a:spcPts val="2200"/>
-              </a:lnSpc>
-              <a:spcAft>
-                <a:spcPts val="1000"/>
-              </a:spcAft>
-              <a:defRPr sz="2000" b="0">
-                <a:solidFill>
-                  <a:srgbClr val="333333"/>
-                </a:solidFill>
-                <a:latin typeface="Calibri"/>
-              </a:defRPr>
-            </a:pPr>
-            <a:r>
-              <a:t>      stability window).</a:t>
-            </a:r>
-          </a:p>
-          <a:p>
-            <a:pPr>
-              <a:lnSpc>
-                <a:spcPts val="2200"/>
-              </a:lnSpc>
-              <a:spcAft>
-                <a:spcPts val="1000"/>
-              </a:spcAft>
-              <a:defRPr sz="2000" b="0">
-                <a:solidFill>
-                  <a:srgbClr val="333333"/>
-                </a:solidFill>
-                <a:latin typeface="Calibri"/>
-              </a:defRPr>
-            </a:pPr>
-            <a:r>
-              <a:t>• Retrospective: what worked, gaps, and improvements</a:t>
-            </a:r>
-          </a:p>
-          <a:p>
-            <a:pPr>
-              <a:lnSpc>
-                <a:spcPts val="2200"/>
-              </a:lnSpc>
-              <a:spcAft>
-                <a:spcPts val="1000"/>
-              </a:spcAft>
-              <a:defRPr sz="2000" b="0">
-                <a:solidFill>
-                  <a:srgbClr val="333333"/>
-                </a:solidFill>
-                <a:latin typeface="Calibri"/>
-              </a:defRPr>
-            </a:pPr>
-            <a:r>
-              <a:t>      for a real project review.</a:t>
-            </a:r>
+                <a:spcPts val="400"/>
+              </a:spcAft>
+              <a:defRPr sz="2000" b="0">
+                <a:solidFill>
+                  <a:srgbClr val="333333"/>
+                </a:solidFill>
+                <a:latin typeface="Consolas"/>
+              </a:defRPr>
+            </a:pPr>
+            <a:r>
+              <a:t># Capstone Project Plan (Module 8)</a:t>
+            </a:r>
+          </a:p>
+          <a:p>
+            <a:pPr>
+              <a:lnSpc>
+                <a:spcPts val="2200"/>
+              </a:lnSpc>
+              <a:spcAft>
+                <a:spcPts val="400"/>
+              </a:spcAft>
+              <a:defRPr sz="2000" b="0">
+                <a:solidFill>
+                  <a:srgbClr val="333333"/>
+                </a:solidFill>
+                <a:latin typeface="Consolas"/>
+              </a:defRPr>
+            </a:pPr>
+          </a:p>
+          <a:p>
+            <a:pPr>
+              <a:lnSpc>
+                <a:spcPts val="2200"/>
+              </a:lnSpc>
+              <a:spcAft>
+                <a:spcPts val="400"/>
+              </a:spcAft>
+              <a:defRPr sz="2000" b="0">
+                <a:solidFill>
+                  <a:srgbClr val="333333"/>
+                </a:solidFill>
+                <a:latin typeface="Consolas"/>
+              </a:defRPr>
+            </a:pPr>
+            <a:r>
+              <a:t>&gt; **Purpose**: Define and track your major end‑to‑end verification or</a:t>
+            </a:r>
+          </a:p>
+          <a:p>
+            <a:pPr>
+              <a:lnSpc>
+                <a:spcPts val="2200"/>
+              </a:lnSpc>
+              <a:spcAft>
+                <a:spcPts val="400"/>
+              </a:spcAft>
+              <a:defRPr sz="2000" b="0">
+                <a:solidFill>
+                  <a:srgbClr val="333333"/>
+                </a:solidFill>
+                <a:latin typeface="Consolas"/>
+              </a:defRPr>
+            </a:pPr>
+            <a:r>
+              <a:t>VIP project.</a:t>
+            </a:r>
+          </a:p>
+          <a:p>
+            <a:pPr>
+              <a:lnSpc>
+                <a:spcPts val="2200"/>
+              </a:lnSpc>
+              <a:spcAft>
+                <a:spcPts val="400"/>
+              </a:spcAft>
+              <a:defRPr sz="2000" b="0">
+                <a:solidFill>
+                  <a:srgbClr val="333333"/>
+                </a:solidFill>
+                <a:latin typeface="Consolas"/>
+              </a:defRPr>
+            </a:pPr>
+            <a:r>
+              <a:t>&gt; **Module**: 8 – Capstone: End‑to‑End Verification &amp; VIP Delivery</a:t>
+            </a:r>
+          </a:p>
+          <a:p>
+            <a:pPr>
+              <a:lnSpc>
+                <a:spcPts val="2200"/>
+              </a:lnSpc>
+              <a:spcAft>
+                <a:spcPts val="400"/>
+              </a:spcAft>
+              <a:defRPr sz="2000" b="0">
+                <a:solidFill>
+                  <a:srgbClr val="333333"/>
+                </a:solidFill>
+                <a:latin typeface="Consolas"/>
+              </a:defRPr>
+            </a:pPr>
+            <a:r>
+              <a:t>(SV/UVM)</a:t>
+            </a:r>
+          </a:p>
+          <a:p>
+            <a:pPr>
+              <a:lnSpc>
+                <a:spcPts val="2200"/>
+              </a:lnSpc>
+              <a:spcAft>
+                <a:spcPts val="400"/>
+              </a:spcAft>
+              <a:defRPr sz="2000" b="0">
+                <a:solidFill>
+                  <a:srgbClr val="333333"/>
+                </a:solidFill>
+                <a:latin typeface="Consolas"/>
+              </a:defRPr>
+            </a:pPr>
+          </a:p>
+          <a:p>
+            <a:pPr>
+              <a:lnSpc>
+                <a:spcPts val="2200"/>
+              </a:lnSpc>
+              <a:spcAft>
+                <a:spcPts val="400"/>
+              </a:spcAft>
+              <a:defRPr sz="2000" b="0">
+                <a:solidFill>
+                  <a:srgbClr val="333333"/>
+                </a:solidFill>
+                <a:latin typeface="Consolas"/>
+              </a:defRPr>
+            </a:pPr>
+            <a:r>
+              <a:t>&gt; **Instructions**: Fill in this document for your design. Copy from</a:t>
+            </a:r>
+          </a:p>
+          <a:p>
+            <a:pPr>
+              <a:lnSpc>
+                <a:spcPts val="2200"/>
+              </a:lnSpc>
+              <a:spcAft>
+                <a:spcPts val="400"/>
+              </a:spcAft>
+              <a:defRPr sz="2000" b="0">
+                <a:solidFill>
+                  <a:srgbClr val="333333"/>
+                </a:solidFill>
+                <a:latin typeface="Consolas"/>
+              </a:defRPr>
+            </a:pPr>
+            <a:r>
+              <a:t>`module8/templates/` if needed, or edit the file in `module8/` directly.</a:t>
+            </a:r>
+          </a:p>
+          <a:p>
+            <a:pPr>
+              <a:lnSpc>
+                <a:spcPts val="2200"/>
+              </a:lnSpc>
+              <a:spcAft>
+                <a:spcPts val="400"/>
+              </a:spcAft>
+              <a:defRPr sz="2000" b="0">
+                <a:solidFill>
+                  <a:srgbClr val="333333"/>
+                </a:solidFill>
+                <a:latin typeface="Consolas"/>
+              </a:defRPr>
+            </a:pPr>
+            <a:r>
+              <a:t>Reference: `module8/.solutions/`.</a:t>
+            </a:r>
+          </a:p>
+          <a:p>
+            <a:pPr>
+              <a:lnSpc>
+                <a:spcPts val="2200"/>
+              </a:lnSpc>
+              <a:spcAft>
+                <a:spcPts val="400"/>
+              </a:spcAft>
+              <a:defRPr sz="2000" b="0">
+                <a:solidFill>
+                  <a:srgbClr val="333333"/>
+                </a:solidFill>
+                <a:latin typeface="Consolas"/>
+              </a:defRPr>
+            </a:pPr>
+          </a:p>
+          <a:p>
+            <a:pPr>
+              <a:lnSpc>
+                <a:spcPts val="2200"/>
+              </a:lnSpc>
+              <a:spcAft>
+                <a:spcPts val="400"/>
+              </a:spcAft>
+              <a:defRPr sz="2000" b="0">
+                <a:solidFill>
+                  <a:srgbClr val="333333"/>
+                </a:solidFill>
+                <a:latin typeface="Consolas"/>
+              </a:defRPr>
+            </a:pPr>
+            <a:r>
+              <a:t>## 1. Capstone Choice</a:t>
+            </a:r>
+          </a:p>
+          <a:p>
+            <a:pPr>
+              <a:lnSpc>
+                <a:spcPts val="2200"/>
+              </a:lnSpc>
+              <a:spcAft>
+                <a:spcPts val="400"/>
+              </a:spcAft>
+              <a:defRPr sz="2000" b="0">
+                <a:solidFill>
+                  <a:srgbClr val="333333"/>
+                </a:solidFill>
+                <a:latin typeface="Consolas"/>
+              </a:defRPr>
+            </a:pPr>
+          </a:p>
+          <a:p>
+            <a:pPr>
+              <a:lnSpc>
+                <a:spcPts val="2200"/>
+              </a:lnSpc>
+              <a:spcAft>
+                <a:spcPts val="400"/>
+              </a:spcAft>
+              <a:defRPr sz="2000" b="0">
+                <a:solidFill>
+                  <a:srgbClr val="333333"/>
+                </a:solidFill>
+                <a:latin typeface="Consolas"/>
+              </a:defRPr>
+            </a:pPr>
+            <a:r>
+              <a:t>&lt;!-- TODO: Project ID/Name, brief description, type</a:t>
+            </a:r>
+          </a:p>
+          <a:p>
+            <a:pPr>
+              <a:lnSpc>
+                <a:spcPts val="2200"/>
+              </a:lnSpc>
+              <a:spcAft>
+                <a:spcPts val="400"/>
+              </a:spcAft>
+              <a:defRPr sz="2000" b="0">
+                <a:solidFill>
+                  <a:srgbClr val="333333"/>
+                </a:solidFill>
+                <a:latin typeface="Consolas"/>
+              </a:defRPr>
+            </a:pPr>
+            <a:r>
+              <a:t>(block/subsystem/VIP). --&gt;</a:t>
+            </a:r>
+          </a:p>
+          <a:p>
+            <a:pPr>
+              <a:lnSpc>
+                <a:spcPts val="2200"/>
+              </a:lnSpc>
+              <a:spcAft>
+                <a:spcPts val="400"/>
+              </a:spcAft>
+              <a:defRPr sz="2000" b="0">
+                <a:solidFill>
+                  <a:srgbClr val="333333"/>
+                </a:solidFill>
+                <a:latin typeface="Consolas"/>
+              </a:defRPr>
+            </a:pPr>
+          </a:p>
+          <a:p>
+            <a:pPr>
+              <a:lnSpc>
+                <a:spcPts val="2200"/>
+              </a:lnSpc>
+              <a:spcAft>
+                <a:spcPts val="400"/>
+              </a:spcAft>
+              <a:defRPr sz="2000" b="0">
+                <a:solidFill>
+                  <a:srgbClr val="333333"/>
+                </a:solidFill>
+                <a:latin typeface="Consolas"/>
+              </a:defRPr>
+            </a:pPr>
+            <a:r>
+              <a:t>## 2. Requirements and Goals</a:t>
+            </a:r>
+          </a:p>
+          <a:p>
+            <a:pPr>
+              <a:lnSpc>
+                <a:spcPts val="2200"/>
+              </a:lnSpc>
+              <a:spcAft>
+                <a:spcPts val="400"/>
+              </a:spcAft>
+              <a:defRPr sz="2000" b="0">
+                <a:solidFill>
+                  <a:srgbClr val="333333"/>
+                </a:solidFill>
+                <a:latin typeface="Consolas"/>
+              </a:defRPr>
+            </a:pPr>
           </a:p>
         </p:txBody>
       </p:sp>
@@ -5047,8 +5869,8 @@
         </p:nvSpPr>
         <p:spPr>
           <a:xfrm>
-            <a:off x="548640" y="411480"/>
-            <a:ext cx="11064240" cy="777240"/>
+            <a:off x="548640" y="2743200"/>
+            <a:ext cx="11064240" cy="1371600"/>
           </a:xfrm>
           <a:prstGeom prst="rect">
             <a:avLst/>
@@ -5061,11 +5883,11 @@
           </a:bodyPr>
           <a:lstStyle/>
           <a:p>
-            <a:pPr>
-              <a:lnSpc>
-                <a:spcPts val="2200"/>
-              </a:lnSpc>
-              <a:defRPr sz="2800" b="1">
+            <a:pPr algn="ctr">
+              <a:lnSpc>
+                <a:spcPts val="2200"/>
+              </a:lnSpc>
+              <a:defRPr sz="3600" b="1">
                 <a:solidFill>
                   <a:srgbClr val="1A1A2E"/>
                 </a:solidFill>
@@ -5073,7 +5895,7 @@
               </a:defRPr>
             </a:pPr>
             <a:r>
-              <a:t>3. Validation</a:t>
+              <a:t>Key files to study</a:t>
             </a:r>
           </a:p>
         </p:txBody>
@@ -5081,105 +5903,6 @@
       <p:sp>
         <p:nvSpPr>
           <p:cNvPr id="3" name="TextBox 2"/>
-          <p:cNvSpPr txBox="1"/>
-          <p:nvPr/>
-        </p:nvSpPr>
-        <p:spPr>
-          <a:xfrm>
-            <a:off x="548640" y="1234440"/>
-            <a:ext cx="11064240" cy="4937760"/>
-          </a:xfrm>
-          <a:prstGeom prst="rect">
-            <a:avLst/>
-          </a:prstGeom>
-          <a:noFill/>
-        </p:spPr>
-        <p:txBody>
-          <a:bodyPr wrap="square">
-            <a:noAutofit/>
-          </a:bodyPr>
-          <a:lstStyle/>
-          <a:p>
-            <a:pPr>
-              <a:lnSpc>
-                <a:spcPts val="2200"/>
-              </a:lnSpc>
-              <a:spcAft>
-                <a:spcPts val="1000"/>
-              </a:spcAft>
-              <a:defRPr sz="2000" b="0">
-                <a:solidFill>
-                  <a:srgbClr val="333333"/>
-                </a:solidFill>
-                <a:latin typeface="Calibri"/>
-              </a:defRPr>
-            </a:pPr>
-            <a:r>
-              <a:t>• `./scripts/module8.sh --check` validates capstone</a:t>
-            </a:r>
-          </a:p>
-          <a:p>
-            <a:pPr>
-              <a:lnSpc>
-                <a:spcPts val="2200"/>
-              </a:lnSpc>
-              <a:spcAft>
-                <a:spcPts val="1000"/>
-              </a:spcAft>
-              <a:defRPr sz="2000" b="0">
-                <a:solidFill>
-                  <a:srgbClr val="333333"/>
-                </a:solidFill>
-                <a:latin typeface="Calibri"/>
-              </a:defRPr>
-            </a:pPr>
-            <a:r>
-              <a:t>      documentation and checklist completion.</a:t>
-            </a:r>
-          </a:p>
-          <a:p>
-            <a:pPr>
-              <a:lnSpc>
-                <a:spcPts val="2200"/>
-              </a:lnSpc>
-              <a:spcAft>
-                <a:spcPts val="1000"/>
-              </a:spcAft>
-              <a:defRPr sz="2000" b="0">
-                <a:solidFill>
-                  <a:srgbClr val="333333"/>
-                </a:solidFill>
-                <a:latin typeface="Calibri"/>
-              </a:defRPr>
-            </a:pPr>
-            <a:r>
-              <a:t>• Optional demo or walkthrough recorded as part of the</a:t>
-            </a:r>
-          </a:p>
-          <a:p>
-            <a:pPr>
-              <a:lnSpc>
-                <a:spcPts val="2200"/>
-              </a:lnSpc>
-              <a:spcAft>
-                <a:spcPts val="1000"/>
-              </a:spcAft>
-              <a:defRPr sz="2000" b="0">
-                <a:solidFill>
-                  <a:srgbClr val="333333"/>
-                </a:solidFill>
-                <a:latin typeface="Calibri"/>
-              </a:defRPr>
-            </a:pPr>
-            <a:r>
-              <a:t>      deliverable.</a:t>
-            </a:r>
-          </a:p>
-        </p:txBody>
-      </p:sp>
-      <p:sp>
-        <p:nvSpPr>
-          <p:cNvPr id="4" name="TextBox 3"/>
           <p:cNvSpPr txBox="1"/>
           <p:nvPr/>
         </p:nvSpPr>
@@ -5268,7 +5991,7 @@
               </a:defRPr>
             </a:pPr>
             <a:r>
-              <a:t>Capstone checklist excerpt</a:t>
+              <a:t>Open these in the repo</a:t>
             </a:r>
           </a:p>
         </p:txBody>
@@ -5281,15 +6004,13 @@
         </p:nvSpPr>
         <p:spPr>
           <a:xfrm>
-            <a:off x="548640" y="1143000"/>
-            <a:ext cx="11064240" cy="5029200"/>
+            <a:off x="548640" y="1234440"/>
+            <a:ext cx="11064240" cy="4937760"/>
           </a:xfrm>
           <a:prstGeom prst="rect">
             <a:avLst/>
           </a:prstGeom>
-          <a:solidFill>
-            <a:srgbClr val="F4F4F4"/>
-          </a:solidFill>
+          <a:noFill/>
         </p:spPr>
         <p:txBody>
           <a:bodyPr wrap="square">
@@ -5302,322 +6023,188 @@
                 <a:spcPts val="2200"/>
               </a:lnSpc>
               <a:spcAft>
-                <a:spcPts val="400"/>
-              </a:spcAft>
-              <a:defRPr sz="2000" b="0">
-                <a:solidFill>
-                  <a:srgbClr val="333333"/>
-                </a:solidFill>
-                <a:latin typeface="Consolas"/>
-              </a:defRPr>
-            </a:pPr>
-            <a:r>
-              <a:t># Module 8 Checklist – Capstone: End‑to‑End Verification &amp; VIP Delivery</a:t>
-            </a:r>
-          </a:p>
-          <a:p>
-            <a:pPr>
-              <a:lnSpc>
-                <a:spcPts val="2200"/>
-              </a:lnSpc>
-              <a:spcAft>
-                <a:spcPts val="400"/>
-              </a:spcAft>
-              <a:defRPr sz="2000" b="0">
-                <a:solidFill>
-                  <a:srgbClr val="333333"/>
-                </a:solidFill>
-                <a:latin typeface="Consolas"/>
-              </a:defRPr>
-            </a:pPr>
-          </a:p>
-          <a:p>
-            <a:pPr>
-              <a:lnSpc>
-                <a:spcPts val="2200"/>
-              </a:lnSpc>
-              <a:spcAft>
-                <a:spcPts val="400"/>
-              </a:spcAft>
-              <a:defRPr sz="2000" b="0">
-                <a:solidFill>
-                  <a:srgbClr val="333333"/>
-                </a:solidFill>
-                <a:latin typeface="Consolas"/>
-              </a:defRPr>
-            </a:pPr>
-            <a:r>
-              <a:t>&gt; **Purpose**: Track completion of your major capstone project.</a:t>
-            </a:r>
-          </a:p>
-          <a:p>
-            <a:pPr>
-              <a:lnSpc>
-                <a:spcPts val="2200"/>
-              </a:lnSpc>
-              <a:spcAft>
-                <a:spcPts val="400"/>
-              </a:spcAft>
-              <a:defRPr sz="2000" b="0">
-                <a:solidFill>
-                  <a:srgbClr val="333333"/>
-                </a:solidFill>
-                <a:latin typeface="Consolas"/>
-              </a:defRPr>
-            </a:pPr>
-          </a:p>
-          <a:p>
-            <a:pPr>
-              <a:lnSpc>
-                <a:spcPts val="2200"/>
-              </a:lnSpc>
-              <a:spcAft>
-                <a:spcPts val="400"/>
-              </a:spcAft>
-              <a:defRPr sz="2000" b="0">
-                <a:solidFill>
-                  <a:srgbClr val="333333"/>
-                </a:solidFill>
-                <a:latin typeface="Consolas"/>
-              </a:defRPr>
-            </a:pPr>
-            <a:r>
-              <a:t>&gt; **Instructions**: Check off items as you complete them. Copy from</a:t>
-            </a:r>
-          </a:p>
-          <a:p>
-            <a:pPr>
-              <a:lnSpc>
-                <a:spcPts val="2200"/>
-              </a:lnSpc>
-              <a:spcAft>
-                <a:spcPts val="400"/>
-              </a:spcAft>
-              <a:defRPr sz="2000" b="0">
-                <a:solidFill>
-                  <a:srgbClr val="333333"/>
-                </a:solidFill>
-                <a:latin typeface="Consolas"/>
-              </a:defRPr>
-            </a:pPr>
-            <a:r>
-              <a:t>`module8/templates/` if needed, or edit the file in `module8/` directly.</a:t>
-            </a:r>
-          </a:p>
-          <a:p>
-            <a:pPr>
-              <a:lnSpc>
-                <a:spcPts val="2200"/>
-              </a:lnSpc>
-              <a:spcAft>
-                <a:spcPts val="400"/>
-              </a:spcAft>
-              <a:defRPr sz="2000" b="0">
-                <a:solidFill>
-                  <a:srgbClr val="333333"/>
-                </a:solidFill>
-                <a:latin typeface="Consolas"/>
-              </a:defRPr>
-            </a:pPr>
-            <a:r>
-              <a:t>Reference: `module8/.solutions/`.</a:t>
-            </a:r>
-          </a:p>
-          <a:p>
-            <a:pPr>
-              <a:lnSpc>
-                <a:spcPts val="2200"/>
-              </a:lnSpc>
-              <a:spcAft>
-                <a:spcPts val="400"/>
-              </a:spcAft>
-              <a:defRPr sz="2000" b="0">
-                <a:solidFill>
-                  <a:srgbClr val="333333"/>
-                </a:solidFill>
-                <a:latin typeface="Consolas"/>
-              </a:defRPr>
-            </a:pPr>
-          </a:p>
-          <a:p>
-            <a:pPr>
-              <a:lnSpc>
-                <a:spcPts val="2200"/>
-              </a:lnSpc>
-              <a:spcAft>
-                <a:spcPts val="400"/>
-              </a:spcAft>
-              <a:defRPr sz="2000" b="0">
-                <a:solidFill>
-                  <a:srgbClr val="333333"/>
-                </a:solidFill>
-                <a:latin typeface="Consolas"/>
-              </a:defRPr>
-            </a:pPr>
-            <a:r>
-              <a:t>## 1. Capstone Definition</a:t>
-            </a:r>
-          </a:p>
-          <a:p>
-            <a:pPr>
-              <a:lnSpc>
-                <a:spcPts val="2200"/>
-              </a:lnSpc>
-              <a:spcAft>
-                <a:spcPts val="400"/>
-              </a:spcAft>
-              <a:defRPr sz="2000" b="0">
-                <a:solidFill>
-                  <a:srgbClr val="333333"/>
-                </a:solidFill>
-                <a:latin typeface="Consolas"/>
-              </a:defRPr>
-            </a:pPr>
-          </a:p>
-          <a:p>
-            <a:pPr>
-              <a:lnSpc>
-                <a:spcPts val="2200"/>
-              </a:lnSpc>
-              <a:spcAft>
-                <a:spcPts val="400"/>
-              </a:spcAft>
-              <a:defRPr sz="2000" b="0">
-                <a:solidFill>
-                  <a:srgbClr val="333333"/>
-                </a:solidFill>
-                <a:latin typeface="Consolas"/>
-              </a:defRPr>
-            </a:pPr>
-            <a:r>
-              <a:t>- [ ] Capstone project chosen and described in `CAPSTONE_PROJECT.md`.</a:t>
-            </a:r>
-          </a:p>
-          <a:p>
-            <a:pPr>
-              <a:lnSpc>
-                <a:spcPts val="2200"/>
-              </a:lnSpc>
-              <a:spcAft>
-                <a:spcPts val="400"/>
-              </a:spcAft>
-              <a:defRPr sz="2000" b="0">
-                <a:solidFill>
-                  <a:srgbClr val="333333"/>
-                </a:solidFill>
-                <a:latin typeface="Consolas"/>
-              </a:defRPr>
-            </a:pPr>
-            <a:r>
-              <a:t>- [ ] Key requirements and success criteria documented.</a:t>
-            </a:r>
-          </a:p>
-          <a:p>
-            <a:pPr>
-              <a:lnSpc>
-                <a:spcPts val="2200"/>
-              </a:lnSpc>
-              <a:spcAft>
-                <a:spcPts val="400"/>
-              </a:spcAft>
-              <a:defRPr sz="2000" b="0">
-                <a:solidFill>
-                  <a:srgbClr val="333333"/>
-                </a:solidFill>
-                <a:latin typeface="Consolas"/>
-              </a:defRPr>
-            </a:pPr>
-            <a:r>
-              <a:t>- [ ] Scope (block/subsystem/VIP) clearly defined and realistic for the</a:t>
-            </a:r>
-          </a:p>
-          <a:p>
-            <a:pPr>
-              <a:lnSpc>
-                <a:spcPts val="2200"/>
-              </a:lnSpc>
-              <a:spcAft>
-                <a:spcPts val="400"/>
-              </a:spcAft>
-              <a:defRPr sz="2000" b="0">
-                <a:solidFill>
-                  <a:srgbClr val="333333"/>
-                </a:solidFill>
-                <a:latin typeface="Consolas"/>
-              </a:defRPr>
-            </a:pPr>
-            <a:r>
-              <a:t>time frame.</a:t>
-            </a:r>
-          </a:p>
-          <a:p>
-            <a:pPr>
-              <a:lnSpc>
-                <a:spcPts val="2200"/>
-              </a:lnSpc>
-              <a:spcAft>
-                <a:spcPts val="400"/>
-              </a:spcAft>
-              <a:defRPr sz="2000" b="0">
-                <a:solidFill>
-                  <a:srgbClr val="333333"/>
-                </a:solidFill>
-                <a:latin typeface="Consolas"/>
-              </a:defRPr>
-            </a:pPr>
-          </a:p>
-          <a:p>
-            <a:pPr>
-              <a:lnSpc>
-                <a:spcPts val="2200"/>
-              </a:lnSpc>
-              <a:spcAft>
-                <a:spcPts val="400"/>
-              </a:spcAft>
-              <a:defRPr sz="2000" b="0">
-                <a:solidFill>
-                  <a:srgbClr val="333333"/>
-                </a:solidFill>
-                <a:latin typeface="Consolas"/>
-              </a:defRPr>
-            </a:pPr>
-            <a:r>
-              <a:t>## 2. Re‑use of Earlier Modules</a:t>
-            </a:r>
-          </a:p>
-          <a:p>
-            <a:pPr>
-              <a:lnSpc>
-                <a:spcPts val="2200"/>
-              </a:lnSpc>
-              <a:spcAft>
-                <a:spcPts val="400"/>
-              </a:spcAft>
-              <a:defRPr sz="2000" b="0">
-                <a:solidFill>
-                  <a:srgbClr val="333333"/>
-                </a:solidFill>
-                <a:latin typeface="Consolas"/>
-              </a:defRPr>
-            </a:pPr>
-          </a:p>
-          <a:p>
-            <a:pPr>
-              <a:lnSpc>
-                <a:spcPts val="2200"/>
-              </a:lnSpc>
-              <a:spcAft>
-                <a:spcPts val="400"/>
-              </a:spcAft>
-              <a:defRPr sz="2000" b="0">
-                <a:solidFill>
-                  <a:srgbClr val="333333"/>
-                </a:solidFill>
-                <a:latin typeface="Consolas"/>
-              </a:defRPr>
-            </a:pPr>
-            <a:r>
-              <a:t>- [ ] Existing plans (verification, test, coverage, regression)</a:t>
+                <a:spcPts val="1000"/>
+              </a:spcAft>
+              <a:defRPr sz="2000" b="0">
+                <a:solidFill>
+                  <a:srgbClr val="333333"/>
+                </a:solidFill>
+                <a:latin typeface="Calibri"/>
+              </a:defRPr>
+            </a:pPr>
+            <a:r>
+              <a:t>• `module8/CAPSTONE_PROJECT.md` — end-to-end project</a:t>
+            </a:r>
+          </a:p>
+          <a:p>
+            <a:pPr>
+              <a:lnSpc>
+                <a:spcPts val="2200"/>
+              </a:lnSpc>
+              <a:spcAft>
+                <a:spcPts val="1000"/>
+              </a:spcAft>
+              <a:defRPr sz="2000" b="0">
+                <a:solidFill>
+                  <a:srgbClr val="333333"/>
+                </a:solidFill>
+                <a:latin typeface="Calibri"/>
+              </a:defRPr>
+            </a:pPr>
+            <a:r>
+              <a:t>      definition and deliverables</a:t>
+            </a:r>
+          </a:p>
+          <a:p>
+            <a:pPr>
+              <a:lnSpc>
+                <a:spcPts val="2200"/>
+              </a:lnSpc>
+              <a:spcAft>
+                <a:spcPts val="1000"/>
+              </a:spcAft>
+              <a:defRPr sz="2000" b="0">
+                <a:solidFill>
+                  <a:srgbClr val="333333"/>
+                </a:solidFill>
+                <a:latin typeface="Calibri"/>
+              </a:defRPr>
+            </a:pPr>
+            <a:r>
+              <a:t>• `module8/CHECKLIST.md` — capstone sign-off and</a:t>
+            </a:r>
+          </a:p>
+          <a:p>
+            <a:pPr>
+              <a:lnSpc>
+                <a:spcPts val="2200"/>
+              </a:lnSpc>
+              <a:spcAft>
+                <a:spcPts val="1000"/>
+              </a:spcAft>
+              <a:defRPr sz="2000" b="0">
+                <a:solidFill>
+                  <a:srgbClr val="333333"/>
+                </a:solidFill>
+                <a:latin typeface="Calibri"/>
+              </a:defRPr>
+            </a:pPr>
+            <a:r>
+              <a:t>      delivery checklist</a:t>
+            </a:r>
+          </a:p>
+          <a:p>
+            <a:pPr>
+              <a:lnSpc>
+                <a:spcPts val="2200"/>
+              </a:lnSpc>
+              <a:spcAft>
+                <a:spcPts val="1000"/>
+              </a:spcAft>
+              <a:defRPr sz="2000" b="0">
+                <a:solidFill>
+                  <a:srgbClr val="333333"/>
+                </a:solidFill>
+                <a:latin typeface="Calibri"/>
+              </a:defRPr>
+            </a:pPr>
+            <a:r>
+              <a:t>• `docs/FILL_GUIDES.md` — guidance for completing</a:t>
+            </a:r>
+          </a:p>
+          <a:p>
+            <a:pPr>
+              <a:lnSpc>
+                <a:spcPts val="2200"/>
+              </a:lnSpc>
+              <a:spcAft>
+                <a:spcPts val="1000"/>
+              </a:spcAft>
+              <a:defRPr sz="2000" b="0">
+                <a:solidFill>
+                  <a:srgbClr val="333333"/>
+                </a:solidFill>
+                <a:latin typeface="Calibri"/>
+              </a:defRPr>
+            </a:pPr>
+            <a:r>
+              <a:t>      planning artifacts</a:t>
+            </a:r>
+          </a:p>
+          <a:p>
+            <a:pPr>
+              <a:lnSpc>
+                <a:spcPts val="2200"/>
+              </a:lnSpc>
+              <a:spcAft>
+                <a:spcPts val="1000"/>
+              </a:spcAft>
+              <a:defRPr sz="2000" b="0">
+                <a:solidFill>
+                  <a:srgbClr val="333333"/>
+                </a:solidFill>
+                <a:latin typeface="Calibri"/>
+              </a:defRPr>
+            </a:pPr>
+            <a:r>
+              <a:t>• Prior module workspaces (`module1/` … `module7/`) —</a:t>
+            </a:r>
+          </a:p>
+          <a:p>
+            <a:pPr>
+              <a:lnSpc>
+                <a:spcPts val="2200"/>
+              </a:lnSpc>
+              <a:spcAft>
+                <a:spcPts val="1000"/>
+              </a:spcAft>
+              <a:defRPr sz="2000" b="0">
+                <a:solidFill>
+                  <a:srgbClr val="333333"/>
+                </a:solidFill>
+                <a:latin typeface="Calibri"/>
+              </a:defRPr>
+            </a:pPr>
+            <a:r>
+              <a:t>      reusable verification assets</a:t>
+            </a:r>
+          </a:p>
+          <a:p>
+            <a:pPr>
+              <a:lnSpc>
+                <a:spcPts val="2200"/>
+              </a:lnSpc>
+              <a:spcAft>
+                <a:spcPts val="1000"/>
+              </a:spcAft>
+              <a:defRPr sz="2000" b="0">
+                <a:solidFill>
+                  <a:srgbClr val="333333"/>
+                </a:solidFill>
+                <a:latin typeface="Calibri"/>
+              </a:defRPr>
+            </a:pPr>
+            <a:r>
+              <a:t>• `scripts/module8.sh` — capstone documentation and</a:t>
+            </a:r>
+          </a:p>
+          <a:p>
+            <a:pPr>
+              <a:lnSpc>
+                <a:spcPts val="2200"/>
+              </a:lnSpc>
+              <a:spcAft>
+                <a:spcPts val="1000"/>
+              </a:spcAft>
+              <a:defRPr sz="2000" b="0">
+                <a:solidFill>
+                  <a:srgbClr val="333333"/>
+                </a:solidFill>
+                <a:latin typeface="Calibri"/>
+              </a:defRPr>
+            </a:pPr>
+            <a:r>
+              <a:t>      checklist validation</a:t>
             </a:r>
           </a:p>
         </p:txBody>
@@ -5713,7 +6300,7 @@
               </a:defRPr>
             </a:pPr>
             <a:r>
-              <a:t>Hands-on examples</a:t>
+              <a:t>Verification &amp; testing methods</a:t>
             </a:r>
           </a:p>
         </p:txBody>
@@ -5809,7 +6396,7 @@
               </a:defRPr>
             </a:pPr>
             <a:r>
-              <a:t>Module 8 self-check</a:t>
+              <a:t>1. Full-lifecycle testing</a:t>
             </a:r>
           </a:p>
         </p:txBody>
@@ -5822,15 +6409,13 @@
         </p:nvSpPr>
         <p:spPr>
           <a:xfrm>
-            <a:off x="548640" y="1051560"/>
-            <a:ext cx="11064240" cy="914400"/>
+            <a:off x="548640" y="1234440"/>
+            <a:ext cx="5303520" cy="4754880"/>
           </a:xfrm>
           <a:prstGeom prst="rect">
             <a:avLst/>
           </a:prstGeom>
-          <a:solidFill>
-            <a:srgbClr val="F4F4F4"/>
-          </a:solidFill>
+          <a:noFill/>
         </p:spPr>
         <p:txBody>
           <a:bodyPr wrap="square">
@@ -5843,24 +6428,119 @@
                 <a:spcPts val="2200"/>
               </a:lnSpc>
               <a:spcAft>
-                <a:spcPts val="200"/>
-              </a:spcAft>
-              <a:defRPr sz="2000" b="0">
-                <a:solidFill>
-                  <a:srgbClr val="333333"/>
-                </a:solidFill>
-                <a:latin typeface="Consolas"/>
-              </a:defRPr>
-            </a:pPr>
-            <a:r>
-              <a:t>$ ./scripts/module8.sh --capstone</a:t>
+                <a:spcPts val="1000"/>
+              </a:spcAft>
+              <a:defRPr sz="2000" b="0">
+                <a:solidFill>
+                  <a:srgbClr val="333333"/>
+                </a:solidFill>
+                <a:latin typeface="Calibri"/>
+              </a:defRPr>
+            </a:pPr>
+            <a:r>
+              <a:t>• Execute planned regression tiers</a:t>
+            </a:r>
+          </a:p>
+          <a:p>
+            <a:pPr>
+              <a:lnSpc>
+                <a:spcPts val="2200"/>
+              </a:lnSpc>
+              <a:spcAft>
+                <a:spcPts val="1000"/>
+              </a:spcAft>
+              <a:defRPr sz="2000" b="0">
+                <a:solidFill>
+                  <a:srgbClr val="333333"/>
+                </a:solidFill>
+                <a:latin typeface="Calibri"/>
+              </a:defRPr>
+            </a:pPr>
+            <a:r>
+              <a:t>      with coverage merge and</a:t>
+            </a:r>
+          </a:p>
+          <a:p>
+            <a:pPr>
+              <a:lnSpc>
+                <a:spcPts val="2200"/>
+              </a:lnSpc>
+              <a:spcAft>
+                <a:spcPts val="1000"/>
+              </a:spcAft>
+              <a:defRPr sz="2000" b="0">
+                <a:solidFill>
+                  <a:srgbClr val="333333"/>
+                </a:solidFill>
+                <a:latin typeface="Calibri"/>
+              </a:defRPr>
+            </a:pPr>
+            <a:r>
+              <a:t>      documented closure status.</a:t>
+            </a:r>
+          </a:p>
+          <a:p>
+            <a:pPr>
+              <a:lnSpc>
+                <a:spcPts val="2200"/>
+              </a:lnSpc>
+              <a:spcAft>
+                <a:spcPts val="1000"/>
+              </a:spcAft>
+              <a:defRPr sz="2000" b="0">
+                <a:solidFill>
+                  <a:srgbClr val="333333"/>
+                </a:solidFill>
+                <a:latin typeface="Calibri"/>
+              </a:defRPr>
+            </a:pPr>
+            <a:r>
+              <a:t>• Include negative, stress, and</a:t>
+            </a:r>
+          </a:p>
+          <a:p>
+            <a:pPr>
+              <a:lnSpc>
+                <a:spcPts val="2200"/>
+              </a:lnSpc>
+              <a:spcAft>
+                <a:spcPts val="1000"/>
+              </a:spcAft>
+              <a:defRPr sz="2000" b="0">
+                <a:solidFill>
+                  <a:srgbClr val="333333"/>
+                </a:solidFill>
+                <a:latin typeface="Calibri"/>
+              </a:defRPr>
+            </a:pPr>
+            <a:r>
+              <a:t>      protocol/rule tests appropriate</a:t>
+            </a:r>
+          </a:p>
+          <a:p>
+            <a:pPr>
+              <a:lnSpc>
+                <a:spcPts val="2200"/>
+              </a:lnSpc>
+              <a:spcAft>
+                <a:spcPts val="1000"/>
+              </a:spcAft>
+              <a:defRPr sz="2000" b="0">
+                <a:solidFill>
+                  <a:srgbClr val="333333"/>
+                </a:solidFill>
+                <a:latin typeface="Calibri"/>
+              </a:defRPr>
+            </a:pPr>
+            <a:r>
+              <a:t>      to your capstone DUT.</a:t>
             </a:r>
           </a:p>
         </p:txBody>
       </p:sp>
       <p:pic>
         <p:nvPicPr>
-          <p:cNvPr id="4" name="Picture 3" descr="module8_check.png"/>
+          <p:cNvPr id="4" name="Picture 3" descr="testing_methods.png"/>
           <p:cNvPicPr>
             <a:picLocks noChangeAspect="1"/>
           </p:cNvPicPr>
@@ -5874,8 +6554,8 @@
         </p:blipFill>
         <p:spPr>
           <a:xfrm>
-            <a:off x="548640" y="1965960"/>
-            <a:ext cx="7071358" cy="3977639"/>
+            <a:off x="6172200" y="2094547"/>
+            <a:ext cx="5394960" cy="3034665"/>
           </a:xfrm>
           <a:prstGeom prst="rect">
             <a:avLst/>
@@ -5973,7 +6653,7 @@
               </a:defRPr>
             </a:pPr>
             <a:r>
-              <a:t>Demo: Capstone project template</a:t>
+              <a:t>2. Sign-off and delivery testing</a:t>
             </a:r>
           </a:p>
         </p:txBody>
@@ -5986,15 +6666,13 @@
         </p:nvSpPr>
         <p:spPr>
           <a:xfrm>
-            <a:off x="548640" y="1051560"/>
-            <a:ext cx="11064240" cy="914400"/>
+            <a:off x="548640" y="1234440"/>
+            <a:ext cx="11064240" cy="4937760"/>
           </a:xfrm>
           <a:prstGeom prst="rect">
             <a:avLst/>
           </a:prstGeom>
-          <a:solidFill>
-            <a:srgbClr val="F4F4F4"/>
-          </a:solidFill>
+          <a:noFill/>
         </p:spPr>
         <p:txBody>
           <a:bodyPr wrap="square">
@@ -6007,48 +6685,81 @@
                 <a:spcPts val="2200"/>
               </a:lnSpc>
               <a:spcAft>
-                <a:spcPts val="200"/>
-              </a:spcAft>
-              <a:defRPr sz="2000" b="0">
-                <a:solidFill>
-                  <a:srgbClr val="333333"/>
-                </a:solidFill>
-                <a:latin typeface="Consolas"/>
-              </a:defRPr>
-            </a:pPr>
-            <a:r>
-              <a:t>$ head -35 module8/templates/CAPSTONE_PROJECT.md</a:t>
-            </a:r>
-          </a:p>
-        </p:txBody>
-      </p:sp>
-      <p:pic>
-        <p:nvPicPr>
-          <p:cNvPr id="4" name="Picture 3" descr="ex01_capstone.png"/>
-          <p:cNvPicPr>
-            <a:picLocks noChangeAspect="1"/>
-          </p:cNvPicPr>
-          <p:nvPr/>
-        </p:nvPicPr>
-        <p:blipFill>
-          <a:blip r:embed="rId2"/>
-          <a:stretch>
-            <a:fillRect/>
-          </a:stretch>
-        </p:blipFill>
-        <p:spPr>
-          <a:xfrm>
-            <a:off x="548640" y="1965960"/>
-            <a:ext cx="7071358" cy="3977639"/>
-          </a:xfrm>
-          <a:prstGeom prst="rect">
-            <a:avLst/>
-          </a:prstGeom>
-        </p:spPr>
-      </p:pic>
-      <p:sp>
-        <p:nvSpPr>
-          <p:cNvPr id="5" name="TextBox 4"/>
+                <a:spcPts val="1000"/>
+              </a:spcAft>
+              <a:defRPr sz="2000" b="0">
+                <a:solidFill>
+                  <a:srgbClr val="333333"/>
+                </a:solidFill>
+                <a:latin typeface="Calibri"/>
+              </a:defRPr>
+            </a:pPr>
+            <a:r>
+              <a:t>• Define explicit exit criteria (coverage %, bug bar,</a:t>
+            </a:r>
+          </a:p>
+          <a:p>
+            <a:pPr>
+              <a:lnSpc>
+                <a:spcPts val="2200"/>
+              </a:lnSpc>
+              <a:spcAft>
+                <a:spcPts val="1000"/>
+              </a:spcAft>
+              <a:defRPr sz="2000" b="0">
+                <a:solidFill>
+                  <a:srgbClr val="333333"/>
+                </a:solidFill>
+                <a:latin typeface="Calibri"/>
+              </a:defRPr>
+            </a:pPr>
+            <a:r>
+              <a:t>      stability window).</a:t>
+            </a:r>
+          </a:p>
+          <a:p>
+            <a:pPr>
+              <a:lnSpc>
+                <a:spcPts val="2200"/>
+              </a:lnSpc>
+              <a:spcAft>
+                <a:spcPts val="1000"/>
+              </a:spcAft>
+              <a:defRPr sz="2000" b="0">
+                <a:solidFill>
+                  <a:srgbClr val="333333"/>
+                </a:solidFill>
+                <a:latin typeface="Calibri"/>
+              </a:defRPr>
+            </a:pPr>
+            <a:r>
+              <a:t>• Retrospective: what worked, gaps, and improvements</a:t>
+            </a:r>
+          </a:p>
+          <a:p>
+            <a:pPr>
+              <a:lnSpc>
+                <a:spcPts val="2200"/>
+              </a:lnSpc>
+              <a:spcAft>
+                <a:spcPts val="1000"/>
+              </a:spcAft>
+              <a:defRPr sz="2000" b="0">
+                <a:solidFill>
+                  <a:srgbClr val="333333"/>
+                </a:solidFill>
+                <a:latin typeface="Calibri"/>
+              </a:defRPr>
+            </a:pPr>
+            <a:r>
+              <a:t>      for a real project review.</a:t>
+            </a:r>
+          </a:p>
+        </p:txBody>
+      </p:sp>
+      <p:sp>
+        <p:nvSpPr>
+          <p:cNvPr id="4" name="TextBox 3"/>
           <p:cNvSpPr txBox="1"/>
           <p:nvPr/>
         </p:nvSpPr>
@@ -6137,7 +6848,7 @@
               </a:defRPr>
             </a:pPr>
             <a:r>
-              <a:t>Demo: Capstone checklist</a:t>
+              <a:t>3. Validation</a:t>
             </a:r>
           </a:p>
         </p:txBody>
@@ -6150,15 +6861,13 @@
         </p:nvSpPr>
         <p:spPr>
           <a:xfrm>
-            <a:off x="548640" y="1051560"/>
-            <a:ext cx="11064240" cy="914400"/>
+            <a:off x="548640" y="1234440"/>
+            <a:ext cx="11064240" cy="4937760"/>
           </a:xfrm>
           <a:prstGeom prst="rect">
             <a:avLst/>
           </a:prstGeom>
-          <a:solidFill>
-            <a:srgbClr val="F4F4F4"/>
-          </a:solidFill>
+          <a:noFill/>
         </p:spPr>
         <p:txBody>
           <a:bodyPr wrap="square">
@@ -6171,48 +6880,81 @@
                 <a:spcPts val="2200"/>
               </a:lnSpc>
               <a:spcAft>
-                <a:spcPts val="200"/>
-              </a:spcAft>
-              <a:defRPr sz="2000" b="0">
-                <a:solidFill>
-                  <a:srgbClr val="333333"/>
-                </a:solidFill>
-                <a:latin typeface="Consolas"/>
-              </a:defRPr>
-            </a:pPr>
-            <a:r>
-              <a:t>$ head -25 module8/templates/CHECKLIST.md</a:t>
-            </a:r>
-          </a:p>
-        </p:txBody>
-      </p:sp>
-      <p:pic>
-        <p:nvPicPr>
-          <p:cNvPr id="4" name="Picture 3" descr="ex02_checklist.png"/>
-          <p:cNvPicPr>
-            <a:picLocks noChangeAspect="1"/>
-          </p:cNvPicPr>
-          <p:nvPr/>
-        </p:nvPicPr>
-        <p:blipFill>
-          <a:blip r:embed="rId2"/>
-          <a:stretch>
-            <a:fillRect/>
-          </a:stretch>
-        </p:blipFill>
-        <p:spPr>
-          <a:xfrm>
-            <a:off x="548640" y="1965960"/>
-            <a:ext cx="7071358" cy="3977639"/>
-          </a:xfrm>
-          <a:prstGeom prst="rect">
-            <a:avLst/>
-          </a:prstGeom>
-        </p:spPr>
-      </p:pic>
-      <p:sp>
-        <p:nvSpPr>
-          <p:cNvPr id="5" name="TextBox 4"/>
+                <a:spcPts val="1000"/>
+              </a:spcAft>
+              <a:defRPr sz="2000" b="0">
+                <a:solidFill>
+                  <a:srgbClr val="333333"/>
+                </a:solidFill>
+                <a:latin typeface="Calibri"/>
+              </a:defRPr>
+            </a:pPr>
+            <a:r>
+              <a:t>• `./scripts/module8.sh --check` validates capstone</a:t>
+            </a:r>
+          </a:p>
+          <a:p>
+            <a:pPr>
+              <a:lnSpc>
+                <a:spcPts val="2200"/>
+              </a:lnSpc>
+              <a:spcAft>
+                <a:spcPts val="1000"/>
+              </a:spcAft>
+              <a:defRPr sz="2000" b="0">
+                <a:solidFill>
+                  <a:srgbClr val="333333"/>
+                </a:solidFill>
+                <a:latin typeface="Calibri"/>
+              </a:defRPr>
+            </a:pPr>
+            <a:r>
+              <a:t>      documentation and checklist completion.</a:t>
+            </a:r>
+          </a:p>
+          <a:p>
+            <a:pPr>
+              <a:lnSpc>
+                <a:spcPts val="2200"/>
+              </a:lnSpc>
+              <a:spcAft>
+                <a:spcPts val="1000"/>
+              </a:spcAft>
+              <a:defRPr sz="2000" b="0">
+                <a:solidFill>
+                  <a:srgbClr val="333333"/>
+                </a:solidFill>
+                <a:latin typeface="Calibri"/>
+              </a:defRPr>
+            </a:pPr>
+            <a:r>
+              <a:t>• Optional demo or walkthrough recorded as part of the</a:t>
+            </a:r>
+          </a:p>
+          <a:p>
+            <a:pPr>
+              <a:lnSpc>
+                <a:spcPts val="2200"/>
+              </a:lnSpc>
+              <a:spcAft>
+                <a:spcPts val="1000"/>
+              </a:spcAft>
+              <a:defRPr sz="2000" b="0">
+                <a:solidFill>
+                  <a:srgbClr val="333333"/>
+                </a:solidFill>
+                <a:latin typeface="Calibri"/>
+              </a:defRPr>
+            </a:pPr>
+            <a:r>
+              <a:t>      deliverable.</a:t>
+            </a:r>
+          </a:p>
+        </p:txBody>
+      </p:sp>
+      <p:sp>
+        <p:nvSpPr>
+          <p:cNvPr id="4" name="TextBox 3"/>
           <p:cNvSpPr txBox="1"/>
           <p:nvPr/>
         </p:nvSpPr>
@@ -6301,7 +7043,7 @@
               </a:defRPr>
             </a:pPr>
             <a:r>
-              <a:t>Demo: Fill guides</a:t>
+              <a:t>Capstone checklist excerpt</a:t>
             </a:r>
           </a:p>
         </p:txBody>
@@ -6314,8 +7056,8 @@
         </p:nvSpPr>
         <p:spPr>
           <a:xfrm>
-            <a:off x="548640" y="1051560"/>
-            <a:ext cx="11064240" cy="914400"/>
+            <a:off x="548640" y="1143000"/>
+            <a:ext cx="11064240" cy="5029200"/>
           </a:xfrm>
           <a:prstGeom prst="rect">
             <a:avLst/>
@@ -6335,7 +7077,7 @@
                 <a:spcPts val="2200"/>
               </a:lnSpc>
               <a:spcAft>
-                <a:spcPts val="200"/>
+                <a:spcPts val="400"/>
               </a:spcAft>
               <a:defRPr sz="2000" b="0">
                 <a:solidFill>
@@ -6345,38 +7087,319 @@
               </a:defRPr>
             </a:pPr>
             <a:r>
-              <a:t>$ head -30 docs/FILL_GUIDES.md</a:t>
-            </a:r>
-          </a:p>
-        </p:txBody>
-      </p:sp>
-      <p:pic>
-        <p:nvPicPr>
-          <p:cNvPr id="4" name="Picture 3" descr="ex03_fill_guides.png"/>
-          <p:cNvPicPr>
-            <a:picLocks noChangeAspect="1"/>
-          </p:cNvPicPr>
-          <p:nvPr/>
-        </p:nvPicPr>
-        <p:blipFill>
-          <a:blip r:embed="rId2"/>
-          <a:stretch>
-            <a:fillRect/>
-          </a:stretch>
-        </p:blipFill>
-        <p:spPr>
-          <a:xfrm>
-            <a:off x="548640" y="1965960"/>
-            <a:ext cx="7071358" cy="3977639"/>
-          </a:xfrm>
-          <a:prstGeom prst="rect">
-            <a:avLst/>
-          </a:prstGeom>
-        </p:spPr>
-      </p:pic>
-      <p:sp>
-        <p:nvSpPr>
-          <p:cNvPr id="5" name="TextBox 4"/>
+              <a:t># Module 8 Checklist – Capstone: End‑to‑End Verification &amp; VIP Delivery</a:t>
+            </a:r>
+          </a:p>
+          <a:p>
+            <a:pPr>
+              <a:lnSpc>
+                <a:spcPts val="2200"/>
+              </a:lnSpc>
+              <a:spcAft>
+                <a:spcPts val="400"/>
+              </a:spcAft>
+              <a:defRPr sz="2000" b="0">
+                <a:solidFill>
+                  <a:srgbClr val="333333"/>
+                </a:solidFill>
+                <a:latin typeface="Consolas"/>
+              </a:defRPr>
+            </a:pPr>
+          </a:p>
+          <a:p>
+            <a:pPr>
+              <a:lnSpc>
+                <a:spcPts val="2200"/>
+              </a:lnSpc>
+              <a:spcAft>
+                <a:spcPts val="400"/>
+              </a:spcAft>
+              <a:defRPr sz="2000" b="0">
+                <a:solidFill>
+                  <a:srgbClr val="333333"/>
+                </a:solidFill>
+                <a:latin typeface="Consolas"/>
+              </a:defRPr>
+            </a:pPr>
+            <a:r>
+              <a:t>&gt; **Purpose**: Track completion of your major capstone project.</a:t>
+            </a:r>
+          </a:p>
+          <a:p>
+            <a:pPr>
+              <a:lnSpc>
+                <a:spcPts val="2200"/>
+              </a:lnSpc>
+              <a:spcAft>
+                <a:spcPts val="400"/>
+              </a:spcAft>
+              <a:defRPr sz="2000" b="0">
+                <a:solidFill>
+                  <a:srgbClr val="333333"/>
+                </a:solidFill>
+                <a:latin typeface="Consolas"/>
+              </a:defRPr>
+            </a:pPr>
+          </a:p>
+          <a:p>
+            <a:pPr>
+              <a:lnSpc>
+                <a:spcPts val="2200"/>
+              </a:lnSpc>
+              <a:spcAft>
+                <a:spcPts val="400"/>
+              </a:spcAft>
+              <a:defRPr sz="2000" b="0">
+                <a:solidFill>
+                  <a:srgbClr val="333333"/>
+                </a:solidFill>
+                <a:latin typeface="Consolas"/>
+              </a:defRPr>
+            </a:pPr>
+            <a:r>
+              <a:t>&gt; **Instructions**: Check off items as you complete them. Copy from</a:t>
+            </a:r>
+          </a:p>
+          <a:p>
+            <a:pPr>
+              <a:lnSpc>
+                <a:spcPts val="2200"/>
+              </a:lnSpc>
+              <a:spcAft>
+                <a:spcPts val="400"/>
+              </a:spcAft>
+              <a:defRPr sz="2000" b="0">
+                <a:solidFill>
+                  <a:srgbClr val="333333"/>
+                </a:solidFill>
+                <a:latin typeface="Consolas"/>
+              </a:defRPr>
+            </a:pPr>
+            <a:r>
+              <a:t>`module8/templates/` if needed, or edit the file in `module8/` directly.</a:t>
+            </a:r>
+          </a:p>
+          <a:p>
+            <a:pPr>
+              <a:lnSpc>
+                <a:spcPts val="2200"/>
+              </a:lnSpc>
+              <a:spcAft>
+                <a:spcPts val="400"/>
+              </a:spcAft>
+              <a:defRPr sz="2000" b="0">
+                <a:solidFill>
+                  <a:srgbClr val="333333"/>
+                </a:solidFill>
+                <a:latin typeface="Consolas"/>
+              </a:defRPr>
+            </a:pPr>
+            <a:r>
+              <a:t>Reference: `module8/.solutions/`.</a:t>
+            </a:r>
+          </a:p>
+          <a:p>
+            <a:pPr>
+              <a:lnSpc>
+                <a:spcPts val="2200"/>
+              </a:lnSpc>
+              <a:spcAft>
+                <a:spcPts val="400"/>
+              </a:spcAft>
+              <a:defRPr sz="2000" b="0">
+                <a:solidFill>
+                  <a:srgbClr val="333333"/>
+                </a:solidFill>
+                <a:latin typeface="Consolas"/>
+              </a:defRPr>
+            </a:pPr>
+          </a:p>
+          <a:p>
+            <a:pPr>
+              <a:lnSpc>
+                <a:spcPts val="2200"/>
+              </a:lnSpc>
+              <a:spcAft>
+                <a:spcPts val="400"/>
+              </a:spcAft>
+              <a:defRPr sz="2000" b="0">
+                <a:solidFill>
+                  <a:srgbClr val="333333"/>
+                </a:solidFill>
+                <a:latin typeface="Consolas"/>
+              </a:defRPr>
+            </a:pPr>
+            <a:r>
+              <a:t>## 1. Capstone Definition</a:t>
+            </a:r>
+          </a:p>
+          <a:p>
+            <a:pPr>
+              <a:lnSpc>
+                <a:spcPts val="2200"/>
+              </a:lnSpc>
+              <a:spcAft>
+                <a:spcPts val="400"/>
+              </a:spcAft>
+              <a:defRPr sz="2000" b="0">
+                <a:solidFill>
+                  <a:srgbClr val="333333"/>
+                </a:solidFill>
+                <a:latin typeface="Consolas"/>
+              </a:defRPr>
+            </a:pPr>
+          </a:p>
+          <a:p>
+            <a:pPr>
+              <a:lnSpc>
+                <a:spcPts val="2200"/>
+              </a:lnSpc>
+              <a:spcAft>
+                <a:spcPts val="400"/>
+              </a:spcAft>
+              <a:defRPr sz="2000" b="0">
+                <a:solidFill>
+                  <a:srgbClr val="333333"/>
+                </a:solidFill>
+                <a:latin typeface="Consolas"/>
+              </a:defRPr>
+            </a:pPr>
+            <a:r>
+              <a:t>- [ ] Capstone project chosen and described in `CAPSTONE_PROJECT.md`.</a:t>
+            </a:r>
+          </a:p>
+          <a:p>
+            <a:pPr>
+              <a:lnSpc>
+                <a:spcPts val="2200"/>
+              </a:lnSpc>
+              <a:spcAft>
+                <a:spcPts val="400"/>
+              </a:spcAft>
+              <a:defRPr sz="2000" b="0">
+                <a:solidFill>
+                  <a:srgbClr val="333333"/>
+                </a:solidFill>
+                <a:latin typeface="Consolas"/>
+              </a:defRPr>
+            </a:pPr>
+            <a:r>
+              <a:t>- [ ] Key requirements and success criteria documented.</a:t>
+            </a:r>
+          </a:p>
+          <a:p>
+            <a:pPr>
+              <a:lnSpc>
+                <a:spcPts val="2200"/>
+              </a:lnSpc>
+              <a:spcAft>
+                <a:spcPts val="400"/>
+              </a:spcAft>
+              <a:defRPr sz="2000" b="0">
+                <a:solidFill>
+                  <a:srgbClr val="333333"/>
+                </a:solidFill>
+                <a:latin typeface="Consolas"/>
+              </a:defRPr>
+            </a:pPr>
+            <a:r>
+              <a:t>- [ ] Scope (block/subsystem/VIP) clearly defined and realistic for the</a:t>
+            </a:r>
+          </a:p>
+          <a:p>
+            <a:pPr>
+              <a:lnSpc>
+                <a:spcPts val="2200"/>
+              </a:lnSpc>
+              <a:spcAft>
+                <a:spcPts val="400"/>
+              </a:spcAft>
+              <a:defRPr sz="2000" b="0">
+                <a:solidFill>
+                  <a:srgbClr val="333333"/>
+                </a:solidFill>
+                <a:latin typeface="Consolas"/>
+              </a:defRPr>
+            </a:pPr>
+            <a:r>
+              <a:t>time frame.</a:t>
+            </a:r>
+          </a:p>
+          <a:p>
+            <a:pPr>
+              <a:lnSpc>
+                <a:spcPts val="2200"/>
+              </a:lnSpc>
+              <a:spcAft>
+                <a:spcPts val="400"/>
+              </a:spcAft>
+              <a:defRPr sz="2000" b="0">
+                <a:solidFill>
+                  <a:srgbClr val="333333"/>
+                </a:solidFill>
+                <a:latin typeface="Consolas"/>
+              </a:defRPr>
+            </a:pPr>
+          </a:p>
+          <a:p>
+            <a:pPr>
+              <a:lnSpc>
+                <a:spcPts val="2200"/>
+              </a:lnSpc>
+              <a:spcAft>
+                <a:spcPts val="400"/>
+              </a:spcAft>
+              <a:defRPr sz="2000" b="0">
+                <a:solidFill>
+                  <a:srgbClr val="333333"/>
+                </a:solidFill>
+                <a:latin typeface="Consolas"/>
+              </a:defRPr>
+            </a:pPr>
+            <a:r>
+              <a:t>## 2. Re‑use of Earlier Modules</a:t>
+            </a:r>
+          </a:p>
+          <a:p>
+            <a:pPr>
+              <a:lnSpc>
+                <a:spcPts val="2200"/>
+              </a:lnSpc>
+              <a:spcAft>
+                <a:spcPts val="400"/>
+              </a:spcAft>
+              <a:defRPr sz="2000" b="0">
+                <a:solidFill>
+                  <a:srgbClr val="333333"/>
+                </a:solidFill>
+                <a:latin typeface="Consolas"/>
+              </a:defRPr>
+            </a:pPr>
+          </a:p>
+          <a:p>
+            <a:pPr>
+              <a:lnSpc>
+                <a:spcPts val="2200"/>
+              </a:lnSpc>
+              <a:spcAft>
+                <a:spcPts val="400"/>
+              </a:spcAft>
+              <a:defRPr sz="2000" b="0">
+                <a:solidFill>
+                  <a:srgbClr val="333333"/>
+                </a:solidFill>
+                <a:latin typeface="Consolas"/>
+              </a:defRPr>
+            </a:pPr>
+            <a:r>
+              <a:t>- [ ] Existing plans (verification, test, coverage, regression)</a:t>
+            </a:r>
+          </a:p>
+        </p:txBody>
+      </p:sp>
+      <p:sp>
+        <p:nvSpPr>
+          <p:cNvPr id="4" name="TextBox 3"/>
           <p:cNvSpPr txBox="1"/>
           <p:nvPr/>
         </p:nvSpPr>
@@ -6622,7 +7645,7 @@
               </a:defRPr>
             </a:pPr>
             <a:r>
-              <a:t>Demo: Reference capstone</a:t>
+              <a:t>Capstone validation script</a:t>
             </a:r>
           </a:p>
         </p:txBody>
@@ -6635,8 +7658,8 @@
         </p:nvSpPr>
         <p:spPr>
           <a:xfrm>
-            <a:off x="548640" y="1051560"/>
-            <a:ext cx="11064240" cy="914400"/>
+            <a:off x="548640" y="1143000"/>
+            <a:ext cx="11064240" cy="5029200"/>
           </a:xfrm>
           <a:prstGeom prst="rect">
             <a:avLst/>
@@ -6656,7 +7679,7 @@
                 <a:spcPts val="2200"/>
               </a:lnSpc>
               <a:spcAft>
-                <a:spcPts val="200"/>
+                <a:spcPts val="400"/>
               </a:spcAft>
               <a:defRPr sz="2000" b="0">
                 <a:solidFill>
@@ -6666,38 +7689,233 @@
               </a:defRPr>
             </a:pPr>
             <a:r>
-              <a:t>$ head -20 module8/.solutions/CAPSTONE_PROJECT.md</a:t>
-            </a:r>
-          </a:p>
-        </p:txBody>
-      </p:sp>
-      <p:pic>
-        <p:nvPicPr>
-          <p:cNvPr id="4" name="Picture 3" descr="ex04_solutions.png"/>
-          <p:cNvPicPr>
-            <a:picLocks noChangeAspect="1"/>
-          </p:cNvPicPr>
-          <p:nvPr/>
-        </p:nvPicPr>
-        <p:blipFill>
-          <a:blip r:embed="rId2"/>
-          <a:stretch>
-            <a:fillRect/>
-          </a:stretch>
-        </p:blipFill>
-        <p:spPr>
-          <a:xfrm>
-            <a:off x="548640" y="1965960"/>
-            <a:ext cx="7071358" cy="3977639"/>
-          </a:xfrm>
-          <a:prstGeom prst="rect">
-            <a:avLst/>
-          </a:prstGeom>
-        </p:spPr>
-      </p:pic>
-      <p:sp>
-        <p:nvSpPr>
-          <p:cNvPr id="5" name="TextBox 4"/>
+              <a:t>#!/usr/bin/env bash</a:t>
+            </a:r>
+          </a:p>
+          <a:p>
+            <a:pPr>
+              <a:lnSpc>
+                <a:spcPts val="2200"/>
+              </a:lnSpc>
+              <a:spcAft>
+                <a:spcPts val="400"/>
+              </a:spcAft>
+              <a:defRPr sz="2000" b="0">
+                <a:solidFill>
+                  <a:srgbClr val="333333"/>
+                </a:solidFill>
+                <a:latin typeface="Consolas"/>
+              </a:defRPr>
+            </a:pPr>
+          </a:p>
+          <a:p>
+            <a:pPr>
+              <a:lnSpc>
+                <a:spcPts val="2200"/>
+              </a:lnSpc>
+              <a:spcAft>
+                <a:spcPts val="400"/>
+              </a:spcAft>
+              <a:defRPr sz="2000" b="0">
+                <a:solidFill>
+                  <a:srgbClr val="333333"/>
+                </a:solidFill>
+                <a:latin typeface="Consolas"/>
+              </a:defRPr>
+            </a:pPr>
+            <a:r>
+              <a:t># Module 8: Capstone Orchestrator</a:t>
+            </a:r>
+          </a:p>
+          <a:p>
+            <a:pPr>
+              <a:lnSpc>
+                <a:spcPts val="2200"/>
+              </a:lnSpc>
+              <a:spcAft>
+                <a:spcPts val="400"/>
+              </a:spcAft>
+              <a:defRPr sz="2000" b="0">
+                <a:solidFill>
+                  <a:srgbClr val="333333"/>
+                </a:solidFill>
+                <a:latin typeface="Consolas"/>
+              </a:defRPr>
+            </a:pPr>
+            <a:r>
+              <a:t># This script summarizes and checks the artifacts for the Module 8</a:t>
+            </a:r>
+          </a:p>
+          <a:p>
+            <a:pPr>
+              <a:lnSpc>
+                <a:spcPts val="2200"/>
+              </a:lnSpc>
+              <a:spcAft>
+                <a:spcPts val="400"/>
+              </a:spcAft>
+              <a:defRPr sz="2000" b="0">
+                <a:solidFill>
+                  <a:srgbClr val="333333"/>
+                </a:solidFill>
+                <a:latin typeface="Consolas"/>
+              </a:defRPr>
+            </a:pPr>
+            <a:r>
+              <a:t>capstone.</a:t>
+            </a:r>
+          </a:p>
+          <a:p>
+            <a:pPr>
+              <a:lnSpc>
+                <a:spcPts val="2200"/>
+              </a:lnSpc>
+              <a:spcAft>
+                <a:spcPts val="400"/>
+              </a:spcAft>
+              <a:defRPr sz="2000" b="0">
+                <a:solidFill>
+                  <a:srgbClr val="333333"/>
+                </a:solidFill>
+                <a:latin typeface="Consolas"/>
+              </a:defRPr>
+            </a:pPr>
+            <a:r>
+              <a:t># Usage: ./scripts/module8.sh [OPTIONS]</a:t>
+            </a:r>
+          </a:p>
+          <a:p>
+            <a:pPr>
+              <a:lnSpc>
+                <a:spcPts val="2200"/>
+              </a:lnSpc>
+              <a:spcAft>
+                <a:spcPts val="400"/>
+              </a:spcAft>
+              <a:defRPr sz="2000" b="0">
+                <a:solidFill>
+                  <a:srgbClr val="333333"/>
+                </a:solidFill>
+                <a:latin typeface="Consolas"/>
+              </a:defRPr>
+            </a:pPr>
+          </a:p>
+          <a:p>
+            <a:pPr>
+              <a:lnSpc>
+                <a:spcPts val="2200"/>
+              </a:lnSpc>
+              <a:spcAft>
+                <a:spcPts val="400"/>
+              </a:spcAft>
+              <a:defRPr sz="2000" b="0">
+                <a:solidFill>
+                  <a:srgbClr val="333333"/>
+                </a:solidFill>
+                <a:latin typeface="Consolas"/>
+              </a:defRPr>
+            </a:pPr>
+            <a:r>
+              <a:t>set -euo pipefail</a:t>
+            </a:r>
+          </a:p>
+          <a:p>
+            <a:pPr>
+              <a:lnSpc>
+                <a:spcPts val="2200"/>
+              </a:lnSpc>
+              <a:spcAft>
+                <a:spcPts val="400"/>
+              </a:spcAft>
+              <a:defRPr sz="2000" b="0">
+                <a:solidFill>
+                  <a:srgbClr val="333333"/>
+                </a:solidFill>
+                <a:latin typeface="Consolas"/>
+              </a:defRPr>
+            </a:pPr>
+          </a:p>
+          <a:p>
+            <a:pPr>
+              <a:lnSpc>
+                <a:spcPts val="2200"/>
+              </a:lnSpc>
+              <a:spcAft>
+                <a:spcPts val="400"/>
+              </a:spcAft>
+              <a:defRPr sz="2000" b="0">
+                <a:solidFill>
+                  <a:srgbClr val="333333"/>
+                </a:solidFill>
+                <a:latin typeface="Consolas"/>
+              </a:defRPr>
+            </a:pPr>
+            <a:r>
+              <a:t># Colors for output</a:t>
+            </a:r>
+          </a:p>
+          <a:p>
+            <a:pPr>
+              <a:lnSpc>
+                <a:spcPts val="2200"/>
+              </a:lnSpc>
+              <a:spcAft>
+                <a:spcPts val="400"/>
+              </a:spcAft>
+              <a:defRPr sz="2000" b="0">
+                <a:solidFill>
+                  <a:srgbClr val="333333"/>
+                </a:solidFill>
+                <a:latin typeface="Consolas"/>
+              </a:defRPr>
+            </a:pPr>
+            <a:r>
+              <a:t>RED='\033[0;31m'</a:t>
+            </a:r>
+          </a:p>
+          <a:p>
+            <a:pPr>
+              <a:lnSpc>
+                <a:spcPts val="2200"/>
+              </a:lnSpc>
+              <a:spcAft>
+                <a:spcPts val="400"/>
+              </a:spcAft>
+              <a:defRPr sz="2000" b="0">
+                <a:solidFill>
+                  <a:srgbClr val="333333"/>
+                </a:solidFill>
+                <a:latin typeface="Consolas"/>
+              </a:defRPr>
+            </a:pPr>
+            <a:r>
+              <a:t>GREEN='\033[0;32m'</a:t>
+            </a:r>
+          </a:p>
+          <a:p>
+            <a:pPr>
+              <a:lnSpc>
+                <a:spcPts val="2200"/>
+              </a:lnSpc>
+              <a:spcAft>
+                <a:spcPts val="400"/>
+              </a:spcAft>
+              <a:defRPr sz="2000" b="0">
+                <a:solidFill>
+                  <a:srgbClr val="333333"/>
+                </a:solidFill>
+                <a:latin typeface="Consolas"/>
+              </a:defRPr>
+            </a:pPr>
+            <a:r>
+              <a:t>YELLOW='\033[1;33m'</a:t>
+            </a:r>
+          </a:p>
+        </p:txBody>
+      </p:sp>
+      <p:sp>
+        <p:nvSpPr>
+          <p:cNvPr id="4" name="TextBox 3"/>
           <p:cNvSpPr txBox="1"/>
           <p:nvPr/>
         </p:nvSpPr>
@@ -6760,8 +7978,8 @@
         </p:nvSpPr>
         <p:spPr>
           <a:xfrm>
-            <a:off x="548640" y="411480"/>
-            <a:ext cx="11064240" cy="777240"/>
+            <a:off x="548640" y="2743200"/>
+            <a:ext cx="11064240" cy="1371600"/>
           </a:xfrm>
           <a:prstGeom prst="rect">
             <a:avLst/>
@@ -6774,11 +7992,11 @@
           </a:bodyPr>
           <a:lstStyle/>
           <a:p>
-            <a:pPr>
-              <a:lnSpc>
-                <a:spcPts val="2200"/>
-              </a:lnSpc>
-              <a:defRPr sz="2800" b="1">
+            <a:pPr algn="ctr">
+              <a:lnSpc>
+                <a:spcPts val="2200"/>
+              </a:lnSpc>
+              <a:defRPr sz="3600" b="1">
                 <a:solidFill>
                   <a:srgbClr val="1A1A2E"/>
                 </a:solidFill>
@@ -6786,7 +8004,7 @@
               </a:defRPr>
             </a:pPr>
             <a:r>
-              <a:t>Demo: Module validation</a:t>
+              <a:t>Command reference highlights</a:t>
             </a:r>
           </a:p>
         </p:txBody>
@@ -6794,74 +8012,6 @@
       <p:sp>
         <p:nvSpPr>
           <p:cNvPr id="3" name="TextBox 2"/>
-          <p:cNvSpPr txBox="1"/>
-          <p:nvPr/>
-        </p:nvSpPr>
-        <p:spPr>
-          <a:xfrm>
-            <a:off x="548640" y="1051560"/>
-            <a:ext cx="11064240" cy="914400"/>
-          </a:xfrm>
-          <a:prstGeom prst="rect">
-            <a:avLst/>
-          </a:prstGeom>
-          <a:solidFill>
-            <a:srgbClr val="F4F4F4"/>
-          </a:solidFill>
-        </p:spPr>
-        <p:txBody>
-          <a:bodyPr wrap="square">
-            <a:noAutofit/>
-          </a:bodyPr>
-          <a:lstStyle/>
-          <a:p>
-            <a:pPr>
-              <a:lnSpc>
-                <a:spcPts val="2200"/>
-              </a:lnSpc>
-              <a:spcAft>
-                <a:spcPts val="200"/>
-              </a:spcAft>
-              <a:defRPr sz="2000" b="0">
-                <a:solidFill>
-                  <a:srgbClr val="333333"/>
-                </a:solidFill>
-                <a:latin typeface="Consolas"/>
-              </a:defRPr>
-            </a:pPr>
-            <a:r>
-              <a:t>$ ./scripts/module8.sh --check</a:t>
-            </a:r>
-          </a:p>
-        </p:txBody>
-      </p:sp>
-      <p:pic>
-        <p:nvPicPr>
-          <p:cNvPr id="4" name="Picture 3" descr="ex05_validate.png"/>
-          <p:cNvPicPr>
-            <a:picLocks noChangeAspect="1"/>
-          </p:cNvPicPr>
-          <p:nvPr/>
-        </p:nvPicPr>
-        <p:blipFill>
-          <a:blip r:embed="rId2"/>
-          <a:stretch>
-            <a:fillRect/>
-          </a:stretch>
-        </p:blipFill>
-        <p:spPr>
-          <a:xfrm>
-            <a:off x="548640" y="1965960"/>
-            <a:ext cx="7071358" cy="3977639"/>
-          </a:xfrm>
-          <a:prstGeom prst="rect">
-            <a:avLst/>
-          </a:prstGeom>
-        </p:spPr>
-      </p:pic>
-      <p:sp>
-        <p:nvSpPr>
-          <p:cNvPr id="5" name="TextBox 4"/>
           <p:cNvSpPr txBox="1"/>
           <p:nvPr/>
         </p:nvSpPr>
@@ -6924,8 +8074,8 @@
         </p:nvSpPr>
         <p:spPr>
           <a:xfrm>
-            <a:off x="548640" y="2743200"/>
-            <a:ext cx="11064240" cy="1371600"/>
+            <a:off x="548640" y="411480"/>
+            <a:ext cx="11064240" cy="777240"/>
           </a:xfrm>
           <a:prstGeom prst="rect">
             <a:avLst/>
@@ -6938,11 +8088,11 @@
           </a:bodyPr>
           <a:lstStyle/>
           <a:p>
-            <a:pPr algn="ctr">
-              <a:lnSpc>
-                <a:spcPts val="2200"/>
-              </a:lnSpc>
-              <a:defRPr sz="3600" b="1">
+            <a:pPr>
+              <a:lnSpc>
+                <a:spcPts val="2200"/>
+              </a:lnSpc>
+              <a:defRPr sz="2800" b="1">
                 <a:solidFill>
                   <a:srgbClr val="1A1A2E"/>
                 </a:solidFill>
@@ -6950,7 +8100,7 @@
               </a:defRPr>
             </a:pPr>
             <a:r>
-              <a:t>Practice &amp; assessment</a:t>
+              <a:t>Scaffold and validate capstone</a:t>
             </a:r>
           </a:p>
         </p:txBody>
@@ -6958,6 +8108,48 @@
       <p:sp>
         <p:nvSpPr>
           <p:cNvPr id="3" name="TextBox 2"/>
+          <p:cNvSpPr txBox="1"/>
+          <p:nvPr/>
+        </p:nvSpPr>
+        <p:spPr>
+          <a:xfrm>
+            <a:off x="548640" y="1234440"/>
+            <a:ext cx="11064240" cy="4937760"/>
+          </a:xfrm>
+          <a:prstGeom prst="rect">
+            <a:avLst/>
+          </a:prstGeom>
+          <a:noFill/>
+        </p:spPr>
+        <p:txBody>
+          <a:bodyPr wrap="square">
+            <a:noAutofit/>
+          </a:bodyPr>
+          <a:lstStyle/>
+          <a:p>
+            <a:pPr>
+              <a:lnSpc>
+                <a:spcPts val="2200"/>
+              </a:lnSpc>
+              <a:spcAft>
+                <a:spcPts val="1000"/>
+              </a:spcAft>
+              <a:defRPr sz="2000" b="0">
+                <a:solidFill>
+                  <a:srgbClr val="333333"/>
+                </a:solidFill>
+                <a:latin typeface="Calibri"/>
+              </a:defRPr>
+            </a:pPr>
+            <a:r>
+              <a:t>• ./scripts/module8.sh --scaffold</a:t>
+            </a:r>
+          </a:p>
+        </p:txBody>
+      </p:sp>
+      <p:sp>
+        <p:nvSpPr>
+          <p:cNvPr id="4" name="TextBox 3"/>
           <p:cNvSpPr txBox="1"/>
           <p:nvPr/>
         </p:nvSpPr>
@@ -7046,7 +8238,7 @@
               </a:defRPr>
             </a:pPr>
             <a:r>
-              <a:t>What you should know (1/2)</a:t>
+              <a:t>Review capstone templates</a:t>
             </a:r>
           </a:p>
         </p:txBody>
@@ -7088,235 +8280,7 @@
               </a:defRPr>
             </a:pPr>
             <a:r>
-              <a:t>• Drive an end‑to‑end verification effort from</a:t>
-            </a:r>
-          </a:p>
-          <a:p>
-            <a:pPr>
-              <a:lnSpc>
-                <a:spcPts val="2200"/>
-              </a:lnSpc>
-              <a:spcAft>
-                <a:spcPts val="1000"/>
-              </a:spcAft>
-              <a:defRPr sz="2000" b="0">
-                <a:solidFill>
-                  <a:srgbClr val="333333"/>
-                </a:solidFill>
-                <a:latin typeface="Calibri"/>
-              </a:defRPr>
-            </a:pPr>
-            <a:r>
-              <a:t>      requirements → plan → env → tests → coverage →</a:t>
-            </a:r>
-          </a:p>
-          <a:p>
-            <a:pPr>
-              <a:lnSpc>
-                <a:spcPts val="2200"/>
-              </a:lnSpc>
-              <a:spcAft>
-                <a:spcPts val="1000"/>
-              </a:spcAft>
-              <a:defRPr sz="2000" b="0">
-                <a:solidFill>
-                  <a:srgbClr val="333333"/>
-                </a:solidFill>
-                <a:latin typeface="Calibri"/>
-              </a:defRPr>
-            </a:pPr>
-            <a:r>
-              <a:t>      regress…</a:t>
-            </a:r>
-          </a:p>
-          <a:p>
-            <a:pPr>
-              <a:lnSpc>
-                <a:spcPts val="2200"/>
-              </a:lnSpc>
-              <a:spcAft>
-                <a:spcPts val="1000"/>
-              </a:spcAft>
-              <a:defRPr sz="2000" b="0">
-                <a:solidFill>
-                  <a:srgbClr val="333333"/>
-                </a:solidFill>
-                <a:latin typeface="Calibri"/>
-              </a:defRPr>
-            </a:pPr>
-            <a:r>
-              <a:t>• Deliver a coherent, documented verification package</a:t>
-            </a:r>
-          </a:p>
-          <a:p>
-            <a:pPr>
-              <a:lnSpc>
-                <a:spcPts val="2200"/>
-              </a:lnSpc>
-              <a:spcAft>
-                <a:spcPts val="1000"/>
-              </a:spcAft>
-              <a:defRPr sz="2000" b="0">
-                <a:solidFill>
-                  <a:srgbClr val="333333"/>
-                </a:solidFill>
-                <a:latin typeface="Calibri"/>
-              </a:defRPr>
-            </a:pPr>
-            <a:r>
-              <a:t>      or VIP that others can understand and use.</a:t>
-            </a:r>
-          </a:p>
-          <a:p>
-            <a:pPr>
-              <a:lnSpc>
-                <a:spcPts val="2200"/>
-              </a:lnSpc>
-              <a:spcAft>
-                <a:spcPts val="1000"/>
-              </a:spcAft>
-              <a:defRPr sz="2000" b="0">
-                <a:solidFill>
-                  <a:srgbClr val="333333"/>
-                </a:solidFill>
-                <a:latin typeface="Calibri"/>
-              </a:defRPr>
-            </a:pPr>
-            <a:r>
-              <a:t>• Reflect on trade‑offs and improvements as if you</a:t>
-            </a:r>
-          </a:p>
-          <a:p>
-            <a:pPr>
-              <a:lnSpc>
-                <a:spcPts val="2200"/>
-              </a:lnSpc>
-              <a:spcAft>
-                <a:spcPts val="1000"/>
-              </a:spcAft>
-              <a:defRPr sz="2000" b="0">
-                <a:solidFill>
-                  <a:srgbClr val="333333"/>
-                </a:solidFill>
-                <a:latin typeface="Calibri"/>
-              </a:defRPr>
-            </a:pPr>
-            <a:r>
-              <a:t>      were preparing for a real project review.</a:t>
-            </a:r>
-          </a:p>
-          <a:p>
-            <a:pPr>
-              <a:lnSpc>
-                <a:spcPts val="2200"/>
-              </a:lnSpc>
-              <a:spcAft>
-                <a:spcPts val="1000"/>
-              </a:spcAft>
-              <a:defRPr sz="2000" b="0">
-                <a:solidFill>
-                  <a:srgbClr val="333333"/>
-                </a:solidFill>
-                <a:latin typeface="Calibri"/>
-              </a:defRPr>
-            </a:pPr>
-            <a:r>
-              <a:t>• A clearly defined capstone project documented in</a:t>
-            </a:r>
-          </a:p>
-          <a:p>
-            <a:pPr>
-              <a:lnSpc>
-                <a:spcPts val="2200"/>
-              </a:lnSpc>
-              <a:spcAft>
-                <a:spcPts val="1000"/>
-              </a:spcAft>
-              <a:defRPr sz="2000" b="0">
-                <a:solidFill>
-                  <a:srgbClr val="333333"/>
-                </a:solidFill>
-                <a:latin typeface="Calibri"/>
-              </a:defRPr>
-            </a:pPr>
-            <a:r>
-              <a:t>      `capstone_project.md`.</a:t>
-            </a:r>
-          </a:p>
-          <a:p>
-            <a:pPr>
-              <a:lnSpc>
-                <a:spcPts val="2200"/>
-              </a:lnSpc>
-              <a:spcAft>
-                <a:spcPts val="1000"/>
-              </a:spcAft>
-              <a:defRPr sz="2000" b="0">
-                <a:solidFill>
-                  <a:srgbClr val="333333"/>
-                </a:solidFill>
-                <a:latin typeface="Calibri"/>
-              </a:defRPr>
-            </a:pPr>
-            <a:r>
-              <a:t>• Evidence that Modules 1–7 have been applied (plans,</a:t>
-            </a:r>
-          </a:p>
-          <a:p>
-            <a:pPr>
-              <a:lnSpc>
-                <a:spcPts val="2200"/>
-              </a:lnSpc>
-              <a:spcAft>
-                <a:spcPts val="1000"/>
-              </a:spcAft>
-              <a:defRPr sz="2000" b="0">
-                <a:solidFill>
-                  <a:srgbClr val="333333"/>
-                </a:solidFill>
-                <a:latin typeface="Calibri"/>
-              </a:defRPr>
-            </a:pPr>
-            <a:r>
-              <a:t>      env, tests, coverage, regressions).</a:t>
-            </a:r>
-          </a:p>
-          <a:p>
-            <a:pPr>
-              <a:lnSpc>
-                <a:spcPts val="2200"/>
-              </a:lnSpc>
-              <a:spcAft>
-                <a:spcPts val="1000"/>
-              </a:spcAft>
-              <a:defRPr sz="2000" b="0">
-                <a:solidFill>
-                  <a:srgbClr val="333333"/>
-                </a:solidFill>
-                <a:latin typeface="Calibri"/>
-              </a:defRPr>
-            </a:pPr>
-            <a:r>
-              <a:t>• A “deliverable” verification solution or VIP (code +</a:t>
-            </a:r>
-          </a:p>
-          <a:p>
-            <a:pPr>
-              <a:lnSpc>
-                <a:spcPts val="2200"/>
-              </a:lnSpc>
-              <a:spcAft>
-                <a:spcPts val="1000"/>
-              </a:spcAft>
-              <a:defRPr sz="2000" b="0">
-                <a:solidFill>
-                  <a:srgbClr val="333333"/>
-                </a:solidFill>
-                <a:latin typeface="Calibri"/>
-              </a:defRPr>
-            </a:pPr>
-            <a:r>
-              <a:t>      docs) that could be handed to another team.</a:t>
+              <a:t>• head -45 module8/templates/CAPSTONE_PROJECT.md</a:t>
             </a:r>
           </a:p>
         </p:txBody>
@@ -7386,8 +8350,8 @@
         </p:nvSpPr>
         <p:spPr>
           <a:xfrm>
-            <a:off x="548640" y="411480"/>
-            <a:ext cx="11064240" cy="777240"/>
+            <a:off x="548640" y="2743200"/>
+            <a:ext cx="11064240" cy="1371600"/>
           </a:xfrm>
           <a:prstGeom prst="rect">
             <a:avLst/>
@@ -7400,11 +8364,11 @@
           </a:bodyPr>
           <a:lstStyle/>
           <a:p>
-            <a:pPr>
-              <a:lnSpc>
-                <a:spcPts val="2200"/>
-              </a:lnSpc>
-              <a:defRPr sz="2800" b="1">
+            <a:pPr algn="ctr">
+              <a:lnSpc>
+                <a:spcPts val="2200"/>
+              </a:lnSpc>
+              <a:defRPr sz="3600" b="1">
                 <a:solidFill>
                   <a:srgbClr val="1A1A2E"/>
                 </a:solidFill>
@@ -7412,7 +8376,7 @@
               </a:defRPr>
             </a:pPr>
             <a:r>
-              <a:t>What you should know (2/2)</a:t>
+              <a:t>Hands-on examples</a:t>
             </a:r>
           </a:p>
         </p:txBody>
@@ -7420,67 +8384,6 @@
       <p:sp>
         <p:nvSpPr>
           <p:cNvPr id="3" name="TextBox 2"/>
-          <p:cNvSpPr txBox="1"/>
-          <p:nvPr/>
-        </p:nvSpPr>
-        <p:spPr>
-          <a:xfrm>
-            <a:off x="548640" y="1234440"/>
-            <a:ext cx="11064240" cy="4937760"/>
-          </a:xfrm>
-          <a:prstGeom prst="rect">
-            <a:avLst/>
-          </a:prstGeom>
-          <a:noFill/>
-        </p:spPr>
-        <p:txBody>
-          <a:bodyPr wrap="square">
-            <a:noAutofit/>
-          </a:bodyPr>
-          <a:lstStyle/>
-          <a:p>
-            <a:pPr>
-              <a:lnSpc>
-                <a:spcPts val="2200"/>
-              </a:lnSpc>
-              <a:spcAft>
-                <a:spcPts val="1000"/>
-              </a:spcAft>
-              <a:defRPr sz="2000" b="0">
-                <a:solidFill>
-                  <a:srgbClr val="333333"/>
-                </a:solidFill>
-                <a:latin typeface="Calibri"/>
-              </a:defRPr>
-            </a:pPr>
-            <a:r>
-              <a:t>• A short written or presented retrospective on what</a:t>
-            </a:r>
-          </a:p>
-          <a:p>
-            <a:pPr>
-              <a:lnSpc>
-                <a:spcPts val="2200"/>
-              </a:lnSpc>
-              <a:spcAft>
-                <a:spcPts val="1000"/>
-              </a:spcAft>
-              <a:defRPr sz="2000" b="0">
-                <a:solidFill>
-                  <a:srgbClr val="333333"/>
-                </a:solidFill>
-                <a:latin typeface="Calibri"/>
-              </a:defRPr>
-            </a:pPr>
-            <a:r>
-              <a:t>      worked, what didn’t, and what you’d improve next.</a:t>
-            </a:r>
-          </a:p>
-        </p:txBody>
-      </p:sp>
-      <p:sp>
-        <p:nvSpPr>
-          <p:cNvPr id="4" name="TextBox 3"/>
           <p:cNvSpPr txBox="1"/>
           <p:nvPr/>
         </p:nvSpPr>
@@ -7569,7 +8472,7 @@
               </a:defRPr>
             </a:pPr>
             <a:r>
-              <a:t>Assessment checklist</a:t>
+              <a:t>Module 8 self-check</a:t>
             </a:r>
           </a:p>
         </p:txBody>
@@ -7582,13 +8485,15 @@
         </p:nvSpPr>
         <p:spPr>
           <a:xfrm>
-            <a:off x="548640" y="1234440"/>
-            <a:ext cx="11064240" cy="4937760"/>
+            <a:off x="548640" y="1051560"/>
+            <a:ext cx="11064240" cy="914400"/>
           </a:xfrm>
           <a:prstGeom prst="rect">
             <a:avLst/>
           </a:prstGeom>
-          <a:noFill/>
+          <a:solidFill>
+            <a:srgbClr val="F4F4F4"/>
+          </a:solidFill>
         </p:spPr>
         <p:txBody>
           <a:bodyPr wrap="square">
@@ -7601,157 +8506,48 @@
                 <a:spcPts val="2200"/>
               </a:lnSpc>
               <a:spcAft>
-                <a:spcPts val="1000"/>
-              </a:spcAft>
-              <a:defRPr sz="2000" b="0">
-                <a:solidFill>
-                  <a:srgbClr val="333333"/>
-                </a:solidFill>
-                <a:latin typeface="Calibri"/>
-              </a:defRPr>
-            </a:pPr>
-            <a:r>
-              <a:t>• A clearly defined capstone project documented in</a:t>
-            </a:r>
-          </a:p>
-          <a:p>
-            <a:pPr>
-              <a:lnSpc>
-                <a:spcPts val="2200"/>
-              </a:lnSpc>
-              <a:spcAft>
-                <a:spcPts val="1000"/>
-              </a:spcAft>
-              <a:defRPr sz="2000" b="0">
-                <a:solidFill>
-                  <a:srgbClr val="333333"/>
-                </a:solidFill>
-                <a:latin typeface="Calibri"/>
-              </a:defRPr>
-            </a:pPr>
-            <a:r>
-              <a:t>      `capstone_project.md`.</a:t>
-            </a:r>
-          </a:p>
-          <a:p>
-            <a:pPr>
-              <a:lnSpc>
-                <a:spcPts val="2200"/>
-              </a:lnSpc>
-              <a:spcAft>
-                <a:spcPts val="1000"/>
-              </a:spcAft>
-              <a:defRPr sz="2000" b="0">
-                <a:solidFill>
-                  <a:srgbClr val="333333"/>
-                </a:solidFill>
-                <a:latin typeface="Calibri"/>
-              </a:defRPr>
-            </a:pPr>
-            <a:r>
-              <a:t>• Evidence that Modules 1–7 have been applied (plans,</a:t>
-            </a:r>
-          </a:p>
-          <a:p>
-            <a:pPr>
-              <a:lnSpc>
-                <a:spcPts val="2200"/>
-              </a:lnSpc>
-              <a:spcAft>
-                <a:spcPts val="1000"/>
-              </a:spcAft>
-              <a:defRPr sz="2000" b="0">
-                <a:solidFill>
-                  <a:srgbClr val="333333"/>
-                </a:solidFill>
-                <a:latin typeface="Calibri"/>
-              </a:defRPr>
-            </a:pPr>
-            <a:r>
-              <a:t>      env, tests, coverage, regressions).</a:t>
-            </a:r>
-          </a:p>
-          <a:p>
-            <a:pPr>
-              <a:lnSpc>
-                <a:spcPts val="2200"/>
-              </a:lnSpc>
-              <a:spcAft>
-                <a:spcPts val="1000"/>
-              </a:spcAft>
-              <a:defRPr sz="2000" b="0">
-                <a:solidFill>
-                  <a:srgbClr val="333333"/>
-                </a:solidFill>
-                <a:latin typeface="Calibri"/>
-              </a:defRPr>
-            </a:pPr>
-            <a:r>
-              <a:t>• A “deliverable” verification solution or VIP (code +</a:t>
-            </a:r>
-          </a:p>
-          <a:p>
-            <a:pPr>
-              <a:lnSpc>
-                <a:spcPts val="2200"/>
-              </a:lnSpc>
-              <a:spcAft>
-                <a:spcPts val="1000"/>
-              </a:spcAft>
-              <a:defRPr sz="2000" b="0">
-                <a:solidFill>
-                  <a:srgbClr val="333333"/>
-                </a:solidFill>
-                <a:latin typeface="Calibri"/>
-              </a:defRPr>
-            </a:pPr>
-            <a:r>
-              <a:t>      docs) that could be handed to another team.</a:t>
-            </a:r>
-          </a:p>
-          <a:p>
-            <a:pPr>
-              <a:lnSpc>
-                <a:spcPts val="2200"/>
-              </a:lnSpc>
-              <a:spcAft>
-                <a:spcPts val="1000"/>
-              </a:spcAft>
-              <a:defRPr sz="2000" b="0">
-                <a:solidFill>
-                  <a:srgbClr val="333333"/>
-                </a:solidFill>
-                <a:latin typeface="Calibri"/>
-              </a:defRPr>
-            </a:pPr>
-            <a:r>
-              <a:t>• A short written or presented retrospective on what</a:t>
-            </a:r>
-          </a:p>
-          <a:p>
-            <a:pPr>
-              <a:lnSpc>
-                <a:spcPts val="2200"/>
-              </a:lnSpc>
-              <a:spcAft>
-                <a:spcPts val="1000"/>
-              </a:spcAft>
-              <a:defRPr sz="2000" b="0">
-                <a:solidFill>
-                  <a:srgbClr val="333333"/>
-                </a:solidFill>
-                <a:latin typeface="Calibri"/>
-              </a:defRPr>
-            </a:pPr>
-            <a:r>
-              <a:t>      worked, what didn’t, and what you’d improve next.</a:t>
-            </a:r>
-          </a:p>
-        </p:txBody>
-      </p:sp>
-      <p:sp>
-        <p:nvSpPr>
-          <p:cNvPr id="4" name="TextBox 3"/>
+                <a:spcPts val="200"/>
+              </a:spcAft>
+              <a:defRPr sz="2000" b="0">
+                <a:solidFill>
+                  <a:srgbClr val="333333"/>
+                </a:solidFill>
+                <a:latin typeface="Consolas"/>
+              </a:defRPr>
+            </a:pPr>
+            <a:r>
+              <a:t>$ ./scripts/module8.sh --help</a:t>
+            </a:r>
+          </a:p>
+        </p:txBody>
+      </p:sp>
+      <p:pic>
+        <p:nvPicPr>
+          <p:cNvPr id="4" name="Picture 3" descr="module8_check.png"/>
+          <p:cNvPicPr>
+            <a:picLocks noChangeAspect="1"/>
+          </p:cNvPicPr>
+          <p:nvPr/>
+        </p:nvPicPr>
+        <p:blipFill>
+          <a:blip r:embed="rId2"/>
+          <a:stretch>
+            <a:fillRect/>
+          </a:stretch>
+        </p:blipFill>
+        <p:spPr>
+          <a:xfrm>
+            <a:off x="548640" y="1965960"/>
+            <a:ext cx="7071358" cy="3977639"/>
+          </a:xfrm>
+          <a:prstGeom prst="rect">
+            <a:avLst/>
+          </a:prstGeom>
+        </p:spPr>
+      </p:pic>
+      <p:sp>
+        <p:nvSpPr>
+          <p:cNvPr id="5" name="TextBox 4"/>
           <p:cNvSpPr txBox="1"/>
           <p:nvPr/>
         </p:nvSpPr>
@@ -7840,7 +8636,7 @@
               </a:defRPr>
             </a:pPr>
             <a:r>
-              <a:t>Summary &amp; next steps</a:t>
+              <a:t>Demo: Capstone project template</a:t>
             </a:r>
           </a:p>
         </p:txBody>
@@ -7853,8 +8649,76 @@
         </p:nvSpPr>
         <p:spPr>
           <a:xfrm>
-            <a:off x="548640" y="1234440"/>
-            <a:ext cx="11064240" cy="4937760"/>
+            <a:off x="548640" y="1051560"/>
+            <a:ext cx="11064240" cy="914400"/>
+          </a:xfrm>
+          <a:prstGeom prst="rect">
+            <a:avLst/>
+          </a:prstGeom>
+          <a:solidFill>
+            <a:srgbClr val="F4F4F4"/>
+          </a:solidFill>
+        </p:spPr>
+        <p:txBody>
+          <a:bodyPr wrap="square">
+            <a:noAutofit/>
+          </a:bodyPr>
+          <a:lstStyle/>
+          <a:p>
+            <a:pPr>
+              <a:lnSpc>
+                <a:spcPts val="2200"/>
+              </a:lnSpc>
+              <a:spcAft>
+                <a:spcPts val="200"/>
+              </a:spcAft>
+              <a:defRPr sz="2000" b="0">
+                <a:solidFill>
+                  <a:srgbClr val="333333"/>
+                </a:solidFill>
+                <a:latin typeface="Consolas"/>
+              </a:defRPr>
+            </a:pPr>
+            <a:r>
+              <a:t>$ head -35 module8/templates/CAPSTONE_PROJECT.md</a:t>
+            </a:r>
+          </a:p>
+        </p:txBody>
+      </p:sp>
+      <p:pic>
+        <p:nvPicPr>
+          <p:cNvPr id="4" name="Picture 3" descr="ex01_capstone.png"/>
+          <p:cNvPicPr>
+            <a:picLocks noChangeAspect="1"/>
+          </p:cNvPicPr>
+          <p:nvPr/>
+        </p:nvPicPr>
+        <p:blipFill>
+          <a:blip r:embed="rId2"/>
+          <a:stretch>
+            <a:fillRect/>
+          </a:stretch>
+        </p:blipFill>
+        <p:spPr>
+          <a:xfrm>
+            <a:off x="548640" y="1965960"/>
+            <a:ext cx="7071358" cy="3977639"/>
+          </a:xfrm>
+          <a:prstGeom prst="rect">
+            <a:avLst/>
+          </a:prstGeom>
+        </p:spPr>
+      </p:pic>
+      <p:sp>
+        <p:nvSpPr>
+          <p:cNvPr id="5" name="TextBox 4"/>
+          <p:cNvSpPr txBox="1"/>
+          <p:nvPr/>
+        </p:nvSpPr>
+        <p:spPr>
+          <a:xfrm>
+            <a:off x="548640" y="6355080"/>
+            <a:ext cx="11064240" cy="320040"/>
           </a:xfrm>
           <a:prstGeom prst="rect">
             <a:avLst/>
@@ -7867,105 +8731,479 @@
           </a:bodyPr>
           <a:lstStyle/>
           <a:p>
-            <a:pPr>
-              <a:lnSpc>
-                <a:spcPts val="2200"/>
-              </a:lnSpc>
-              <a:spcAft>
-                <a:spcPts val="1000"/>
-              </a:spcAft>
-              <a:defRPr sz="2000" b="0">
-                <a:solidFill>
-                  <a:srgbClr val="333333"/>
-                </a:solidFill>
-                <a:latin typeface="Calibri"/>
-              </a:defRPr>
-            </a:pPr>
-            <a:r>
-              <a:t>• Plan and execute a **single, substantial capstone</a:t>
-            </a:r>
-          </a:p>
-          <a:p>
-            <a:pPr>
-              <a:lnSpc>
-                <a:spcPts val="2200"/>
-              </a:lnSpc>
-              <a:spcAft>
-                <a:spcPts val="1000"/>
-              </a:spcAft>
-              <a:defRPr sz="2000" b="0">
-                <a:solidFill>
-                  <a:srgbClr val="333333"/>
-                </a:solidFill>
-                <a:latin typeface="Calibri"/>
-              </a:defRPr>
-            </a:pPr>
-            <a:r>
-              <a:t>      project** that exercises the full verification li…</a:t>
-            </a:r>
-          </a:p>
-          <a:p>
-            <a:pPr>
-              <a:lnSpc>
-                <a:spcPts val="2200"/>
-              </a:lnSpc>
-              <a:spcAft>
-                <a:spcPts val="1000"/>
-              </a:spcAft>
-              <a:defRPr sz="2000" b="0">
-                <a:solidFill>
-                  <a:srgbClr val="333333"/>
-                </a:solidFill>
-                <a:latin typeface="Calibri"/>
-              </a:defRPr>
-            </a:pPr>
-            <a:r>
-              <a:t>• Complete module8/CHECKLIST.md</a:t>
-            </a:r>
-          </a:p>
-          <a:p>
-            <a:pPr>
-              <a:lnSpc>
-                <a:spcPts val="2200"/>
-              </a:lnSpc>
-              <a:spcAft>
-                <a:spcPts val="1000"/>
-              </a:spcAft>
-              <a:defRPr sz="2000" b="0">
-                <a:solidFill>
-                  <a:srgbClr val="333333"/>
-                </a:solidFill>
-                <a:latin typeface="Calibri"/>
-              </a:defRPr>
-            </a:pPr>
-            <a:r>
-              <a:t>• Review module8/EXAMPLES.md and run each lab</a:t>
-            </a:r>
-          </a:p>
-          <a:p>
-            <a:pPr>
-              <a:lnSpc>
-                <a:spcPts val="2200"/>
-              </a:lnSpc>
-              <a:spcAft>
-                <a:spcPts val="1000"/>
-              </a:spcAft>
-              <a:defRPr sz="2000" b="0">
-                <a:solidFill>
-                  <a:srgbClr val="333333"/>
-                </a:solidFill>
-                <a:latin typeface="Calibri"/>
-              </a:defRPr>
-            </a:pPr>
-            <a:r>
-              <a:t>• Next: Next module in course</a:t>
-            </a:r>
-          </a:p>
-        </p:txBody>
-      </p:sp>
-      <p:sp>
-        <p:nvSpPr>
-          <p:cNvPr id="4" name="TextBox 3"/>
+            <a:pPr algn="r">
+              <a:lnSpc>
+                <a:spcPts val="2200"/>
+              </a:lnSpc>
+              <a:defRPr sz="1000" b="0">
+                <a:solidFill>
+                  <a:srgbClr val="666666"/>
+                </a:solidFill>
+                <a:latin typeface="Calibri"/>
+              </a:defRPr>
+            </a:pPr>
+            <a:r>
+              <a:t>verification_planning_management / Module 8</a:t>
+            </a:r>
+          </a:p>
+        </p:txBody>
+      </p:sp>
+    </p:spTree>
+  </p:cSld>
+  <p:clrMapOvr>
+    <a:masterClrMapping/>
+  </p:clrMapOvr>
+</p:sld>
+</file>
+
+<file path=ppt/slides/slide27.xml><?xml version="1.0" encoding="utf-8"?>
+<p:sld xmlns:a="http://schemas.openxmlformats.org/drawingml/2006/main" xmlns:p="http://schemas.openxmlformats.org/presentationml/2006/main" xmlns:r="http://schemas.openxmlformats.org/officeDocument/2006/relationships">
+  <p:cSld>
+    <p:spTree>
+      <p:nvGrpSpPr>
+        <p:cNvPr id="1" name=""/>
+        <p:cNvGrpSpPr/>
+        <p:nvPr/>
+      </p:nvGrpSpPr>
+      <p:grpSpPr/>
+      <p:sp>
+        <p:nvSpPr>
+          <p:cNvPr id="2" name="TextBox 1"/>
+          <p:cNvSpPr txBox="1"/>
+          <p:nvPr/>
+        </p:nvSpPr>
+        <p:spPr>
+          <a:xfrm>
+            <a:off x="548640" y="411480"/>
+            <a:ext cx="11064240" cy="777240"/>
+          </a:xfrm>
+          <a:prstGeom prst="rect">
+            <a:avLst/>
+          </a:prstGeom>
+          <a:noFill/>
+        </p:spPr>
+        <p:txBody>
+          <a:bodyPr wrap="square">
+            <a:noAutofit/>
+          </a:bodyPr>
+          <a:lstStyle/>
+          <a:p>
+            <a:pPr>
+              <a:lnSpc>
+                <a:spcPts val="2200"/>
+              </a:lnSpc>
+              <a:defRPr sz="2800" b="1">
+                <a:solidFill>
+                  <a:srgbClr val="1A1A2E"/>
+                </a:solidFill>
+                <a:latin typeface="Calibri"/>
+              </a:defRPr>
+            </a:pPr>
+            <a:r>
+              <a:t>Demo: Capstone checklist</a:t>
+            </a:r>
+          </a:p>
+        </p:txBody>
+      </p:sp>
+      <p:sp>
+        <p:nvSpPr>
+          <p:cNvPr id="3" name="TextBox 2"/>
+          <p:cNvSpPr txBox="1"/>
+          <p:nvPr/>
+        </p:nvSpPr>
+        <p:spPr>
+          <a:xfrm>
+            <a:off x="548640" y="1051560"/>
+            <a:ext cx="11064240" cy="914400"/>
+          </a:xfrm>
+          <a:prstGeom prst="rect">
+            <a:avLst/>
+          </a:prstGeom>
+          <a:solidFill>
+            <a:srgbClr val="F4F4F4"/>
+          </a:solidFill>
+        </p:spPr>
+        <p:txBody>
+          <a:bodyPr wrap="square">
+            <a:noAutofit/>
+          </a:bodyPr>
+          <a:lstStyle/>
+          <a:p>
+            <a:pPr>
+              <a:lnSpc>
+                <a:spcPts val="2200"/>
+              </a:lnSpc>
+              <a:spcAft>
+                <a:spcPts val="200"/>
+              </a:spcAft>
+              <a:defRPr sz="2000" b="0">
+                <a:solidFill>
+                  <a:srgbClr val="333333"/>
+                </a:solidFill>
+                <a:latin typeface="Consolas"/>
+              </a:defRPr>
+            </a:pPr>
+            <a:r>
+              <a:t>$ head -25 module8/templates/CHECKLIST.md</a:t>
+            </a:r>
+          </a:p>
+        </p:txBody>
+      </p:sp>
+      <p:pic>
+        <p:nvPicPr>
+          <p:cNvPr id="4" name="Picture 3" descr="ex02_checklist.png"/>
+          <p:cNvPicPr>
+            <a:picLocks noChangeAspect="1"/>
+          </p:cNvPicPr>
+          <p:nvPr/>
+        </p:nvPicPr>
+        <p:blipFill>
+          <a:blip r:embed="rId2"/>
+          <a:stretch>
+            <a:fillRect/>
+          </a:stretch>
+        </p:blipFill>
+        <p:spPr>
+          <a:xfrm>
+            <a:off x="548640" y="1965960"/>
+            <a:ext cx="7071358" cy="3977639"/>
+          </a:xfrm>
+          <a:prstGeom prst="rect">
+            <a:avLst/>
+          </a:prstGeom>
+        </p:spPr>
+      </p:pic>
+      <p:sp>
+        <p:nvSpPr>
+          <p:cNvPr id="5" name="TextBox 4"/>
+          <p:cNvSpPr txBox="1"/>
+          <p:nvPr/>
+        </p:nvSpPr>
+        <p:spPr>
+          <a:xfrm>
+            <a:off x="548640" y="6355080"/>
+            <a:ext cx="11064240" cy="320040"/>
+          </a:xfrm>
+          <a:prstGeom prst="rect">
+            <a:avLst/>
+          </a:prstGeom>
+          <a:noFill/>
+        </p:spPr>
+        <p:txBody>
+          <a:bodyPr wrap="square">
+            <a:noAutofit/>
+          </a:bodyPr>
+          <a:lstStyle/>
+          <a:p>
+            <a:pPr algn="r">
+              <a:lnSpc>
+                <a:spcPts val="2200"/>
+              </a:lnSpc>
+              <a:defRPr sz="1000" b="0">
+                <a:solidFill>
+                  <a:srgbClr val="666666"/>
+                </a:solidFill>
+                <a:latin typeface="Calibri"/>
+              </a:defRPr>
+            </a:pPr>
+            <a:r>
+              <a:t>verification_planning_management / Module 8</a:t>
+            </a:r>
+          </a:p>
+        </p:txBody>
+      </p:sp>
+    </p:spTree>
+  </p:cSld>
+  <p:clrMapOvr>
+    <a:masterClrMapping/>
+  </p:clrMapOvr>
+</p:sld>
+</file>
+
+<file path=ppt/slides/slide28.xml><?xml version="1.0" encoding="utf-8"?>
+<p:sld xmlns:a="http://schemas.openxmlformats.org/drawingml/2006/main" xmlns:p="http://schemas.openxmlformats.org/presentationml/2006/main" xmlns:r="http://schemas.openxmlformats.org/officeDocument/2006/relationships">
+  <p:cSld>
+    <p:spTree>
+      <p:nvGrpSpPr>
+        <p:cNvPr id="1" name=""/>
+        <p:cNvGrpSpPr/>
+        <p:nvPr/>
+      </p:nvGrpSpPr>
+      <p:grpSpPr/>
+      <p:sp>
+        <p:nvSpPr>
+          <p:cNvPr id="2" name="TextBox 1"/>
+          <p:cNvSpPr txBox="1"/>
+          <p:nvPr/>
+        </p:nvSpPr>
+        <p:spPr>
+          <a:xfrm>
+            <a:off x="548640" y="411480"/>
+            <a:ext cx="11064240" cy="777240"/>
+          </a:xfrm>
+          <a:prstGeom prst="rect">
+            <a:avLst/>
+          </a:prstGeom>
+          <a:noFill/>
+        </p:spPr>
+        <p:txBody>
+          <a:bodyPr wrap="square">
+            <a:noAutofit/>
+          </a:bodyPr>
+          <a:lstStyle/>
+          <a:p>
+            <a:pPr>
+              <a:lnSpc>
+                <a:spcPts val="2200"/>
+              </a:lnSpc>
+              <a:defRPr sz="2800" b="1">
+                <a:solidFill>
+                  <a:srgbClr val="1A1A2E"/>
+                </a:solidFill>
+                <a:latin typeface="Calibri"/>
+              </a:defRPr>
+            </a:pPr>
+            <a:r>
+              <a:t>Demo: Fill guides</a:t>
+            </a:r>
+          </a:p>
+        </p:txBody>
+      </p:sp>
+      <p:sp>
+        <p:nvSpPr>
+          <p:cNvPr id="3" name="TextBox 2"/>
+          <p:cNvSpPr txBox="1"/>
+          <p:nvPr/>
+        </p:nvSpPr>
+        <p:spPr>
+          <a:xfrm>
+            <a:off x="548640" y="1051560"/>
+            <a:ext cx="11064240" cy="914400"/>
+          </a:xfrm>
+          <a:prstGeom prst="rect">
+            <a:avLst/>
+          </a:prstGeom>
+          <a:solidFill>
+            <a:srgbClr val="F4F4F4"/>
+          </a:solidFill>
+        </p:spPr>
+        <p:txBody>
+          <a:bodyPr wrap="square">
+            <a:noAutofit/>
+          </a:bodyPr>
+          <a:lstStyle/>
+          <a:p>
+            <a:pPr>
+              <a:lnSpc>
+                <a:spcPts val="2200"/>
+              </a:lnSpc>
+              <a:spcAft>
+                <a:spcPts val="200"/>
+              </a:spcAft>
+              <a:defRPr sz="2000" b="0">
+                <a:solidFill>
+                  <a:srgbClr val="333333"/>
+                </a:solidFill>
+                <a:latin typeface="Consolas"/>
+              </a:defRPr>
+            </a:pPr>
+            <a:r>
+              <a:t>$ head -30 docs/FILL_GUIDES.md</a:t>
+            </a:r>
+          </a:p>
+        </p:txBody>
+      </p:sp>
+      <p:pic>
+        <p:nvPicPr>
+          <p:cNvPr id="4" name="Picture 3" descr="ex03_fill_guides.png"/>
+          <p:cNvPicPr>
+            <a:picLocks noChangeAspect="1"/>
+          </p:cNvPicPr>
+          <p:nvPr/>
+        </p:nvPicPr>
+        <p:blipFill>
+          <a:blip r:embed="rId2"/>
+          <a:stretch>
+            <a:fillRect/>
+          </a:stretch>
+        </p:blipFill>
+        <p:spPr>
+          <a:xfrm>
+            <a:off x="548640" y="1965960"/>
+            <a:ext cx="7071358" cy="3977639"/>
+          </a:xfrm>
+          <a:prstGeom prst="rect">
+            <a:avLst/>
+          </a:prstGeom>
+        </p:spPr>
+      </p:pic>
+      <p:sp>
+        <p:nvSpPr>
+          <p:cNvPr id="5" name="TextBox 4"/>
+          <p:cNvSpPr txBox="1"/>
+          <p:nvPr/>
+        </p:nvSpPr>
+        <p:spPr>
+          <a:xfrm>
+            <a:off x="548640" y="6355080"/>
+            <a:ext cx="11064240" cy="320040"/>
+          </a:xfrm>
+          <a:prstGeom prst="rect">
+            <a:avLst/>
+          </a:prstGeom>
+          <a:noFill/>
+        </p:spPr>
+        <p:txBody>
+          <a:bodyPr wrap="square">
+            <a:noAutofit/>
+          </a:bodyPr>
+          <a:lstStyle/>
+          <a:p>
+            <a:pPr algn="r">
+              <a:lnSpc>
+                <a:spcPts val="2200"/>
+              </a:lnSpc>
+              <a:defRPr sz="1000" b="0">
+                <a:solidFill>
+                  <a:srgbClr val="666666"/>
+                </a:solidFill>
+                <a:latin typeface="Calibri"/>
+              </a:defRPr>
+            </a:pPr>
+            <a:r>
+              <a:t>verification_planning_management / Module 8</a:t>
+            </a:r>
+          </a:p>
+        </p:txBody>
+      </p:sp>
+    </p:spTree>
+  </p:cSld>
+  <p:clrMapOvr>
+    <a:masterClrMapping/>
+  </p:clrMapOvr>
+</p:sld>
+</file>
+
+<file path=ppt/slides/slide29.xml><?xml version="1.0" encoding="utf-8"?>
+<p:sld xmlns:a="http://schemas.openxmlformats.org/drawingml/2006/main" xmlns:p="http://schemas.openxmlformats.org/presentationml/2006/main" xmlns:r="http://schemas.openxmlformats.org/officeDocument/2006/relationships">
+  <p:cSld>
+    <p:spTree>
+      <p:nvGrpSpPr>
+        <p:cNvPr id="1" name=""/>
+        <p:cNvGrpSpPr/>
+        <p:nvPr/>
+      </p:nvGrpSpPr>
+      <p:grpSpPr/>
+      <p:sp>
+        <p:nvSpPr>
+          <p:cNvPr id="2" name="TextBox 1"/>
+          <p:cNvSpPr txBox="1"/>
+          <p:nvPr/>
+        </p:nvSpPr>
+        <p:spPr>
+          <a:xfrm>
+            <a:off x="548640" y="411480"/>
+            <a:ext cx="11064240" cy="777240"/>
+          </a:xfrm>
+          <a:prstGeom prst="rect">
+            <a:avLst/>
+          </a:prstGeom>
+          <a:noFill/>
+        </p:spPr>
+        <p:txBody>
+          <a:bodyPr wrap="square">
+            <a:noAutofit/>
+          </a:bodyPr>
+          <a:lstStyle/>
+          <a:p>
+            <a:pPr>
+              <a:lnSpc>
+                <a:spcPts val="2200"/>
+              </a:lnSpc>
+              <a:defRPr sz="2800" b="1">
+                <a:solidFill>
+                  <a:srgbClr val="1A1A2E"/>
+                </a:solidFill>
+                <a:latin typeface="Calibri"/>
+              </a:defRPr>
+            </a:pPr>
+            <a:r>
+              <a:t>Demo: Reference capstone</a:t>
+            </a:r>
+          </a:p>
+        </p:txBody>
+      </p:sp>
+      <p:sp>
+        <p:nvSpPr>
+          <p:cNvPr id="3" name="TextBox 2"/>
+          <p:cNvSpPr txBox="1"/>
+          <p:nvPr/>
+        </p:nvSpPr>
+        <p:spPr>
+          <a:xfrm>
+            <a:off x="548640" y="1051560"/>
+            <a:ext cx="11064240" cy="914400"/>
+          </a:xfrm>
+          <a:prstGeom prst="rect">
+            <a:avLst/>
+          </a:prstGeom>
+          <a:solidFill>
+            <a:srgbClr val="F4F4F4"/>
+          </a:solidFill>
+        </p:spPr>
+        <p:txBody>
+          <a:bodyPr wrap="square">
+            <a:noAutofit/>
+          </a:bodyPr>
+          <a:lstStyle/>
+          <a:p>
+            <a:pPr>
+              <a:lnSpc>
+                <a:spcPts val="2200"/>
+              </a:lnSpc>
+              <a:spcAft>
+                <a:spcPts val="200"/>
+              </a:spcAft>
+              <a:defRPr sz="2000" b="0">
+                <a:solidFill>
+                  <a:srgbClr val="333333"/>
+                </a:solidFill>
+                <a:latin typeface="Consolas"/>
+              </a:defRPr>
+            </a:pPr>
+            <a:r>
+              <a:t>$ head -20 module8/.solutions/CAPSTONE_PROJECT.md</a:t>
+            </a:r>
+          </a:p>
+        </p:txBody>
+      </p:sp>
+      <p:pic>
+        <p:nvPicPr>
+          <p:cNvPr id="4" name="Picture 3" descr="ex04_solutions.png"/>
+          <p:cNvPicPr>
+            <a:picLocks noChangeAspect="1"/>
+          </p:cNvPicPr>
+          <p:nvPr/>
+        </p:nvPicPr>
+        <p:blipFill>
+          <a:blip r:embed="rId2"/>
+          <a:stretch>
+            <a:fillRect/>
+          </a:stretch>
+        </p:blipFill>
+        <p:spPr>
+          <a:xfrm>
+            <a:off x="548640" y="1965960"/>
+            <a:ext cx="7071358" cy="3977639"/>
+          </a:xfrm>
+          <a:prstGeom prst="rect">
+            <a:avLst/>
+          </a:prstGeom>
+        </p:spPr>
+      </p:pic>
+      <p:sp>
+        <p:nvSpPr>
+          <p:cNvPr id="5" name="TextBox 4"/>
           <p:cNvSpPr txBox="1"/>
           <p:nvPr/>
         </p:nvSpPr>
@@ -8148,6 +9386,1274 @@
 </p:sld>
 </file>
 
+<file path=ppt/slides/slide30.xml><?xml version="1.0" encoding="utf-8"?>
+<p:sld xmlns:a="http://schemas.openxmlformats.org/drawingml/2006/main" xmlns:p="http://schemas.openxmlformats.org/presentationml/2006/main" xmlns:r="http://schemas.openxmlformats.org/officeDocument/2006/relationships">
+  <p:cSld>
+    <p:spTree>
+      <p:nvGrpSpPr>
+        <p:cNvPr id="1" name=""/>
+        <p:cNvGrpSpPr/>
+        <p:nvPr/>
+      </p:nvGrpSpPr>
+      <p:grpSpPr/>
+      <p:sp>
+        <p:nvSpPr>
+          <p:cNvPr id="2" name="TextBox 1"/>
+          <p:cNvSpPr txBox="1"/>
+          <p:nvPr/>
+        </p:nvSpPr>
+        <p:spPr>
+          <a:xfrm>
+            <a:off x="548640" y="411480"/>
+            <a:ext cx="11064240" cy="777240"/>
+          </a:xfrm>
+          <a:prstGeom prst="rect">
+            <a:avLst/>
+          </a:prstGeom>
+          <a:noFill/>
+        </p:spPr>
+        <p:txBody>
+          <a:bodyPr wrap="square">
+            <a:noAutofit/>
+          </a:bodyPr>
+          <a:lstStyle/>
+          <a:p>
+            <a:pPr>
+              <a:lnSpc>
+                <a:spcPts val="2200"/>
+              </a:lnSpc>
+              <a:defRPr sz="2800" b="1">
+                <a:solidFill>
+                  <a:srgbClr val="1A1A2E"/>
+                </a:solidFill>
+                <a:latin typeface="Calibri"/>
+              </a:defRPr>
+            </a:pPr>
+            <a:r>
+              <a:t>Demo: Module validation</a:t>
+            </a:r>
+          </a:p>
+        </p:txBody>
+      </p:sp>
+      <p:sp>
+        <p:nvSpPr>
+          <p:cNvPr id="3" name="TextBox 2"/>
+          <p:cNvSpPr txBox="1"/>
+          <p:nvPr/>
+        </p:nvSpPr>
+        <p:spPr>
+          <a:xfrm>
+            <a:off x="548640" y="1051560"/>
+            <a:ext cx="11064240" cy="914400"/>
+          </a:xfrm>
+          <a:prstGeom prst="rect">
+            <a:avLst/>
+          </a:prstGeom>
+          <a:solidFill>
+            <a:srgbClr val="F4F4F4"/>
+          </a:solidFill>
+        </p:spPr>
+        <p:txBody>
+          <a:bodyPr wrap="square">
+            <a:noAutofit/>
+          </a:bodyPr>
+          <a:lstStyle/>
+          <a:p>
+            <a:pPr>
+              <a:lnSpc>
+                <a:spcPts val="2200"/>
+              </a:lnSpc>
+              <a:spcAft>
+                <a:spcPts val="200"/>
+              </a:spcAft>
+              <a:defRPr sz="2000" b="0">
+                <a:solidFill>
+                  <a:srgbClr val="333333"/>
+                </a:solidFill>
+                <a:latin typeface="Consolas"/>
+              </a:defRPr>
+            </a:pPr>
+            <a:r>
+              <a:t>$ ./scripts/module8.sh --check</a:t>
+            </a:r>
+          </a:p>
+        </p:txBody>
+      </p:sp>
+      <p:pic>
+        <p:nvPicPr>
+          <p:cNvPr id="4" name="Picture 3" descr="ex05_validate.png"/>
+          <p:cNvPicPr>
+            <a:picLocks noChangeAspect="1"/>
+          </p:cNvPicPr>
+          <p:nvPr/>
+        </p:nvPicPr>
+        <p:blipFill>
+          <a:blip r:embed="rId2"/>
+          <a:stretch>
+            <a:fillRect/>
+          </a:stretch>
+        </p:blipFill>
+        <p:spPr>
+          <a:xfrm>
+            <a:off x="548640" y="1965960"/>
+            <a:ext cx="7071358" cy="3977639"/>
+          </a:xfrm>
+          <a:prstGeom prst="rect">
+            <a:avLst/>
+          </a:prstGeom>
+        </p:spPr>
+      </p:pic>
+      <p:sp>
+        <p:nvSpPr>
+          <p:cNvPr id="5" name="TextBox 4"/>
+          <p:cNvSpPr txBox="1"/>
+          <p:nvPr/>
+        </p:nvSpPr>
+        <p:spPr>
+          <a:xfrm>
+            <a:off x="548640" y="6355080"/>
+            <a:ext cx="11064240" cy="320040"/>
+          </a:xfrm>
+          <a:prstGeom prst="rect">
+            <a:avLst/>
+          </a:prstGeom>
+          <a:noFill/>
+        </p:spPr>
+        <p:txBody>
+          <a:bodyPr wrap="square">
+            <a:noAutofit/>
+          </a:bodyPr>
+          <a:lstStyle/>
+          <a:p>
+            <a:pPr algn="r">
+              <a:lnSpc>
+                <a:spcPts val="2200"/>
+              </a:lnSpc>
+              <a:defRPr sz="1000" b="0">
+                <a:solidFill>
+                  <a:srgbClr val="666666"/>
+                </a:solidFill>
+                <a:latin typeface="Calibri"/>
+              </a:defRPr>
+            </a:pPr>
+            <a:r>
+              <a:t>verification_planning_management / Module 8</a:t>
+            </a:r>
+          </a:p>
+        </p:txBody>
+      </p:sp>
+    </p:spTree>
+  </p:cSld>
+  <p:clrMapOvr>
+    <a:masterClrMapping/>
+  </p:clrMapOvr>
+</p:sld>
+</file>
+
+<file path=ppt/slides/slide31.xml><?xml version="1.0" encoding="utf-8"?>
+<p:sld xmlns:a="http://schemas.openxmlformats.org/drawingml/2006/main" xmlns:p="http://schemas.openxmlformats.org/presentationml/2006/main" xmlns:r="http://schemas.openxmlformats.org/officeDocument/2006/relationships">
+  <p:cSld>
+    <p:spTree>
+      <p:nvGrpSpPr>
+        <p:cNvPr id="1" name=""/>
+        <p:cNvGrpSpPr/>
+        <p:nvPr/>
+      </p:nvGrpSpPr>
+      <p:grpSpPr/>
+      <p:sp>
+        <p:nvSpPr>
+          <p:cNvPr id="2" name="TextBox 1"/>
+          <p:cNvSpPr txBox="1"/>
+          <p:nvPr/>
+        </p:nvSpPr>
+        <p:spPr>
+          <a:xfrm>
+            <a:off x="548640" y="2743200"/>
+            <a:ext cx="11064240" cy="1371600"/>
+          </a:xfrm>
+          <a:prstGeom prst="rect">
+            <a:avLst/>
+          </a:prstGeom>
+          <a:noFill/>
+        </p:spPr>
+        <p:txBody>
+          <a:bodyPr wrap="square">
+            <a:noAutofit/>
+          </a:bodyPr>
+          <a:lstStyle/>
+          <a:p>
+            <a:pPr algn="ctr">
+              <a:lnSpc>
+                <a:spcPts val="2200"/>
+              </a:lnSpc>
+              <a:defRPr sz="3600" b="1">
+                <a:solidFill>
+                  <a:srgbClr val="1A1A2E"/>
+                </a:solidFill>
+                <a:latin typeface="Calibri"/>
+              </a:defRPr>
+            </a:pPr>
+            <a:r>
+              <a:t>Practice &amp; assessment</a:t>
+            </a:r>
+          </a:p>
+        </p:txBody>
+      </p:sp>
+      <p:sp>
+        <p:nvSpPr>
+          <p:cNvPr id="3" name="TextBox 2"/>
+          <p:cNvSpPr txBox="1"/>
+          <p:nvPr/>
+        </p:nvSpPr>
+        <p:spPr>
+          <a:xfrm>
+            <a:off x="548640" y="6355080"/>
+            <a:ext cx="11064240" cy="320040"/>
+          </a:xfrm>
+          <a:prstGeom prst="rect">
+            <a:avLst/>
+          </a:prstGeom>
+          <a:noFill/>
+        </p:spPr>
+        <p:txBody>
+          <a:bodyPr wrap="square">
+            <a:noAutofit/>
+          </a:bodyPr>
+          <a:lstStyle/>
+          <a:p>
+            <a:pPr algn="r">
+              <a:lnSpc>
+                <a:spcPts val="2200"/>
+              </a:lnSpc>
+              <a:defRPr sz="1000" b="0">
+                <a:solidFill>
+                  <a:srgbClr val="666666"/>
+                </a:solidFill>
+                <a:latin typeface="Calibri"/>
+              </a:defRPr>
+            </a:pPr>
+            <a:r>
+              <a:t>verification_planning_management / Module 8</a:t>
+            </a:r>
+          </a:p>
+        </p:txBody>
+      </p:sp>
+    </p:spTree>
+  </p:cSld>
+  <p:clrMapOvr>
+    <a:masterClrMapping/>
+  </p:clrMapOvr>
+</p:sld>
+</file>
+
+<file path=ppt/slides/slide32.xml><?xml version="1.0" encoding="utf-8"?>
+<p:sld xmlns:a="http://schemas.openxmlformats.org/drawingml/2006/main" xmlns:p="http://schemas.openxmlformats.org/presentationml/2006/main" xmlns:r="http://schemas.openxmlformats.org/officeDocument/2006/relationships">
+  <p:cSld>
+    <p:spTree>
+      <p:nvGrpSpPr>
+        <p:cNvPr id="1" name=""/>
+        <p:cNvGrpSpPr/>
+        <p:nvPr/>
+      </p:nvGrpSpPr>
+      <p:grpSpPr/>
+      <p:sp>
+        <p:nvSpPr>
+          <p:cNvPr id="2" name="TextBox 1"/>
+          <p:cNvSpPr txBox="1"/>
+          <p:nvPr/>
+        </p:nvSpPr>
+        <p:spPr>
+          <a:xfrm>
+            <a:off x="548640" y="411480"/>
+            <a:ext cx="11064240" cy="777240"/>
+          </a:xfrm>
+          <a:prstGeom prst="rect">
+            <a:avLst/>
+          </a:prstGeom>
+          <a:noFill/>
+        </p:spPr>
+        <p:txBody>
+          <a:bodyPr wrap="square">
+            <a:noAutofit/>
+          </a:bodyPr>
+          <a:lstStyle/>
+          <a:p>
+            <a:pPr>
+              <a:lnSpc>
+                <a:spcPts val="2200"/>
+              </a:lnSpc>
+              <a:defRPr sz="2800" b="1">
+                <a:solidFill>
+                  <a:srgbClr val="1A1A2E"/>
+                </a:solidFill>
+                <a:latin typeface="Calibri"/>
+              </a:defRPr>
+            </a:pPr>
+            <a:r>
+              <a:t>What you should know (1/2)</a:t>
+            </a:r>
+          </a:p>
+        </p:txBody>
+      </p:sp>
+      <p:sp>
+        <p:nvSpPr>
+          <p:cNvPr id="3" name="TextBox 2"/>
+          <p:cNvSpPr txBox="1"/>
+          <p:nvPr/>
+        </p:nvSpPr>
+        <p:spPr>
+          <a:xfrm>
+            <a:off x="548640" y="1234440"/>
+            <a:ext cx="11064240" cy="4937760"/>
+          </a:xfrm>
+          <a:prstGeom prst="rect">
+            <a:avLst/>
+          </a:prstGeom>
+          <a:noFill/>
+        </p:spPr>
+        <p:txBody>
+          <a:bodyPr wrap="square">
+            <a:noAutofit/>
+          </a:bodyPr>
+          <a:lstStyle/>
+          <a:p>
+            <a:pPr>
+              <a:lnSpc>
+                <a:spcPts val="2200"/>
+              </a:lnSpc>
+              <a:spcAft>
+                <a:spcPts val="1000"/>
+              </a:spcAft>
+              <a:defRPr sz="2000" b="0">
+                <a:solidFill>
+                  <a:srgbClr val="333333"/>
+                </a:solidFill>
+                <a:latin typeface="Calibri"/>
+              </a:defRPr>
+            </a:pPr>
+            <a:r>
+              <a:t>• Drive an end‑to‑end verification effort from</a:t>
+            </a:r>
+          </a:p>
+          <a:p>
+            <a:pPr>
+              <a:lnSpc>
+                <a:spcPts val="2200"/>
+              </a:lnSpc>
+              <a:spcAft>
+                <a:spcPts val="1000"/>
+              </a:spcAft>
+              <a:defRPr sz="2000" b="0">
+                <a:solidFill>
+                  <a:srgbClr val="333333"/>
+                </a:solidFill>
+                <a:latin typeface="Calibri"/>
+              </a:defRPr>
+            </a:pPr>
+            <a:r>
+              <a:t>      requirements → plan → env → tests → coverage →</a:t>
+            </a:r>
+          </a:p>
+          <a:p>
+            <a:pPr>
+              <a:lnSpc>
+                <a:spcPts val="2200"/>
+              </a:lnSpc>
+              <a:spcAft>
+                <a:spcPts val="1000"/>
+              </a:spcAft>
+              <a:defRPr sz="2000" b="0">
+                <a:solidFill>
+                  <a:srgbClr val="333333"/>
+                </a:solidFill>
+                <a:latin typeface="Calibri"/>
+              </a:defRPr>
+            </a:pPr>
+            <a:r>
+              <a:t>      regress…</a:t>
+            </a:r>
+          </a:p>
+          <a:p>
+            <a:pPr>
+              <a:lnSpc>
+                <a:spcPts val="2200"/>
+              </a:lnSpc>
+              <a:spcAft>
+                <a:spcPts val="1000"/>
+              </a:spcAft>
+              <a:defRPr sz="2000" b="0">
+                <a:solidFill>
+                  <a:srgbClr val="333333"/>
+                </a:solidFill>
+                <a:latin typeface="Calibri"/>
+              </a:defRPr>
+            </a:pPr>
+            <a:r>
+              <a:t>• Deliver a coherent, documented verification package</a:t>
+            </a:r>
+          </a:p>
+          <a:p>
+            <a:pPr>
+              <a:lnSpc>
+                <a:spcPts val="2200"/>
+              </a:lnSpc>
+              <a:spcAft>
+                <a:spcPts val="1000"/>
+              </a:spcAft>
+              <a:defRPr sz="2000" b="0">
+                <a:solidFill>
+                  <a:srgbClr val="333333"/>
+                </a:solidFill>
+                <a:latin typeface="Calibri"/>
+              </a:defRPr>
+            </a:pPr>
+            <a:r>
+              <a:t>      or VIP that others can understand and use.</a:t>
+            </a:r>
+          </a:p>
+          <a:p>
+            <a:pPr>
+              <a:lnSpc>
+                <a:spcPts val="2200"/>
+              </a:lnSpc>
+              <a:spcAft>
+                <a:spcPts val="1000"/>
+              </a:spcAft>
+              <a:defRPr sz="2000" b="0">
+                <a:solidFill>
+                  <a:srgbClr val="333333"/>
+                </a:solidFill>
+                <a:latin typeface="Calibri"/>
+              </a:defRPr>
+            </a:pPr>
+            <a:r>
+              <a:t>• Reflect on trade‑offs and improvements as if you</a:t>
+            </a:r>
+          </a:p>
+          <a:p>
+            <a:pPr>
+              <a:lnSpc>
+                <a:spcPts val="2200"/>
+              </a:lnSpc>
+              <a:spcAft>
+                <a:spcPts val="1000"/>
+              </a:spcAft>
+              <a:defRPr sz="2000" b="0">
+                <a:solidFill>
+                  <a:srgbClr val="333333"/>
+                </a:solidFill>
+                <a:latin typeface="Calibri"/>
+              </a:defRPr>
+            </a:pPr>
+            <a:r>
+              <a:t>      were preparing for a real project review.</a:t>
+            </a:r>
+          </a:p>
+          <a:p>
+            <a:pPr>
+              <a:lnSpc>
+                <a:spcPts val="2200"/>
+              </a:lnSpc>
+              <a:spcAft>
+                <a:spcPts val="1000"/>
+              </a:spcAft>
+              <a:defRPr sz="2000" b="0">
+                <a:solidFill>
+                  <a:srgbClr val="333333"/>
+                </a:solidFill>
+                <a:latin typeface="Calibri"/>
+              </a:defRPr>
+            </a:pPr>
+            <a:r>
+              <a:t>• A clearly defined capstone project documented in</a:t>
+            </a:r>
+          </a:p>
+          <a:p>
+            <a:pPr>
+              <a:lnSpc>
+                <a:spcPts val="2200"/>
+              </a:lnSpc>
+              <a:spcAft>
+                <a:spcPts val="1000"/>
+              </a:spcAft>
+              <a:defRPr sz="2000" b="0">
+                <a:solidFill>
+                  <a:srgbClr val="333333"/>
+                </a:solidFill>
+                <a:latin typeface="Calibri"/>
+              </a:defRPr>
+            </a:pPr>
+            <a:r>
+              <a:t>      `capstone_project.md`.</a:t>
+            </a:r>
+          </a:p>
+          <a:p>
+            <a:pPr>
+              <a:lnSpc>
+                <a:spcPts val="2200"/>
+              </a:lnSpc>
+              <a:spcAft>
+                <a:spcPts val="1000"/>
+              </a:spcAft>
+              <a:defRPr sz="2000" b="0">
+                <a:solidFill>
+                  <a:srgbClr val="333333"/>
+                </a:solidFill>
+                <a:latin typeface="Calibri"/>
+              </a:defRPr>
+            </a:pPr>
+            <a:r>
+              <a:t>• Evidence that Modules 1–7 have been applied (plans,</a:t>
+            </a:r>
+          </a:p>
+          <a:p>
+            <a:pPr>
+              <a:lnSpc>
+                <a:spcPts val="2200"/>
+              </a:lnSpc>
+              <a:spcAft>
+                <a:spcPts val="1000"/>
+              </a:spcAft>
+              <a:defRPr sz="2000" b="0">
+                <a:solidFill>
+                  <a:srgbClr val="333333"/>
+                </a:solidFill>
+                <a:latin typeface="Calibri"/>
+              </a:defRPr>
+            </a:pPr>
+            <a:r>
+              <a:t>      env, tests, coverage, regressions).</a:t>
+            </a:r>
+          </a:p>
+          <a:p>
+            <a:pPr>
+              <a:lnSpc>
+                <a:spcPts val="2200"/>
+              </a:lnSpc>
+              <a:spcAft>
+                <a:spcPts val="1000"/>
+              </a:spcAft>
+              <a:defRPr sz="2000" b="0">
+                <a:solidFill>
+                  <a:srgbClr val="333333"/>
+                </a:solidFill>
+                <a:latin typeface="Calibri"/>
+              </a:defRPr>
+            </a:pPr>
+            <a:r>
+              <a:t>• A “deliverable” verification solution or VIP (code +</a:t>
+            </a:r>
+          </a:p>
+          <a:p>
+            <a:pPr>
+              <a:lnSpc>
+                <a:spcPts val="2200"/>
+              </a:lnSpc>
+              <a:spcAft>
+                <a:spcPts val="1000"/>
+              </a:spcAft>
+              <a:defRPr sz="2000" b="0">
+                <a:solidFill>
+                  <a:srgbClr val="333333"/>
+                </a:solidFill>
+                <a:latin typeface="Calibri"/>
+              </a:defRPr>
+            </a:pPr>
+            <a:r>
+              <a:t>      docs) that could be handed to another team.</a:t>
+            </a:r>
+          </a:p>
+        </p:txBody>
+      </p:sp>
+      <p:sp>
+        <p:nvSpPr>
+          <p:cNvPr id="4" name="TextBox 3"/>
+          <p:cNvSpPr txBox="1"/>
+          <p:nvPr/>
+        </p:nvSpPr>
+        <p:spPr>
+          <a:xfrm>
+            <a:off x="548640" y="6355080"/>
+            <a:ext cx="11064240" cy="320040"/>
+          </a:xfrm>
+          <a:prstGeom prst="rect">
+            <a:avLst/>
+          </a:prstGeom>
+          <a:noFill/>
+        </p:spPr>
+        <p:txBody>
+          <a:bodyPr wrap="square">
+            <a:noAutofit/>
+          </a:bodyPr>
+          <a:lstStyle/>
+          <a:p>
+            <a:pPr algn="r">
+              <a:lnSpc>
+                <a:spcPts val="2200"/>
+              </a:lnSpc>
+              <a:defRPr sz="1000" b="0">
+                <a:solidFill>
+                  <a:srgbClr val="666666"/>
+                </a:solidFill>
+                <a:latin typeface="Calibri"/>
+              </a:defRPr>
+            </a:pPr>
+            <a:r>
+              <a:t>verification_planning_management / Module 8</a:t>
+            </a:r>
+          </a:p>
+        </p:txBody>
+      </p:sp>
+    </p:spTree>
+  </p:cSld>
+  <p:clrMapOvr>
+    <a:masterClrMapping/>
+  </p:clrMapOvr>
+</p:sld>
+</file>
+
+<file path=ppt/slides/slide33.xml><?xml version="1.0" encoding="utf-8"?>
+<p:sld xmlns:a="http://schemas.openxmlformats.org/drawingml/2006/main" xmlns:p="http://schemas.openxmlformats.org/presentationml/2006/main" xmlns:r="http://schemas.openxmlformats.org/officeDocument/2006/relationships">
+  <p:cSld>
+    <p:spTree>
+      <p:nvGrpSpPr>
+        <p:cNvPr id="1" name=""/>
+        <p:cNvGrpSpPr/>
+        <p:nvPr/>
+      </p:nvGrpSpPr>
+      <p:grpSpPr/>
+      <p:sp>
+        <p:nvSpPr>
+          <p:cNvPr id="2" name="TextBox 1"/>
+          <p:cNvSpPr txBox="1"/>
+          <p:nvPr/>
+        </p:nvSpPr>
+        <p:spPr>
+          <a:xfrm>
+            <a:off x="548640" y="411480"/>
+            <a:ext cx="11064240" cy="777240"/>
+          </a:xfrm>
+          <a:prstGeom prst="rect">
+            <a:avLst/>
+          </a:prstGeom>
+          <a:noFill/>
+        </p:spPr>
+        <p:txBody>
+          <a:bodyPr wrap="square">
+            <a:noAutofit/>
+          </a:bodyPr>
+          <a:lstStyle/>
+          <a:p>
+            <a:pPr>
+              <a:lnSpc>
+                <a:spcPts val="2200"/>
+              </a:lnSpc>
+              <a:defRPr sz="2800" b="1">
+                <a:solidFill>
+                  <a:srgbClr val="1A1A2E"/>
+                </a:solidFill>
+                <a:latin typeface="Calibri"/>
+              </a:defRPr>
+            </a:pPr>
+            <a:r>
+              <a:t>What you should know (2/2)</a:t>
+            </a:r>
+          </a:p>
+        </p:txBody>
+      </p:sp>
+      <p:sp>
+        <p:nvSpPr>
+          <p:cNvPr id="3" name="TextBox 2"/>
+          <p:cNvSpPr txBox="1"/>
+          <p:nvPr/>
+        </p:nvSpPr>
+        <p:spPr>
+          <a:xfrm>
+            <a:off x="548640" y="1234440"/>
+            <a:ext cx="11064240" cy="4937760"/>
+          </a:xfrm>
+          <a:prstGeom prst="rect">
+            <a:avLst/>
+          </a:prstGeom>
+          <a:noFill/>
+        </p:spPr>
+        <p:txBody>
+          <a:bodyPr wrap="square">
+            <a:noAutofit/>
+          </a:bodyPr>
+          <a:lstStyle/>
+          <a:p>
+            <a:pPr>
+              <a:lnSpc>
+                <a:spcPts val="2200"/>
+              </a:lnSpc>
+              <a:spcAft>
+                <a:spcPts val="1000"/>
+              </a:spcAft>
+              <a:defRPr sz="2000" b="0">
+                <a:solidFill>
+                  <a:srgbClr val="333333"/>
+                </a:solidFill>
+                <a:latin typeface="Calibri"/>
+              </a:defRPr>
+            </a:pPr>
+            <a:r>
+              <a:t>• A short written or presented retrospective on what</a:t>
+            </a:r>
+          </a:p>
+          <a:p>
+            <a:pPr>
+              <a:lnSpc>
+                <a:spcPts val="2200"/>
+              </a:lnSpc>
+              <a:spcAft>
+                <a:spcPts val="1000"/>
+              </a:spcAft>
+              <a:defRPr sz="2000" b="0">
+                <a:solidFill>
+                  <a:srgbClr val="333333"/>
+                </a:solidFill>
+                <a:latin typeface="Calibri"/>
+              </a:defRPr>
+            </a:pPr>
+            <a:r>
+              <a:t>      worked, what didn’t, and what you’d improve next.</a:t>
+            </a:r>
+          </a:p>
+        </p:txBody>
+      </p:sp>
+      <p:sp>
+        <p:nvSpPr>
+          <p:cNvPr id="4" name="TextBox 3"/>
+          <p:cNvSpPr txBox="1"/>
+          <p:nvPr/>
+        </p:nvSpPr>
+        <p:spPr>
+          <a:xfrm>
+            <a:off x="548640" y="6355080"/>
+            <a:ext cx="11064240" cy="320040"/>
+          </a:xfrm>
+          <a:prstGeom prst="rect">
+            <a:avLst/>
+          </a:prstGeom>
+          <a:noFill/>
+        </p:spPr>
+        <p:txBody>
+          <a:bodyPr wrap="square">
+            <a:noAutofit/>
+          </a:bodyPr>
+          <a:lstStyle/>
+          <a:p>
+            <a:pPr algn="r">
+              <a:lnSpc>
+                <a:spcPts val="2200"/>
+              </a:lnSpc>
+              <a:defRPr sz="1000" b="0">
+                <a:solidFill>
+                  <a:srgbClr val="666666"/>
+                </a:solidFill>
+                <a:latin typeface="Calibri"/>
+              </a:defRPr>
+            </a:pPr>
+            <a:r>
+              <a:t>verification_planning_management / Module 8</a:t>
+            </a:r>
+          </a:p>
+        </p:txBody>
+      </p:sp>
+    </p:spTree>
+  </p:cSld>
+  <p:clrMapOvr>
+    <a:masterClrMapping/>
+  </p:clrMapOvr>
+</p:sld>
+</file>
+
+<file path=ppt/slides/slide34.xml><?xml version="1.0" encoding="utf-8"?>
+<p:sld xmlns:a="http://schemas.openxmlformats.org/drawingml/2006/main" xmlns:p="http://schemas.openxmlformats.org/presentationml/2006/main" xmlns:r="http://schemas.openxmlformats.org/officeDocument/2006/relationships">
+  <p:cSld>
+    <p:spTree>
+      <p:nvGrpSpPr>
+        <p:cNvPr id="1" name=""/>
+        <p:cNvGrpSpPr/>
+        <p:nvPr/>
+      </p:nvGrpSpPr>
+      <p:grpSpPr/>
+      <p:sp>
+        <p:nvSpPr>
+          <p:cNvPr id="2" name="TextBox 1"/>
+          <p:cNvSpPr txBox="1"/>
+          <p:nvPr/>
+        </p:nvSpPr>
+        <p:spPr>
+          <a:xfrm>
+            <a:off x="548640" y="411480"/>
+            <a:ext cx="11064240" cy="777240"/>
+          </a:xfrm>
+          <a:prstGeom prst="rect">
+            <a:avLst/>
+          </a:prstGeom>
+          <a:noFill/>
+        </p:spPr>
+        <p:txBody>
+          <a:bodyPr wrap="square">
+            <a:noAutofit/>
+          </a:bodyPr>
+          <a:lstStyle/>
+          <a:p>
+            <a:pPr>
+              <a:lnSpc>
+                <a:spcPts val="2200"/>
+              </a:lnSpc>
+              <a:defRPr sz="2800" b="1">
+                <a:solidFill>
+                  <a:srgbClr val="1A1A2E"/>
+                </a:solidFill>
+                <a:latin typeface="Calibri"/>
+              </a:defRPr>
+            </a:pPr>
+            <a:r>
+              <a:t>Assessment checklist</a:t>
+            </a:r>
+          </a:p>
+        </p:txBody>
+      </p:sp>
+      <p:sp>
+        <p:nvSpPr>
+          <p:cNvPr id="3" name="TextBox 2"/>
+          <p:cNvSpPr txBox="1"/>
+          <p:nvPr/>
+        </p:nvSpPr>
+        <p:spPr>
+          <a:xfrm>
+            <a:off x="548640" y="1234440"/>
+            <a:ext cx="11064240" cy="4937760"/>
+          </a:xfrm>
+          <a:prstGeom prst="rect">
+            <a:avLst/>
+          </a:prstGeom>
+          <a:noFill/>
+        </p:spPr>
+        <p:txBody>
+          <a:bodyPr wrap="square">
+            <a:noAutofit/>
+          </a:bodyPr>
+          <a:lstStyle/>
+          <a:p>
+            <a:pPr>
+              <a:lnSpc>
+                <a:spcPts val="2200"/>
+              </a:lnSpc>
+              <a:spcAft>
+                <a:spcPts val="1000"/>
+              </a:spcAft>
+              <a:defRPr sz="2000" b="0">
+                <a:solidFill>
+                  <a:srgbClr val="333333"/>
+                </a:solidFill>
+                <a:latin typeface="Calibri"/>
+              </a:defRPr>
+            </a:pPr>
+            <a:r>
+              <a:t>• A clearly defined capstone project documented in</a:t>
+            </a:r>
+          </a:p>
+          <a:p>
+            <a:pPr>
+              <a:lnSpc>
+                <a:spcPts val="2200"/>
+              </a:lnSpc>
+              <a:spcAft>
+                <a:spcPts val="1000"/>
+              </a:spcAft>
+              <a:defRPr sz="2000" b="0">
+                <a:solidFill>
+                  <a:srgbClr val="333333"/>
+                </a:solidFill>
+                <a:latin typeface="Calibri"/>
+              </a:defRPr>
+            </a:pPr>
+            <a:r>
+              <a:t>      `capstone_project.md`.</a:t>
+            </a:r>
+          </a:p>
+          <a:p>
+            <a:pPr>
+              <a:lnSpc>
+                <a:spcPts val="2200"/>
+              </a:lnSpc>
+              <a:spcAft>
+                <a:spcPts val="1000"/>
+              </a:spcAft>
+              <a:defRPr sz="2000" b="0">
+                <a:solidFill>
+                  <a:srgbClr val="333333"/>
+                </a:solidFill>
+                <a:latin typeface="Calibri"/>
+              </a:defRPr>
+            </a:pPr>
+            <a:r>
+              <a:t>• Evidence that Modules 1–7 have been applied (plans,</a:t>
+            </a:r>
+          </a:p>
+          <a:p>
+            <a:pPr>
+              <a:lnSpc>
+                <a:spcPts val="2200"/>
+              </a:lnSpc>
+              <a:spcAft>
+                <a:spcPts val="1000"/>
+              </a:spcAft>
+              <a:defRPr sz="2000" b="0">
+                <a:solidFill>
+                  <a:srgbClr val="333333"/>
+                </a:solidFill>
+                <a:latin typeface="Calibri"/>
+              </a:defRPr>
+            </a:pPr>
+            <a:r>
+              <a:t>      env, tests, coverage, regressions).</a:t>
+            </a:r>
+          </a:p>
+          <a:p>
+            <a:pPr>
+              <a:lnSpc>
+                <a:spcPts val="2200"/>
+              </a:lnSpc>
+              <a:spcAft>
+                <a:spcPts val="1000"/>
+              </a:spcAft>
+              <a:defRPr sz="2000" b="0">
+                <a:solidFill>
+                  <a:srgbClr val="333333"/>
+                </a:solidFill>
+                <a:latin typeface="Calibri"/>
+              </a:defRPr>
+            </a:pPr>
+            <a:r>
+              <a:t>• A “deliverable” verification solution or VIP (code +</a:t>
+            </a:r>
+          </a:p>
+          <a:p>
+            <a:pPr>
+              <a:lnSpc>
+                <a:spcPts val="2200"/>
+              </a:lnSpc>
+              <a:spcAft>
+                <a:spcPts val="1000"/>
+              </a:spcAft>
+              <a:defRPr sz="2000" b="0">
+                <a:solidFill>
+                  <a:srgbClr val="333333"/>
+                </a:solidFill>
+                <a:latin typeface="Calibri"/>
+              </a:defRPr>
+            </a:pPr>
+            <a:r>
+              <a:t>      docs) that could be handed to another team.</a:t>
+            </a:r>
+          </a:p>
+          <a:p>
+            <a:pPr>
+              <a:lnSpc>
+                <a:spcPts val="2200"/>
+              </a:lnSpc>
+              <a:spcAft>
+                <a:spcPts val="1000"/>
+              </a:spcAft>
+              <a:defRPr sz="2000" b="0">
+                <a:solidFill>
+                  <a:srgbClr val="333333"/>
+                </a:solidFill>
+                <a:latin typeface="Calibri"/>
+              </a:defRPr>
+            </a:pPr>
+            <a:r>
+              <a:t>• A short written or presented retrospective on what</a:t>
+            </a:r>
+          </a:p>
+          <a:p>
+            <a:pPr>
+              <a:lnSpc>
+                <a:spcPts val="2200"/>
+              </a:lnSpc>
+              <a:spcAft>
+                <a:spcPts val="1000"/>
+              </a:spcAft>
+              <a:defRPr sz="2000" b="0">
+                <a:solidFill>
+                  <a:srgbClr val="333333"/>
+                </a:solidFill>
+                <a:latin typeface="Calibri"/>
+              </a:defRPr>
+            </a:pPr>
+            <a:r>
+              <a:t>      worked, what didn’t, and what you’d improve next.</a:t>
+            </a:r>
+          </a:p>
+        </p:txBody>
+      </p:sp>
+      <p:sp>
+        <p:nvSpPr>
+          <p:cNvPr id="4" name="TextBox 3"/>
+          <p:cNvSpPr txBox="1"/>
+          <p:nvPr/>
+        </p:nvSpPr>
+        <p:spPr>
+          <a:xfrm>
+            <a:off x="548640" y="6355080"/>
+            <a:ext cx="11064240" cy="320040"/>
+          </a:xfrm>
+          <a:prstGeom prst="rect">
+            <a:avLst/>
+          </a:prstGeom>
+          <a:noFill/>
+        </p:spPr>
+        <p:txBody>
+          <a:bodyPr wrap="square">
+            <a:noAutofit/>
+          </a:bodyPr>
+          <a:lstStyle/>
+          <a:p>
+            <a:pPr algn="r">
+              <a:lnSpc>
+                <a:spcPts val="2200"/>
+              </a:lnSpc>
+              <a:defRPr sz="1000" b="0">
+                <a:solidFill>
+                  <a:srgbClr val="666666"/>
+                </a:solidFill>
+                <a:latin typeface="Calibri"/>
+              </a:defRPr>
+            </a:pPr>
+            <a:r>
+              <a:t>verification_planning_management / Module 8</a:t>
+            </a:r>
+          </a:p>
+        </p:txBody>
+      </p:sp>
+    </p:spTree>
+  </p:cSld>
+  <p:clrMapOvr>
+    <a:masterClrMapping/>
+  </p:clrMapOvr>
+</p:sld>
+</file>
+
+<file path=ppt/slides/slide35.xml><?xml version="1.0" encoding="utf-8"?>
+<p:sld xmlns:a="http://schemas.openxmlformats.org/drawingml/2006/main" xmlns:p="http://schemas.openxmlformats.org/presentationml/2006/main" xmlns:r="http://schemas.openxmlformats.org/officeDocument/2006/relationships">
+  <p:cSld>
+    <p:spTree>
+      <p:nvGrpSpPr>
+        <p:cNvPr id="1" name=""/>
+        <p:cNvGrpSpPr/>
+        <p:nvPr/>
+      </p:nvGrpSpPr>
+      <p:grpSpPr/>
+      <p:sp>
+        <p:nvSpPr>
+          <p:cNvPr id="2" name="TextBox 1"/>
+          <p:cNvSpPr txBox="1"/>
+          <p:nvPr/>
+        </p:nvSpPr>
+        <p:spPr>
+          <a:xfrm>
+            <a:off x="548640" y="411480"/>
+            <a:ext cx="11064240" cy="777240"/>
+          </a:xfrm>
+          <a:prstGeom prst="rect">
+            <a:avLst/>
+          </a:prstGeom>
+          <a:noFill/>
+        </p:spPr>
+        <p:txBody>
+          <a:bodyPr wrap="square">
+            <a:noAutofit/>
+          </a:bodyPr>
+          <a:lstStyle/>
+          <a:p>
+            <a:pPr>
+              <a:lnSpc>
+                <a:spcPts val="2200"/>
+              </a:lnSpc>
+              <a:defRPr sz="2800" b="1">
+                <a:solidFill>
+                  <a:srgbClr val="1A1A2E"/>
+                </a:solidFill>
+                <a:latin typeface="Calibri"/>
+              </a:defRPr>
+            </a:pPr>
+            <a:r>
+              <a:t>Summary &amp; next steps</a:t>
+            </a:r>
+          </a:p>
+        </p:txBody>
+      </p:sp>
+      <p:sp>
+        <p:nvSpPr>
+          <p:cNvPr id="3" name="TextBox 2"/>
+          <p:cNvSpPr txBox="1"/>
+          <p:nvPr/>
+        </p:nvSpPr>
+        <p:spPr>
+          <a:xfrm>
+            <a:off x="548640" y="1234440"/>
+            <a:ext cx="11064240" cy="4937760"/>
+          </a:xfrm>
+          <a:prstGeom prst="rect">
+            <a:avLst/>
+          </a:prstGeom>
+          <a:noFill/>
+        </p:spPr>
+        <p:txBody>
+          <a:bodyPr wrap="square">
+            <a:noAutofit/>
+          </a:bodyPr>
+          <a:lstStyle/>
+          <a:p>
+            <a:pPr>
+              <a:lnSpc>
+                <a:spcPts val="2200"/>
+              </a:lnSpc>
+              <a:spcAft>
+                <a:spcPts val="1000"/>
+              </a:spcAft>
+              <a:defRPr sz="2000" b="0">
+                <a:solidFill>
+                  <a:srgbClr val="333333"/>
+                </a:solidFill>
+                <a:latin typeface="Calibri"/>
+              </a:defRPr>
+            </a:pPr>
+            <a:r>
+              <a:t>• Plan and execute a **single, substantial capstone</a:t>
+            </a:r>
+          </a:p>
+          <a:p>
+            <a:pPr>
+              <a:lnSpc>
+                <a:spcPts val="2200"/>
+              </a:lnSpc>
+              <a:spcAft>
+                <a:spcPts val="1000"/>
+              </a:spcAft>
+              <a:defRPr sz="2000" b="0">
+                <a:solidFill>
+                  <a:srgbClr val="333333"/>
+                </a:solidFill>
+                <a:latin typeface="Calibri"/>
+              </a:defRPr>
+            </a:pPr>
+            <a:r>
+              <a:t>      project** that exercises the full verification li…</a:t>
+            </a:r>
+          </a:p>
+          <a:p>
+            <a:pPr>
+              <a:lnSpc>
+                <a:spcPts val="2200"/>
+              </a:lnSpc>
+              <a:spcAft>
+                <a:spcPts val="1000"/>
+              </a:spcAft>
+              <a:defRPr sz="2000" b="0">
+                <a:solidFill>
+                  <a:srgbClr val="333333"/>
+                </a:solidFill>
+                <a:latin typeface="Calibri"/>
+              </a:defRPr>
+            </a:pPr>
+            <a:r>
+              <a:t>• Complete module8/CHECKLIST.md</a:t>
+            </a:r>
+          </a:p>
+          <a:p>
+            <a:pPr>
+              <a:lnSpc>
+                <a:spcPts val="2200"/>
+              </a:lnSpc>
+              <a:spcAft>
+                <a:spcPts val="1000"/>
+              </a:spcAft>
+              <a:defRPr sz="2000" b="0">
+                <a:solidFill>
+                  <a:srgbClr val="333333"/>
+                </a:solidFill>
+                <a:latin typeface="Calibri"/>
+              </a:defRPr>
+            </a:pPr>
+            <a:r>
+              <a:t>• Review module8/EXAMPLES.md and run each lab</a:t>
+            </a:r>
+          </a:p>
+          <a:p>
+            <a:pPr>
+              <a:lnSpc>
+                <a:spcPts val="2200"/>
+              </a:lnSpc>
+              <a:spcAft>
+                <a:spcPts val="1000"/>
+              </a:spcAft>
+              <a:defRPr sz="2000" b="0">
+                <a:solidFill>
+                  <a:srgbClr val="333333"/>
+                </a:solidFill>
+                <a:latin typeface="Calibri"/>
+              </a:defRPr>
+            </a:pPr>
+            <a:r>
+              <a:t>• Next: Next module in course</a:t>
+            </a:r>
+          </a:p>
+        </p:txBody>
+      </p:sp>
+      <p:sp>
+        <p:nvSpPr>
+          <p:cNvPr id="4" name="TextBox 3"/>
+          <p:cNvSpPr txBox="1"/>
+          <p:nvPr/>
+        </p:nvSpPr>
+        <p:spPr>
+          <a:xfrm>
+            <a:off x="548640" y="6355080"/>
+            <a:ext cx="11064240" cy="320040"/>
+          </a:xfrm>
+          <a:prstGeom prst="rect">
+            <a:avLst/>
+          </a:prstGeom>
+          <a:noFill/>
+        </p:spPr>
+        <p:txBody>
+          <a:bodyPr wrap="square">
+            <a:noAutofit/>
+          </a:bodyPr>
+          <a:lstStyle/>
+          <a:p>
+            <a:pPr algn="r">
+              <a:lnSpc>
+                <a:spcPts val="2200"/>
+              </a:lnSpc>
+              <a:defRPr sz="1000" b="0">
+                <a:solidFill>
+                  <a:srgbClr val="666666"/>
+                </a:solidFill>
+                <a:latin typeface="Calibri"/>
+              </a:defRPr>
+            </a:pPr>
+            <a:r>
+              <a:t>verification_planning_management / Module 8</a:t>
+            </a:r>
+          </a:p>
+        </p:txBody>
+      </p:sp>
+    </p:spTree>
+  </p:cSld>
+  <p:clrMapOvr>
+    <a:masterClrMapping/>
+  </p:clrMapOvr>
+</p:sld>
+</file>
+
 <file path=ppt/slides/slide4.xml><?xml version="1.0" encoding="utf-8"?>
 <p:sld xmlns:a="http://schemas.openxmlformats.org/drawingml/2006/main" xmlns:p="http://schemas.openxmlformats.org/presentationml/2006/main" xmlns:r="http://schemas.openxmlformats.org/officeDocument/2006/relationships">
   <p:cSld>
@@ -8508,7 +11014,7 @@
               </a:defRPr>
             </a:pPr>
             <a:r>
-              <a:t>Design architecture</a:t>
+              <a:t>How to learn this module</a:t>
             </a:r>
           </a:p>
         </p:txBody>
@@ -8604,7 +11110,7 @@
               </a:defRPr>
             </a:pPr>
             <a:r>
-              <a:t>1. Capstone system architecture</a:t>
+              <a:t>Suggested learning path</a:t>
             </a:r>
           </a:p>
         </p:txBody>
@@ -8618,7 +11124,7 @@
         <p:spPr>
           <a:xfrm>
             <a:off x="548640" y="1234440"/>
-            <a:ext cx="5303520" cy="4754880"/>
+            <a:ext cx="11064240" cy="4937760"/>
           </a:xfrm>
           <a:prstGeom prst="rect">
             <a:avLst/>
@@ -8646,7 +11152,7 @@
               </a:defRPr>
             </a:pPr>
             <a:r>
-              <a:t>• `CAPSTONE_PROJECT.md` defines</a:t>
+              <a:t>• Select capstone DUT and scope in</a:t>
             </a:r>
           </a:p>
           <a:p>
@@ -8665,7 +11171,7 @@
               </a:defRPr>
             </a:pPr>
             <a:r>
-              <a:t>      DUT hierarchy, interfaces,</a:t>
+              <a:t>      `module8/CAPSTONE_PROJECT.md`.</a:t>
             </a:r>
           </a:p>
           <a:p>
@@ -8684,7 +11190,7 @@
               </a:defRPr>
             </a:pPr>
             <a:r>
-              <a:t>      clocks, and verification scope.</a:t>
+              <a:t>• Scaffold Module 8 workspace: `./scripts/module8.sh</a:t>
             </a:r>
           </a:p>
           <a:p>
@@ -8703,7 +11209,7 @@
               </a:defRPr>
             </a:pPr>
             <a:r>
-              <a:t>• Apply Modules 1–7 artifacts:</a:t>
+              <a:t>      --scaffold`</a:t>
             </a:r>
           </a:p>
           <a:p>
@@ -8722,7 +11228,7 @@
               </a:defRPr>
             </a:pPr>
             <a:r>
-              <a:t>      plans, env, VIP (if applicable),</a:t>
+              <a:t>• Assemble artifacts from Modules 1–7: plans, env,</a:t>
             </a:r>
           </a:p>
           <a:p>
@@ -8741,7 +11247,7 @@
               </a:defRPr>
             </a:pPr>
             <a:r>
-              <a:t>      coverage, regression ops.</a:t>
+              <a:t>      coverage, regression ops, VIP (if applicable).</a:t>
             </a:r>
           </a:p>
           <a:p>
@@ -8760,7 +11266,7 @@
               </a:defRPr>
             </a:pPr>
             <a:r>
-              <a:t>• Deliverable layout: RTL, UVM</a:t>
+              <a:t>• Run full regression tiers and document sign-off</a:t>
             </a:r>
           </a:p>
           <a:p>
@@ -8779,7 +11285,7 @@
               </a:defRPr>
             </a:pPr>
             <a:r>
-              <a:t>      env, tests, scripts, and user-</a:t>
+              <a:t>      status in the capstone checklist.</a:t>
             </a:r>
           </a:p>
           <a:p>
@@ -8798,38 +11304,33 @@
               </a:defRPr>
             </a:pPr>
             <a:r>
-              <a:t>      facing documentation.</a:t>
-            </a:r>
-          </a:p>
-        </p:txBody>
-      </p:sp>
-      <p:pic>
-        <p:nvPicPr>
-          <p:cNvPr id="4" name="Picture 3" descr="rtl_architecture.png"/>
-          <p:cNvPicPr>
-            <a:picLocks noChangeAspect="1"/>
-          </p:cNvPicPr>
-          <p:nvPr/>
-        </p:nvPicPr>
-        <p:blipFill>
-          <a:blip r:embed="rId2"/>
-          <a:stretch>
-            <a:fillRect/>
-          </a:stretch>
-        </p:blipFill>
-        <p:spPr>
-          <a:xfrm>
-            <a:off x="6172200" y="2094547"/>
-            <a:ext cx="5394960" cy="3034665"/>
-          </a:xfrm>
-          <a:prstGeom prst="rect">
-            <a:avLst/>
-          </a:prstGeom>
-        </p:spPr>
-      </p:pic>
-      <p:sp>
-        <p:nvSpPr>
-          <p:cNvPr id="5" name="TextBox 4"/>
+              <a:t>• Validate deliverable completeness:</a:t>
+            </a:r>
+          </a:p>
+          <a:p>
+            <a:pPr>
+              <a:lnSpc>
+                <a:spcPts val="2200"/>
+              </a:lnSpc>
+              <a:spcAft>
+                <a:spcPts val="1000"/>
+              </a:spcAft>
+              <a:defRPr sz="2000" b="0">
+                <a:solidFill>
+                  <a:srgbClr val="333333"/>
+                </a:solidFill>
+                <a:latin typeface="Calibri"/>
+              </a:defRPr>
+            </a:pPr>
+            <a:r>
+              <a:t>      `./scripts/module8.sh --check`</a:t>
+            </a:r>
+          </a:p>
+        </p:txBody>
+      </p:sp>
+      <p:sp>
+        <p:nvSpPr>
+          <p:cNvPr id="4" name="TextBox 3"/>
           <p:cNvSpPr txBox="1"/>
           <p:nvPr/>
         </p:nvSpPr>
@@ -8892,8 +11393,8 @@
         </p:nvSpPr>
         <p:spPr>
           <a:xfrm>
-            <a:off x="548640" y="411480"/>
-            <a:ext cx="11064240" cy="777240"/>
+            <a:off x="548640" y="2743200"/>
+            <a:ext cx="11064240" cy="1371600"/>
           </a:xfrm>
           <a:prstGeom prst="rect">
             <a:avLst/>
@@ -8906,11 +11407,11 @@
           </a:bodyPr>
           <a:lstStyle/>
           <a:p>
-            <a:pPr>
-              <a:lnSpc>
-                <a:spcPts val="2200"/>
-              </a:lnSpc>
-              <a:defRPr sz="2800" b="1">
+            <a:pPr algn="ctr">
+              <a:lnSpc>
+                <a:spcPts val="2200"/>
+              </a:lnSpc>
+              <a:defRPr sz="3600" b="1">
                 <a:solidFill>
                   <a:srgbClr val="1A1A2E"/>
                 </a:solidFill>
@@ -8918,7 +11419,7 @@
               </a:defRPr>
             </a:pPr>
             <a:r>
-              <a:t>2. End-to-end verification package</a:t>
+              <a:t>Design architecture</a:t>
             </a:r>
           </a:p>
         </p:txBody>
@@ -8926,167 +11427,6 @@
       <p:sp>
         <p:nvSpPr>
           <p:cNvPr id="3" name="TextBox 2"/>
-          <p:cNvSpPr txBox="1"/>
-          <p:nvPr/>
-        </p:nvSpPr>
-        <p:spPr>
-          <a:xfrm>
-            <a:off x="548640" y="1234440"/>
-            <a:ext cx="5303520" cy="4754880"/>
-          </a:xfrm>
-          <a:prstGeom prst="rect">
-            <a:avLst/>
-          </a:prstGeom>
-          <a:noFill/>
-        </p:spPr>
-        <p:txBody>
-          <a:bodyPr wrap="square">
-            <a:noAutofit/>
-          </a:bodyPr>
-          <a:lstStyle/>
-          <a:p>
-            <a:pPr>
-              <a:lnSpc>
-                <a:spcPts val="2200"/>
-              </a:lnSpc>
-              <a:spcAft>
-                <a:spcPts val="1000"/>
-              </a:spcAft>
-              <a:defRPr sz="2000" b="0">
-                <a:solidFill>
-                  <a:srgbClr val="333333"/>
-                </a:solidFill>
-                <a:latin typeface="Calibri"/>
-              </a:defRPr>
-            </a:pPr>
-            <a:r>
-              <a:t>• Single coherent verification</a:t>
-            </a:r>
-          </a:p>
-          <a:p>
-            <a:pPr>
-              <a:lnSpc>
-                <a:spcPts val="2200"/>
-              </a:lnSpc>
-              <a:spcAft>
-                <a:spcPts val="1000"/>
-              </a:spcAft>
-              <a:defRPr sz="2000" b="0">
-                <a:solidFill>
-                  <a:srgbClr val="333333"/>
-                </a:solidFill>
-                <a:latin typeface="Calibri"/>
-              </a:defRPr>
-            </a:pPr>
-            <a:r>
-              <a:t>      solution or VIP another team can</a:t>
-            </a:r>
-          </a:p>
-          <a:p>
-            <a:pPr>
-              <a:lnSpc>
-                <a:spcPts val="2200"/>
-              </a:lnSpc>
-              <a:spcAft>
-                <a:spcPts val="1000"/>
-              </a:spcAft>
-              <a:defRPr sz="2000" b="0">
-                <a:solidFill>
-                  <a:srgbClr val="333333"/>
-                </a:solidFill>
-                <a:latin typeface="Calibri"/>
-              </a:defRPr>
-            </a:pPr>
-            <a:r>
-              <a:t>      integrate.</a:t>
-            </a:r>
-          </a:p>
-          <a:p>
-            <a:pPr>
-              <a:lnSpc>
-                <a:spcPts val="2200"/>
-              </a:lnSpc>
-              <a:spcAft>
-                <a:spcPts val="1000"/>
-              </a:spcAft>
-              <a:defRPr sz="2000" b="0">
-                <a:solidFill>
-                  <a:srgbClr val="333333"/>
-                </a:solidFill>
-                <a:latin typeface="Calibri"/>
-              </a:defRPr>
-            </a:pPr>
-            <a:r>
-              <a:t>• Traceability matrix from</a:t>
-            </a:r>
-          </a:p>
-          <a:p>
-            <a:pPr>
-              <a:lnSpc>
-                <a:spcPts val="2200"/>
-              </a:lnSpc>
-              <a:spcAft>
-                <a:spcPts val="1000"/>
-              </a:spcAft>
-              <a:defRPr sz="2000" b="0">
-                <a:solidFill>
-                  <a:srgbClr val="333333"/>
-                </a:solidFill>
-                <a:latin typeface="Calibri"/>
-              </a:defRPr>
-            </a:pPr>
-            <a:r>
-              <a:t>      requirements through tests,</a:t>
-            </a:r>
-          </a:p>
-          <a:p>
-            <a:pPr>
-              <a:lnSpc>
-                <a:spcPts val="2200"/>
-              </a:lnSpc>
-              <a:spcAft>
-                <a:spcPts val="1000"/>
-              </a:spcAft>
-              <a:defRPr sz="2000" b="0">
-                <a:solidFill>
-                  <a:srgbClr val="333333"/>
-                </a:solidFill>
-                <a:latin typeface="Calibri"/>
-              </a:defRPr>
-            </a:pPr>
-            <a:r>
-              <a:t>      coverage, and sign-off criteria.</a:t>
-            </a:r>
-          </a:p>
-        </p:txBody>
-      </p:sp>
-      <p:pic>
-        <p:nvPicPr>
-          <p:cNvPr id="4" name="Picture 3" descr="verification_architecture.png"/>
-          <p:cNvPicPr>
-            <a:picLocks noChangeAspect="1"/>
-          </p:cNvPicPr>
-          <p:nvPr/>
-        </p:nvPicPr>
-        <p:blipFill>
-          <a:blip r:embed="rId2"/>
-          <a:stretch>
-            <a:fillRect/>
-          </a:stretch>
-        </p:blipFill>
-        <p:spPr>
-          <a:xfrm>
-            <a:off x="6172200" y="2094547"/>
-            <a:ext cx="5394960" cy="3034665"/>
-          </a:xfrm>
-          <a:prstGeom prst="rect">
-            <a:avLst/>
-          </a:prstGeom>
-        </p:spPr>
-      </p:pic>
-      <p:sp>
-        <p:nvSpPr>
-          <p:cNvPr id="5" name="TextBox 4"/>
           <p:cNvSpPr txBox="1"/>
           <p:nvPr/>
         </p:nvSpPr>
@@ -9175,7 +11515,7 @@
               </a:defRPr>
             </a:pPr>
             <a:r>
-              <a:t>Capstone project plan template</a:t>
+              <a:t>1. Capstone system architecture</a:t>
             </a:r>
           </a:p>
         </p:txBody>
@@ -9188,15 +11528,13 @@
         </p:nvSpPr>
         <p:spPr>
           <a:xfrm>
-            <a:off x="548640" y="1143000"/>
-            <a:ext cx="11064240" cy="5029200"/>
+            <a:off x="548640" y="1234440"/>
+            <a:ext cx="5303520" cy="4754880"/>
           </a:xfrm>
           <a:prstGeom prst="rect">
             <a:avLst/>
           </a:prstGeom>
-          <a:solidFill>
-            <a:srgbClr val="F4F4F4"/>
-          </a:solidFill>
+          <a:noFill/>
         </p:spPr>
         <p:txBody>
           <a:bodyPr wrap="square">
@@ -9209,329 +11547,200 @@
                 <a:spcPts val="2200"/>
               </a:lnSpc>
               <a:spcAft>
-                <a:spcPts val="400"/>
-              </a:spcAft>
-              <a:defRPr sz="2000" b="0">
-                <a:solidFill>
-                  <a:srgbClr val="333333"/>
-                </a:solidFill>
-                <a:latin typeface="Consolas"/>
-              </a:defRPr>
-            </a:pPr>
-            <a:r>
-              <a:t># Capstone Project Plan (Module 8)</a:t>
-            </a:r>
-          </a:p>
-          <a:p>
-            <a:pPr>
-              <a:lnSpc>
-                <a:spcPts val="2200"/>
-              </a:lnSpc>
-              <a:spcAft>
-                <a:spcPts val="400"/>
-              </a:spcAft>
-              <a:defRPr sz="2000" b="0">
-                <a:solidFill>
-                  <a:srgbClr val="333333"/>
-                </a:solidFill>
-                <a:latin typeface="Consolas"/>
-              </a:defRPr>
-            </a:pPr>
-          </a:p>
-          <a:p>
-            <a:pPr>
-              <a:lnSpc>
-                <a:spcPts val="2200"/>
-              </a:lnSpc>
-              <a:spcAft>
-                <a:spcPts val="400"/>
-              </a:spcAft>
-              <a:defRPr sz="2000" b="0">
-                <a:solidFill>
-                  <a:srgbClr val="333333"/>
-                </a:solidFill>
-                <a:latin typeface="Consolas"/>
-              </a:defRPr>
-            </a:pPr>
-            <a:r>
-              <a:t>&gt; **Purpose**: Define and track your major end‑to‑end verification or</a:t>
-            </a:r>
-          </a:p>
-          <a:p>
-            <a:pPr>
-              <a:lnSpc>
-                <a:spcPts val="2200"/>
-              </a:lnSpc>
-              <a:spcAft>
-                <a:spcPts val="400"/>
-              </a:spcAft>
-              <a:defRPr sz="2000" b="0">
-                <a:solidFill>
-                  <a:srgbClr val="333333"/>
-                </a:solidFill>
-                <a:latin typeface="Consolas"/>
-              </a:defRPr>
-            </a:pPr>
-            <a:r>
-              <a:t>VIP project.</a:t>
-            </a:r>
-          </a:p>
-          <a:p>
-            <a:pPr>
-              <a:lnSpc>
-                <a:spcPts val="2200"/>
-              </a:lnSpc>
-              <a:spcAft>
-                <a:spcPts val="400"/>
-              </a:spcAft>
-              <a:defRPr sz="2000" b="0">
-                <a:solidFill>
-                  <a:srgbClr val="333333"/>
-                </a:solidFill>
-                <a:latin typeface="Consolas"/>
-              </a:defRPr>
-            </a:pPr>
-            <a:r>
-              <a:t>&gt; **Module**: 8 – Capstone: End‑to‑End Verification &amp; VIP Delivery</a:t>
-            </a:r>
-          </a:p>
-          <a:p>
-            <a:pPr>
-              <a:lnSpc>
-                <a:spcPts val="2200"/>
-              </a:lnSpc>
-              <a:spcAft>
-                <a:spcPts val="400"/>
-              </a:spcAft>
-              <a:defRPr sz="2000" b="0">
-                <a:solidFill>
-                  <a:srgbClr val="333333"/>
-                </a:solidFill>
-                <a:latin typeface="Consolas"/>
-              </a:defRPr>
-            </a:pPr>
-            <a:r>
-              <a:t>(SV/UVM)</a:t>
-            </a:r>
-          </a:p>
-          <a:p>
-            <a:pPr>
-              <a:lnSpc>
-                <a:spcPts val="2200"/>
-              </a:lnSpc>
-              <a:spcAft>
-                <a:spcPts val="400"/>
-              </a:spcAft>
-              <a:defRPr sz="2000" b="0">
-                <a:solidFill>
-                  <a:srgbClr val="333333"/>
-                </a:solidFill>
-                <a:latin typeface="Consolas"/>
-              </a:defRPr>
-            </a:pPr>
-          </a:p>
-          <a:p>
-            <a:pPr>
-              <a:lnSpc>
-                <a:spcPts val="2200"/>
-              </a:lnSpc>
-              <a:spcAft>
-                <a:spcPts val="400"/>
-              </a:spcAft>
-              <a:defRPr sz="2000" b="0">
-                <a:solidFill>
-                  <a:srgbClr val="333333"/>
-                </a:solidFill>
-                <a:latin typeface="Consolas"/>
-              </a:defRPr>
-            </a:pPr>
-            <a:r>
-              <a:t>&gt; **Instructions**: Fill in this document for your design. Copy from</a:t>
-            </a:r>
-          </a:p>
-          <a:p>
-            <a:pPr>
-              <a:lnSpc>
-                <a:spcPts val="2200"/>
-              </a:lnSpc>
-              <a:spcAft>
-                <a:spcPts val="400"/>
-              </a:spcAft>
-              <a:defRPr sz="2000" b="0">
-                <a:solidFill>
-                  <a:srgbClr val="333333"/>
-                </a:solidFill>
-                <a:latin typeface="Consolas"/>
-              </a:defRPr>
-            </a:pPr>
-            <a:r>
-              <a:t>`module8/templates/` if needed, or edit the file in `module8/` directly.</a:t>
-            </a:r>
-          </a:p>
-          <a:p>
-            <a:pPr>
-              <a:lnSpc>
-                <a:spcPts val="2200"/>
-              </a:lnSpc>
-              <a:spcAft>
-                <a:spcPts val="400"/>
-              </a:spcAft>
-              <a:defRPr sz="2000" b="0">
-                <a:solidFill>
-                  <a:srgbClr val="333333"/>
-                </a:solidFill>
-                <a:latin typeface="Consolas"/>
-              </a:defRPr>
-            </a:pPr>
-            <a:r>
-              <a:t>Reference: `module8/.solutions/`.</a:t>
-            </a:r>
-          </a:p>
-          <a:p>
-            <a:pPr>
-              <a:lnSpc>
-                <a:spcPts val="2200"/>
-              </a:lnSpc>
-              <a:spcAft>
-                <a:spcPts val="400"/>
-              </a:spcAft>
-              <a:defRPr sz="2000" b="0">
-                <a:solidFill>
-                  <a:srgbClr val="333333"/>
-                </a:solidFill>
-                <a:latin typeface="Consolas"/>
-              </a:defRPr>
-            </a:pPr>
-          </a:p>
-          <a:p>
-            <a:pPr>
-              <a:lnSpc>
-                <a:spcPts val="2200"/>
-              </a:lnSpc>
-              <a:spcAft>
-                <a:spcPts val="400"/>
-              </a:spcAft>
-              <a:defRPr sz="2000" b="0">
-                <a:solidFill>
-                  <a:srgbClr val="333333"/>
-                </a:solidFill>
-                <a:latin typeface="Consolas"/>
-              </a:defRPr>
-            </a:pPr>
-            <a:r>
-              <a:t>## 1. Capstone Choice</a:t>
-            </a:r>
-          </a:p>
-          <a:p>
-            <a:pPr>
-              <a:lnSpc>
-                <a:spcPts val="2200"/>
-              </a:lnSpc>
-              <a:spcAft>
-                <a:spcPts val="400"/>
-              </a:spcAft>
-              <a:defRPr sz="2000" b="0">
-                <a:solidFill>
-                  <a:srgbClr val="333333"/>
-                </a:solidFill>
-                <a:latin typeface="Consolas"/>
-              </a:defRPr>
-            </a:pPr>
-          </a:p>
-          <a:p>
-            <a:pPr>
-              <a:lnSpc>
-                <a:spcPts val="2200"/>
-              </a:lnSpc>
-              <a:spcAft>
-                <a:spcPts val="400"/>
-              </a:spcAft>
-              <a:defRPr sz="2000" b="0">
-                <a:solidFill>
-                  <a:srgbClr val="333333"/>
-                </a:solidFill>
-                <a:latin typeface="Consolas"/>
-              </a:defRPr>
-            </a:pPr>
-            <a:r>
-              <a:t>&lt;!-- TODO: Project ID/Name, brief description, type</a:t>
-            </a:r>
-          </a:p>
-          <a:p>
-            <a:pPr>
-              <a:lnSpc>
-                <a:spcPts val="2200"/>
-              </a:lnSpc>
-              <a:spcAft>
-                <a:spcPts val="400"/>
-              </a:spcAft>
-              <a:defRPr sz="2000" b="0">
-                <a:solidFill>
-                  <a:srgbClr val="333333"/>
-                </a:solidFill>
-                <a:latin typeface="Consolas"/>
-              </a:defRPr>
-            </a:pPr>
-            <a:r>
-              <a:t>(block/subsystem/VIP). --&gt;</a:t>
-            </a:r>
-          </a:p>
-          <a:p>
-            <a:pPr>
-              <a:lnSpc>
-                <a:spcPts val="2200"/>
-              </a:lnSpc>
-              <a:spcAft>
-                <a:spcPts val="400"/>
-              </a:spcAft>
-              <a:defRPr sz="2000" b="0">
-                <a:solidFill>
-                  <a:srgbClr val="333333"/>
-                </a:solidFill>
-                <a:latin typeface="Consolas"/>
-              </a:defRPr>
-            </a:pPr>
-          </a:p>
-          <a:p>
-            <a:pPr>
-              <a:lnSpc>
-                <a:spcPts val="2200"/>
-              </a:lnSpc>
-              <a:spcAft>
-                <a:spcPts val="400"/>
-              </a:spcAft>
-              <a:defRPr sz="2000" b="0">
-                <a:solidFill>
-                  <a:srgbClr val="333333"/>
-                </a:solidFill>
-                <a:latin typeface="Consolas"/>
-              </a:defRPr>
-            </a:pPr>
-            <a:r>
-              <a:t>## 2. Requirements and Goals</a:t>
-            </a:r>
-          </a:p>
-          <a:p>
-            <a:pPr>
-              <a:lnSpc>
-                <a:spcPts val="2200"/>
-              </a:lnSpc>
-              <a:spcAft>
-                <a:spcPts val="400"/>
-              </a:spcAft>
-              <a:defRPr sz="2000" b="0">
-                <a:solidFill>
-                  <a:srgbClr val="333333"/>
-                </a:solidFill>
-                <a:latin typeface="Consolas"/>
-              </a:defRPr>
-            </a:pPr>
-          </a:p>
-        </p:txBody>
-      </p:sp>
-      <p:sp>
-        <p:nvSpPr>
-          <p:cNvPr id="4" name="TextBox 3"/>
+                <a:spcPts val="1000"/>
+              </a:spcAft>
+              <a:defRPr sz="2000" b="0">
+                <a:solidFill>
+                  <a:srgbClr val="333333"/>
+                </a:solidFill>
+                <a:latin typeface="Calibri"/>
+              </a:defRPr>
+            </a:pPr>
+            <a:r>
+              <a:t>• `CAPSTONE_PROJECT.md` defines</a:t>
+            </a:r>
+          </a:p>
+          <a:p>
+            <a:pPr>
+              <a:lnSpc>
+                <a:spcPts val="2200"/>
+              </a:lnSpc>
+              <a:spcAft>
+                <a:spcPts val="1000"/>
+              </a:spcAft>
+              <a:defRPr sz="2000" b="0">
+                <a:solidFill>
+                  <a:srgbClr val="333333"/>
+                </a:solidFill>
+                <a:latin typeface="Calibri"/>
+              </a:defRPr>
+            </a:pPr>
+            <a:r>
+              <a:t>      DUT hierarchy, interfaces,</a:t>
+            </a:r>
+          </a:p>
+          <a:p>
+            <a:pPr>
+              <a:lnSpc>
+                <a:spcPts val="2200"/>
+              </a:lnSpc>
+              <a:spcAft>
+                <a:spcPts val="1000"/>
+              </a:spcAft>
+              <a:defRPr sz="2000" b="0">
+                <a:solidFill>
+                  <a:srgbClr val="333333"/>
+                </a:solidFill>
+                <a:latin typeface="Calibri"/>
+              </a:defRPr>
+            </a:pPr>
+            <a:r>
+              <a:t>      clocks, and verification scope.</a:t>
+            </a:r>
+          </a:p>
+          <a:p>
+            <a:pPr>
+              <a:lnSpc>
+                <a:spcPts val="2200"/>
+              </a:lnSpc>
+              <a:spcAft>
+                <a:spcPts val="1000"/>
+              </a:spcAft>
+              <a:defRPr sz="2000" b="0">
+                <a:solidFill>
+                  <a:srgbClr val="333333"/>
+                </a:solidFill>
+                <a:latin typeface="Calibri"/>
+              </a:defRPr>
+            </a:pPr>
+            <a:r>
+              <a:t>• Apply Modules 1–7 artifacts:</a:t>
+            </a:r>
+          </a:p>
+          <a:p>
+            <a:pPr>
+              <a:lnSpc>
+                <a:spcPts val="2200"/>
+              </a:lnSpc>
+              <a:spcAft>
+                <a:spcPts val="1000"/>
+              </a:spcAft>
+              <a:defRPr sz="2000" b="0">
+                <a:solidFill>
+                  <a:srgbClr val="333333"/>
+                </a:solidFill>
+                <a:latin typeface="Calibri"/>
+              </a:defRPr>
+            </a:pPr>
+            <a:r>
+              <a:t>      plans, env, VIP (if applicable),</a:t>
+            </a:r>
+          </a:p>
+          <a:p>
+            <a:pPr>
+              <a:lnSpc>
+                <a:spcPts val="2200"/>
+              </a:lnSpc>
+              <a:spcAft>
+                <a:spcPts val="1000"/>
+              </a:spcAft>
+              <a:defRPr sz="2000" b="0">
+                <a:solidFill>
+                  <a:srgbClr val="333333"/>
+                </a:solidFill>
+                <a:latin typeface="Calibri"/>
+              </a:defRPr>
+            </a:pPr>
+            <a:r>
+              <a:t>      coverage, regression ops.</a:t>
+            </a:r>
+          </a:p>
+          <a:p>
+            <a:pPr>
+              <a:lnSpc>
+                <a:spcPts val="2200"/>
+              </a:lnSpc>
+              <a:spcAft>
+                <a:spcPts val="1000"/>
+              </a:spcAft>
+              <a:defRPr sz="2000" b="0">
+                <a:solidFill>
+                  <a:srgbClr val="333333"/>
+                </a:solidFill>
+                <a:latin typeface="Calibri"/>
+              </a:defRPr>
+            </a:pPr>
+            <a:r>
+              <a:t>• Deliverable layout: RTL, UVM</a:t>
+            </a:r>
+          </a:p>
+          <a:p>
+            <a:pPr>
+              <a:lnSpc>
+                <a:spcPts val="2200"/>
+              </a:lnSpc>
+              <a:spcAft>
+                <a:spcPts val="1000"/>
+              </a:spcAft>
+              <a:defRPr sz="2000" b="0">
+                <a:solidFill>
+                  <a:srgbClr val="333333"/>
+                </a:solidFill>
+                <a:latin typeface="Calibri"/>
+              </a:defRPr>
+            </a:pPr>
+            <a:r>
+              <a:t>      env, tests, scripts, and user-</a:t>
+            </a:r>
+          </a:p>
+          <a:p>
+            <a:pPr>
+              <a:lnSpc>
+                <a:spcPts val="2200"/>
+              </a:lnSpc>
+              <a:spcAft>
+                <a:spcPts val="1000"/>
+              </a:spcAft>
+              <a:defRPr sz="2000" b="0">
+                <a:solidFill>
+                  <a:srgbClr val="333333"/>
+                </a:solidFill>
+                <a:latin typeface="Calibri"/>
+              </a:defRPr>
+            </a:pPr>
+            <a:r>
+              <a:t>      facing documentation.</a:t>
+            </a:r>
+          </a:p>
+        </p:txBody>
+      </p:sp>
+      <p:pic>
+        <p:nvPicPr>
+          <p:cNvPr id="4" name="Picture 3" descr="rtl_architecture.png"/>
+          <p:cNvPicPr>
+            <a:picLocks noChangeAspect="1"/>
+          </p:cNvPicPr>
+          <p:nvPr/>
+        </p:nvPicPr>
+        <p:blipFill>
+          <a:blip r:embed="rId2"/>
+          <a:stretch>
+            <a:fillRect/>
+          </a:stretch>
+        </p:blipFill>
+        <p:spPr>
+          <a:xfrm>
+            <a:off x="6172200" y="2094547"/>
+            <a:ext cx="5394960" cy="3034665"/>
+          </a:xfrm>
+          <a:prstGeom prst="rect">
+            <a:avLst/>
+          </a:prstGeom>
+        </p:spPr>
+      </p:pic>
+      <p:sp>
+        <p:nvSpPr>
+          <p:cNvPr id="5" name="TextBox 4"/>
           <p:cNvSpPr txBox="1"/>
           <p:nvPr/>
         </p:nvSpPr>
